--- a/cai-shioya-12.pptx
+++ b/cai-shioya-12.pptx
@@ -5,10 +5,10 @@
     <p:sldMasterId id="2147483664" r:id="rId1"/>
   </p:sldMasterIdLst>
   <p:notesMasterIdLst>
-    <p:notesMasterId r:id="rId35"/>
+    <p:notesMasterId r:id="rId27"/>
   </p:notesMasterIdLst>
   <p:handoutMasterIdLst>
-    <p:handoutMasterId r:id="rId36"/>
+    <p:handoutMasterId r:id="rId28"/>
   </p:handoutMasterIdLst>
   <p:sldIdLst>
     <p:sldId id="455" r:id="rId2"/>
@@ -34,21 +34,13 @@
     <p:sldId id="1202" r:id="rId22"/>
     <p:sldId id="1203" r:id="rId23"/>
     <p:sldId id="1204" r:id="rId24"/>
-    <p:sldId id="1129" r:id="rId25"/>
-    <p:sldId id="1205" r:id="rId26"/>
-    <p:sldId id="721" r:id="rId27"/>
-    <p:sldId id="1206" r:id="rId28"/>
-    <p:sldId id="1207" r:id="rId29"/>
-    <p:sldId id="1211" r:id="rId30"/>
-    <p:sldId id="1208" r:id="rId31"/>
-    <p:sldId id="1209" r:id="rId32"/>
-    <p:sldId id="1210" r:id="rId33"/>
-    <p:sldId id="1175" r:id="rId34"/>
+    <p:sldId id="1205" r:id="rId25"/>
+    <p:sldId id="1175" r:id="rId26"/>
   </p:sldIdLst>
   <p:sldSz cx="9144000" cy="6858000" type="screen4x3"/>
   <p:notesSz cx="6858000" cy="9144000"/>
   <p:custDataLst>
-    <p:tags r:id="rId37"/>
+    <p:tags r:id="rId29"/>
   </p:custDataLst>
   <p:defaultTextStyle>
     <a:defPPr>
@@ -261,7 +253,7 @@
           <a:p>
             <a:fld id="{6F0D877F-F984-4AF8-9DD3-1EDD0240AB14}" type="datetimeFigureOut">
               <a:rPr kumimoji="1" lang="en-US" smtClean="0"/>
-              <a:t>7/23/2024</a:t>
+              <a:t>8/1/2025</a:t>
             </a:fld>
             <a:endParaRPr kumimoji="1" lang="en-US"/>
           </a:p>
@@ -438,7 +430,7 @@
           <a:p>
             <a:fld id="{BC56210E-A5EE-4707-8EFD-B2050EBAA0B3}" type="datetimeFigureOut">
               <a:rPr kumimoji="1" lang="ja-JP" altLang="en-US" smtClean="0"/>
-              <a:t>2024/7/23</a:t>
+              <a:t>2025/8/1</a:t>
             </a:fld>
             <a:endParaRPr kumimoji="1" lang="ja-JP" altLang="en-US"/>
           </a:p>
@@ -735,90 +727,6 @@
     </a:lvl9pPr>
   </p:notesStyle>
 </p:notesMaster>
-</file>
-
-<file path=ppt/notesSlides/notesSlide1.xml><?xml version="1.0" encoding="utf-8"?>
-<p:notes xmlns:a="http://schemas.openxmlformats.org/drawingml/2006/main" xmlns:r="http://schemas.openxmlformats.org/officeDocument/2006/relationships" xmlns:p="http://schemas.openxmlformats.org/presentationml/2006/main">
-  <p:cSld>
-    <p:spTree>
-      <p:nvGrpSpPr>
-        <p:cNvPr id="1" name=""/>
-        <p:cNvGrpSpPr/>
-        <p:nvPr/>
-      </p:nvGrpSpPr>
-      <p:grpSpPr>
-        <a:xfrm>
-          <a:off x="0" y="0"/>
-          <a:ext cx="0" cy="0"/>
-          <a:chOff x="0" y="0"/>
-          <a:chExt cx="0" cy="0"/>
-        </a:xfrm>
-      </p:grpSpPr>
-      <p:sp>
-        <p:nvSpPr>
-          <p:cNvPr id="2" name="スライド イメージ プレースホルダー 1"/>
-          <p:cNvSpPr>
-            <a:spLocks noGrp="1" noRot="1" noChangeAspect="1"/>
-          </p:cNvSpPr>
-          <p:nvPr>
-            <p:ph type="sldImg"/>
-          </p:nvPr>
-        </p:nvSpPr>
-        <p:spPr/>
-      </p:sp>
-      <p:sp>
-        <p:nvSpPr>
-          <p:cNvPr id="3" name="ノート プレースホルダー 2"/>
-          <p:cNvSpPr>
-            <a:spLocks noGrp="1"/>
-          </p:cNvSpPr>
-          <p:nvPr>
-            <p:ph type="body" idx="1"/>
-          </p:nvPr>
-        </p:nvSpPr>
-        <p:spPr/>
-        <p:txBody>
-          <a:bodyPr/>
-          <a:lstStyle/>
-          <a:p>
-            <a:endParaRPr kumimoji="1" lang="en-US" dirty="0"/>
-          </a:p>
-        </p:txBody>
-      </p:sp>
-      <p:sp>
-        <p:nvSpPr>
-          <p:cNvPr id="4" name="スライド番号プレースホルダー 3"/>
-          <p:cNvSpPr>
-            <a:spLocks noGrp="1"/>
-          </p:cNvSpPr>
-          <p:nvPr>
-            <p:ph type="sldNum" sz="quarter" idx="5"/>
-          </p:nvPr>
-        </p:nvSpPr>
-        <p:spPr/>
-        <p:txBody>
-          <a:bodyPr/>
-          <a:lstStyle/>
-          <a:p>
-            <a:fld id="{02E5C193-8E84-44DA-A08F-24EBD3FDF7D3}" type="slidenum">
-              <a:rPr kumimoji="1" lang="ja-JP" altLang="en-US" smtClean="0"/>
-              <a:t>24</a:t>
-            </a:fld>
-            <a:endParaRPr kumimoji="1" lang="ja-JP" altLang="en-US"/>
-          </a:p>
-        </p:txBody>
-      </p:sp>
-    </p:spTree>
-    <p:extLst>
-      <p:ext uri="{BB962C8B-B14F-4D97-AF65-F5344CB8AC3E}">
-        <p14:creationId xmlns:p14="http://schemas.microsoft.com/office/powerpoint/2010/main" val="618865683"/>
-      </p:ext>
-    </p:extLst>
-  </p:cSld>
-  <p:clrMapOvr>
-    <a:masterClrMapping/>
-  </p:clrMapOvr>
-</p:notes>
 </file>
 
 <file path=ppt/slideLayouts/slideLayout1.xml><?xml version="1.0" encoding="utf-8"?>
@@ -6037,64 +5945,112 @@
           <a:lstStyle/>
           <a:p>
             <a:r>
-              <a:rPr kumimoji="1" lang="en-US" altLang="ja-JP" dirty="0"/>
-              <a:t>7/30 </a:t>
-            </a:r>
-            <a:r>
-              <a:rPr kumimoji="1" lang="ja-JP" altLang="en-US" dirty="0"/>
+              <a:rPr lang="en-US" altLang="ja-JP" dirty="0"/>
+              <a:t>8/5 (</a:t>
+            </a:r>
+            <a:r>
+              <a:rPr lang="ja-JP" altLang="en-US" dirty="0"/>
+              <a:t>火</a:t>
+            </a:r>
+            <a:r>
+              <a:rPr lang="en-US" altLang="ja-JP" dirty="0"/>
+              <a:t>) </a:t>
+            </a:r>
+            <a:r>
+              <a:rPr lang="ja-JP" altLang="en-US" dirty="0"/>
               <a:t>にいつもの講義の時間にここで実施</a:t>
             </a:r>
             <a:endParaRPr lang="en-US" altLang="ja-JP" dirty="0"/>
           </a:p>
           <a:p>
             <a:r>
-              <a:rPr kumimoji="1" lang="en-US" altLang="ja-JP" dirty="0"/>
-              <a:t>A4 </a:t>
-            </a:r>
-            <a:r>
-              <a:rPr kumimoji="1" lang="ja-JP" altLang="en-US" dirty="0"/>
+              <a:rPr lang="en-US" altLang="ja-JP" b="1" dirty="0">
+                <a:solidFill>
+                  <a:schemeClr val="accent5"/>
+                </a:solidFill>
+              </a:rPr>
+              <a:t>A4</a:t>
+            </a:r>
+            <a:r>
+              <a:rPr lang="ja-JP" altLang="en-US" b="1" dirty="0">
+                <a:solidFill>
+                  <a:schemeClr val="accent5"/>
+                </a:solidFill>
+              </a:rPr>
+              <a:t>用紙</a:t>
+            </a:r>
+            <a:r>
+              <a:rPr lang="en-US" altLang="ja-JP" b="1" dirty="0">
+                <a:solidFill>
+                  <a:schemeClr val="accent5"/>
+                </a:solidFill>
+              </a:rPr>
+              <a:t> </a:t>
+            </a:r>
+            <a:r>
+              <a:rPr lang="ja-JP" altLang="en-US" b="1" dirty="0">
+                <a:solidFill>
+                  <a:schemeClr val="accent5"/>
+                </a:solidFill>
+              </a:rPr>
               <a:t>１枚手書きのみの持ち込み可</a:t>
             </a:r>
-            <a:endParaRPr kumimoji="1" lang="en-US" altLang="ja-JP" dirty="0"/>
+            <a:endParaRPr lang="en-US" altLang="ja-JP" b="1" dirty="0">
+              <a:solidFill>
+                <a:schemeClr val="accent5"/>
+              </a:solidFill>
+            </a:endParaRPr>
           </a:p>
           <a:p>
             <a:pPr lvl="1"/>
             <a:r>
-              <a:rPr kumimoji="1" lang="ja-JP" altLang="en-US" dirty="0"/>
+              <a:rPr lang="ja-JP" altLang="en-US" dirty="0"/>
               <a:t>裏表双方へ書き込み可</a:t>
             </a:r>
-            <a:endParaRPr kumimoji="1" lang="en-US" altLang="ja-JP" dirty="0"/>
+            <a:endParaRPr lang="en-US" altLang="ja-JP" dirty="0"/>
           </a:p>
           <a:p>
             <a:pPr lvl="1"/>
             <a:r>
-              <a:rPr kumimoji="1" lang="ja-JP" altLang="en-US" dirty="0"/>
-              <a:t>印刷したものを一部貼り付けるなどはダメ</a:t>
-            </a:r>
-            <a:endParaRPr kumimoji="1" lang="en-US" altLang="ja-JP" dirty="0"/>
+              <a:rPr lang="ja-JP" altLang="en-US" dirty="0"/>
+              <a:t>必ず</a:t>
+            </a:r>
+            <a:r>
+              <a:rPr lang="ja-JP" altLang="en-US" dirty="0">
+                <a:solidFill>
+                  <a:schemeClr val="accent5"/>
+                </a:solidFill>
+              </a:rPr>
+              <a:t>全部完全に手書き</a:t>
+            </a:r>
+            <a:r>
+              <a:rPr lang="ja-JP" altLang="en-US" dirty="0"/>
+              <a:t>にしてください</a:t>
+            </a:r>
+            <a:endParaRPr lang="en-US" altLang="ja-JP" dirty="0"/>
+          </a:p>
+          <a:p>
+            <a:pPr lvl="2"/>
+            <a:r>
+              <a:rPr lang="ja-JP" altLang="en-US" dirty="0"/>
+              <a:t>印刷したものを一部貼り付けるなどもダメ</a:t>
+            </a:r>
+            <a:endParaRPr lang="en-US" altLang="ja-JP" dirty="0"/>
+          </a:p>
+          <a:p>
+            <a:r>
+              <a:rPr lang="ja-JP" altLang="en-US" dirty="0"/>
+              <a:t>基本的に課題で出した部分を中心に出題する予定</a:t>
+            </a:r>
+            <a:endParaRPr lang="en-US" altLang="ja-JP" dirty="0"/>
           </a:p>
           <a:p>
             <a:pPr lvl="1"/>
             <a:r>
-              <a:rPr kumimoji="1" lang="ja-JP" altLang="en-US" dirty="0"/>
-              <a:t>必ず全部完全に手書きにしてください</a:t>
-            </a:r>
-            <a:endParaRPr kumimoji="1" lang="en-US" altLang="ja-JP" dirty="0"/>
-          </a:p>
-          <a:p>
-            <a:r>
-              <a:rPr kumimoji="1" lang="ja-JP" altLang="en-US" dirty="0"/>
-              <a:t>基本的に課題で出した部分を中心に出題する予定</a:t>
-            </a:r>
-            <a:endParaRPr kumimoji="1" lang="en-US" altLang="ja-JP" dirty="0"/>
-          </a:p>
-          <a:p>
-            <a:pPr lvl="1"/>
-            <a:r>
-              <a:rPr kumimoji="1" lang="ja-JP" altLang="en-US" dirty="0"/>
+              <a:rPr lang="ja-JP" altLang="en-US" dirty="0"/>
               <a:t>練習問題と課題を中心に勉強しておいてください</a:t>
             </a:r>
-            <a:endParaRPr kumimoji="1" lang="en-US" altLang="ja-JP" dirty="0"/>
+            <a:endParaRPr lang="en-US" altLang="ja-JP" dirty="0"/>
           </a:p>
         </p:txBody>
       </p:sp>
@@ -6211,7 +6167,7 @@
             <a:pPr lvl="1"/>
             <a:r>
               <a:rPr kumimoji="1" lang="ja-JP" altLang="en-US" dirty="0"/>
-              <a:t>しかし別に必須ではないですし，特に加点もしないです</a:t>
+              <a:t>しかし，今日は別に必須ではないですし，特に加点もしないです</a:t>
             </a:r>
             <a:endParaRPr kumimoji="1" lang="en-US" altLang="ja-JP" dirty="0"/>
           </a:p>
@@ -6383,15 +6339,16 @@
           <a:lstStyle/>
           <a:p>
             <a:r>
-              <a:rPr lang="ja-JP" altLang="en-US" b="0" i="0" dirty="0">
-                <a:solidFill>
-                  <a:srgbClr val="000000"/>
-                </a:solidFill>
-                <a:effectLst/>
-                <a:latin typeface="Meiryo" panose="020B0604030504040204" pitchFamily="50" charset="-128"/>
-                <a:ea typeface="Meiryo" panose="020B0604030504040204" pitchFamily="50" charset="-128"/>
-              </a:rPr>
-              <a:t>ページテーブルの容量と、ページテーブルの面積が一致しているのかなと思って考えていたのですが、何度も計算を間違えてしまって、容量を求めるのが大変でした。最後一致した時はとてもうれしかったです。試験頑張ります。</a:t>
+              <a:rPr lang="ja-JP" altLang="en-US" dirty="0"/>
+              <a:t>カーネルモードでバグが起きるとどうなりますか？</a:t>
+            </a:r>
+            <a:r>
+              <a:rPr lang="en-US" altLang="ja-JP" dirty="0"/>
+              <a:t>OS</a:t>
+            </a:r>
+            <a:r>
+              <a:rPr lang="ja-JP" altLang="en-US" dirty="0"/>
+              <a:t>のソースコード上に、ここからがカーネルモードです、というようなことが書いてあるのでしょうか？</a:t>
             </a:r>
             <a:endParaRPr lang="en-US" dirty="0"/>
           </a:p>
@@ -6423,7 +6380,13 @@
   <p:cSld>
     <p:spTree>
       <p:nvGrpSpPr>
-        <p:cNvPr id="1" name=""/>
+        <p:cNvPr id="1" name="">
+          <a:extLst>
+            <a:ext uri="{FF2B5EF4-FFF2-40B4-BE49-F238E27FC236}">
+              <a16:creationId xmlns:a16="http://schemas.microsoft.com/office/drawing/2014/main" id="{1EFE8480-F961-AF28-A90B-032BE39E54F5}"/>
+            </a:ext>
+          </a:extLst>
+        </p:cNvPr>
         <p:cNvGrpSpPr/>
         <p:nvPr/>
       </p:nvGrpSpPr>
@@ -6440,7 +6403,7 @@
           <p:cNvPr id="2" name="タイトル 1">
             <a:extLst>
               <a:ext uri="{FF2B5EF4-FFF2-40B4-BE49-F238E27FC236}">
-                <a16:creationId xmlns:a16="http://schemas.microsoft.com/office/drawing/2014/main" id="{FAA8EBBD-6456-B940-EE50-E6057DAEC093}"/>
+                <a16:creationId xmlns:a16="http://schemas.microsoft.com/office/drawing/2014/main" id="{2222A242-A9D7-2E5A-7F30-9DD2269A7F59}"/>
               </a:ext>
             </a:extLst>
           </p:cNvPr>
@@ -6474,7 +6437,7 @@
           <p:cNvPr id="3" name="コンテンツ プレースホルダー 2">
             <a:extLst>
               <a:ext uri="{FF2B5EF4-FFF2-40B4-BE49-F238E27FC236}">
-                <a16:creationId xmlns:a16="http://schemas.microsoft.com/office/drawing/2014/main" id="{46C96F0D-39A0-7B53-A71E-67DF1A3CBE56}"/>
+                <a16:creationId xmlns:a16="http://schemas.microsoft.com/office/drawing/2014/main" id="{11C3D8C7-6458-BF6A-5B86-4F0C9F064604}"/>
               </a:ext>
             </a:extLst>
           </p:cNvPr>
@@ -6496,15 +6459,21 @@
           <a:lstStyle/>
           <a:p>
             <a:r>
-              <a:rPr lang="ja-JP" altLang="en-US" b="0" i="0" dirty="0">
-                <a:solidFill>
-                  <a:srgbClr val="000000"/>
-                </a:solidFill>
-                <a:effectLst/>
-                <a:latin typeface="Meiryo" panose="020B0604030504040204" pitchFamily="50" charset="-128"/>
-                <a:ea typeface="Meiryo" panose="020B0604030504040204" pitchFamily="50" charset="-128"/>
-              </a:rPr>
-              <a:t>図ではページテーブルごとに書かれているが、実際は同じメモリ上にのっていることがポイントでした。そのことに気づいてから、ページテーブルの各行のビット数がメモリのビット数が同じことがわかりました。</a:t>
+              <a:rPr lang="ja-JP" altLang="en-US" dirty="0"/>
+              <a:t>今日の仮想メモリ空間の話でシステムプログラミング演習で訳分からずやったものと繋がってよかったです。</a:t>
+            </a:r>
+            <a:endParaRPr lang="en-US" altLang="ja-JP" dirty="0"/>
+          </a:p>
+          <a:p>
+            <a:r>
+              <a:rPr lang="ja-JP" altLang="en-US" dirty="0"/>
+              <a:t>なんならよく分からずに、図をエクセルで作った記憶があります。その時は確かただターミナルで何か打ってどの領域にどれくらい含まれているか見ただけであったので今回割り当ての仕方を教わることができて勉強になった。</a:t>
+            </a:r>
+          </a:p>
+          <a:p>
+            <a:r>
+              <a:rPr lang="ja-JP" altLang="en-US" dirty="0"/>
+              <a:t>この授業を取ることで、今学期のシステムプログラミング実習でなんでやっているのか詳しく分からなかったことがなんとなくわかり、いやいやプログラミングをやらずに済むことができてよかったです。</a:t>
             </a:r>
             <a:endParaRPr lang="en-US" dirty="0"/>
           </a:p>
@@ -6513,7 +6482,7 @@
     </p:spTree>
     <p:extLst>
       <p:ext uri="{BB962C8B-B14F-4D97-AF65-F5344CB8AC3E}">
-        <p14:creationId xmlns:p14="http://schemas.microsoft.com/office/powerpoint/2010/main" val="3998399166"/>
+        <p14:creationId xmlns:p14="http://schemas.microsoft.com/office/powerpoint/2010/main" val="1085440158"/>
       </p:ext>
     </p:extLst>
   </p:cSld>
@@ -6536,7 +6505,13 @@
   <p:cSld>
     <p:spTree>
       <p:nvGrpSpPr>
-        <p:cNvPr id="1" name=""/>
+        <p:cNvPr id="1" name="">
+          <a:extLst>
+            <a:ext uri="{FF2B5EF4-FFF2-40B4-BE49-F238E27FC236}">
+              <a16:creationId xmlns:a16="http://schemas.microsoft.com/office/drawing/2014/main" id="{2CC4B2F6-34CA-8F80-CABB-6537D172A470}"/>
+            </a:ext>
+          </a:extLst>
+        </p:cNvPr>
         <p:cNvGrpSpPr/>
         <p:nvPr/>
       </p:nvGrpSpPr>
@@ -6553,7 +6528,7 @@
           <p:cNvPr id="2" name="タイトル 1">
             <a:extLst>
               <a:ext uri="{FF2B5EF4-FFF2-40B4-BE49-F238E27FC236}">
-                <a16:creationId xmlns:a16="http://schemas.microsoft.com/office/drawing/2014/main" id="{FAA8EBBD-6456-B940-EE50-E6057DAEC093}"/>
+                <a16:creationId xmlns:a16="http://schemas.microsoft.com/office/drawing/2014/main" id="{0323748E-58FF-8A0E-1FB8-4BFC09846CD7}"/>
               </a:ext>
             </a:extLst>
           </p:cNvPr>
@@ -6587,7 +6562,7 @@
           <p:cNvPr id="3" name="コンテンツ プレースホルダー 2">
             <a:extLst>
               <a:ext uri="{FF2B5EF4-FFF2-40B4-BE49-F238E27FC236}">
-                <a16:creationId xmlns:a16="http://schemas.microsoft.com/office/drawing/2014/main" id="{46C96F0D-39A0-7B53-A71E-67DF1A3CBE56}"/>
+                <a16:creationId xmlns:a16="http://schemas.microsoft.com/office/drawing/2014/main" id="{921B31DF-4C75-22B3-27B1-A5CB61158921}"/>
               </a:ext>
             </a:extLst>
           </p:cNvPr>
@@ -6609,59 +6584,12 @@
           <a:lstStyle/>
           <a:p>
             <a:r>
-              <a:rPr lang="ja-JP" altLang="en-US" b="0" i="0" dirty="0">
-                <a:solidFill>
-                  <a:srgbClr val="000000"/>
-                </a:solidFill>
-                <a:effectLst/>
-                <a:latin typeface="Meiryo" panose="020B0604030504040204" pitchFamily="50" charset="-128"/>
-                <a:ea typeface="Meiryo" panose="020B0604030504040204" pitchFamily="50" charset="-128"/>
-              </a:rPr>
-              <a:t>スライドで物理メモリ一つが</a:t>
-            </a:r>
-            <a:r>
-              <a:rPr lang="en-US" altLang="ja-JP" b="0" i="0" dirty="0">
-                <a:solidFill>
-                  <a:srgbClr val="000000"/>
-                </a:solidFill>
-                <a:effectLst/>
-                <a:latin typeface="Meiryo" panose="020B0604030504040204" pitchFamily="50" charset="-128"/>
-                <a:ea typeface="Meiryo" panose="020B0604030504040204" pitchFamily="50" charset="-128"/>
-              </a:rPr>
-              <a:t>4KB</a:t>
-            </a:r>
-            <a:r>
-              <a:rPr lang="ja-JP" altLang="en-US" b="0" i="0" dirty="0">
-                <a:solidFill>
-                  <a:srgbClr val="000000"/>
-                </a:solidFill>
-                <a:effectLst/>
-                <a:latin typeface="Meiryo" panose="020B0604030504040204" pitchFamily="50" charset="-128"/>
-                <a:ea typeface="Meiryo" panose="020B0604030504040204" pitchFamily="50" charset="-128"/>
-              </a:rPr>
-              <a:t>の時なぜ下位</a:t>
-            </a:r>
-            <a:r>
-              <a:rPr lang="en-US" altLang="ja-JP" b="0" i="0" dirty="0">
-                <a:solidFill>
-                  <a:srgbClr val="000000"/>
-                </a:solidFill>
-                <a:effectLst/>
-                <a:latin typeface="Meiryo" panose="020B0604030504040204" pitchFamily="50" charset="-128"/>
-                <a:ea typeface="Meiryo" panose="020B0604030504040204" pitchFamily="50" charset="-128"/>
-              </a:rPr>
-              <a:t>12bit</a:t>
-            </a:r>
-            <a:r>
-              <a:rPr lang="ja-JP" altLang="en-US" b="0" i="0" dirty="0">
-                <a:solidFill>
-                  <a:srgbClr val="000000"/>
-                </a:solidFill>
-                <a:effectLst/>
-                <a:latin typeface="Meiryo" panose="020B0604030504040204" pitchFamily="50" charset="-128"/>
-                <a:ea typeface="Meiryo" panose="020B0604030504040204" pitchFamily="50" charset="-128"/>
-              </a:rPr>
-              <a:t>をとってくるのかわかりませんでした。</a:t>
+              <a:rPr lang="en-US" altLang="ja-JP" dirty="0"/>
+              <a:t>2</a:t>
+            </a:r>
+            <a:r>
+              <a:rPr lang="ja-JP" altLang="en-US" dirty="0"/>
+              <a:t>段ページ・テーブルになると物理メモリの容量はどのように計算すれば良いのか分かりませんでした。</a:t>
             </a:r>
             <a:endParaRPr lang="en-US" dirty="0"/>
           </a:p>
@@ -6670,7 +6598,7 @@
     </p:spTree>
     <p:extLst>
       <p:ext uri="{BB962C8B-B14F-4D97-AF65-F5344CB8AC3E}">
-        <p14:creationId xmlns:p14="http://schemas.microsoft.com/office/powerpoint/2010/main" val="2514198503"/>
+        <p14:creationId xmlns:p14="http://schemas.microsoft.com/office/powerpoint/2010/main" val="824933050"/>
       </p:ext>
     </p:extLst>
   </p:cSld>
@@ -6693,7 +6621,13 @@
   <p:cSld>
     <p:spTree>
       <p:nvGrpSpPr>
-        <p:cNvPr id="1" name=""/>
+        <p:cNvPr id="1" name="">
+          <a:extLst>
+            <a:ext uri="{FF2B5EF4-FFF2-40B4-BE49-F238E27FC236}">
+              <a16:creationId xmlns:a16="http://schemas.microsoft.com/office/drawing/2014/main" id="{0D408E88-C44E-745F-DCC9-24D0773791A5}"/>
+            </a:ext>
+          </a:extLst>
+        </p:cNvPr>
         <p:cNvGrpSpPr/>
         <p:nvPr/>
       </p:nvGrpSpPr>
@@ -6710,7 +6644,7 @@
           <p:cNvPr id="2" name="タイトル 1">
             <a:extLst>
               <a:ext uri="{FF2B5EF4-FFF2-40B4-BE49-F238E27FC236}">
-                <a16:creationId xmlns:a16="http://schemas.microsoft.com/office/drawing/2014/main" id="{FAA8EBBD-6456-B940-EE50-E6057DAEC093}"/>
+                <a16:creationId xmlns:a16="http://schemas.microsoft.com/office/drawing/2014/main" id="{19EC3994-8A35-7999-1EE1-80D04E20205F}"/>
               </a:ext>
             </a:extLst>
           </p:cNvPr>
@@ -6744,7 +6678,7 @@
           <p:cNvPr id="3" name="コンテンツ プレースホルダー 2">
             <a:extLst>
               <a:ext uri="{FF2B5EF4-FFF2-40B4-BE49-F238E27FC236}">
-                <a16:creationId xmlns:a16="http://schemas.microsoft.com/office/drawing/2014/main" id="{46C96F0D-39A0-7B53-A71E-67DF1A3CBE56}"/>
+                <a16:creationId xmlns:a16="http://schemas.microsoft.com/office/drawing/2014/main" id="{13319070-7557-5F5B-9C96-8B254B0CF9A7}"/>
               </a:ext>
             </a:extLst>
           </p:cNvPr>
@@ -6766,37 +6700,43 @@
           <a:lstStyle/>
           <a:p>
             <a:r>
-              <a:rPr lang="ja-JP" altLang="en-US" b="0" i="0" dirty="0">
-                <a:solidFill>
-                  <a:srgbClr val="000000"/>
-                </a:solidFill>
-                <a:effectLst/>
-                <a:latin typeface="Meiryo" panose="020B0604030504040204" pitchFamily="50" charset="-128"/>
-                <a:ea typeface="Meiryo" panose="020B0604030504040204" pitchFamily="50" charset="-128"/>
-              </a:rPr>
-              <a:t>ページサイズを</a:t>
-            </a:r>
-            <a:r>
-              <a:rPr lang="en-US" altLang="ja-JP" b="0" i="0" dirty="0">
-                <a:solidFill>
-                  <a:srgbClr val="000000"/>
-                </a:solidFill>
-                <a:effectLst/>
-                <a:latin typeface="Meiryo" panose="020B0604030504040204" pitchFamily="50" charset="-128"/>
-                <a:ea typeface="Meiryo" panose="020B0604030504040204" pitchFamily="50" charset="-128"/>
-              </a:rPr>
-              <a:t>64KB</a:t>
-            </a:r>
-            <a:r>
-              <a:rPr lang="ja-JP" altLang="en-US" b="0" i="0" dirty="0">
-                <a:solidFill>
-                  <a:srgbClr val="000000"/>
-                </a:solidFill>
-                <a:effectLst/>
-                <a:latin typeface="Meiryo" panose="020B0604030504040204" pitchFamily="50" charset="-128"/>
-                <a:ea typeface="Meiryo" panose="020B0604030504040204" pitchFamily="50" charset="-128"/>
-              </a:rPr>
-              <a:t>に設定する理由やメリットについて詳しく教えてください。他のサイズと比べたときの利点や欠点も知りたいです。</a:t>
+              <a:rPr lang="en-US" altLang="ja-JP" dirty="0"/>
+              <a:t>p32</a:t>
+            </a:r>
+            <a:r>
+              <a:rPr lang="ja-JP" altLang="en-US" dirty="0"/>
+              <a:t>あたりの内容が他の科目の期末課題の内容と近く、苦しい気持ちになった。</a:t>
+            </a:r>
+          </a:p>
+          <a:p>
+            <a:r>
+              <a:rPr lang="ja-JP" altLang="en-US" dirty="0"/>
+              <a:t>↑の授業で取り扱った関数の</a:t>
+            </a:r>
+            <a:r>
+              <a:rPr lang="en-US" altLang="ja-JP" dirty="0"/>
+              <a:t>man</a:t>
+            </a:r>
+            <a:r>
+              <a:rPr lang="ja-JP" altLang="en-US" dirty="0"/>
+              <a:t>ページで「ページ単位に切り上げられる」というような説明があり混乱していたが、この単位の出自がわかって良かった。</a:t>
+            </a:r>
+          </a:p>
+          <a:p>
+            <a:endParaRPr lang="en-US" altLang="ja-JP" dirty="0"/>
+          </a:p>
+          <a:p>
+            <a:r>
+              <a:rPr lang="ja-JP" altLang="en-US" dirty="0"/>
+              <a:t>前回デジタル時計と行列積が似ているとコメントしたのですが、下の桁の方が速いのが同じだな</a:t>
+            </a:r>
+            <a:r>
+              <a:rPr lang="en-US" altLang="ja-JP" dirty="0"/>
+              <a:t>〜</a:t>
+            </a:r>
+            <a:r>
+              <a:rPr lang="ja-JP" altLang="en-US" dirty="0"/>
+              <a:t>という、ただそれだけです！</a:t>
             </a:r>
             <a:endParaRPr lang="en-US" dirty="0"/>
           </a:p>
@@ -6805,7 +6745,7 @@
     </p:spTree>
     <p:extLst>
       <p:ext uri="{BB962C8B-B14F-4D97-AF65-F5344CB8AC3E}">
-        <p14:creationId xmlns:p14="http://schemas.microsoft.com/office/powerpoint/2010/main" val="3547306047"/>
+        <p14:creationId xmlns:p14="http://schemas.microsoft.com/office/powerpoint/2010/main" val="2915625674"/>
       </p:ext>
     </p:extLst>
   </p:cSld>
@@ -6917,7 +6857,13 @@
   <p:cSld>
     <p:spTree>
       <p:nvGrpSpPr>
-        <p:cNvPr id="1" name=""/>
+        <p:cNvPr id="1" name="">
+          <a:extLst>
+            <a:ext uri="{FF2B5EF4-FFF2-40B4-BE49-F238E27FC236}">
+              <a16:creationId xmlns:a16="http://schemas.microsoft.com/office/drawing/2014/main" id="{F643EA04-2FD9-0181-616D-FD646F065A82}"/>
+            </a:ext>
+          </a:extLst>
+        </p:cNvPr>
         <p:cNvGrpSpPr/>
         <p:nvPr/>
       </p:nvGrpSpPr>
@@ -6934,7 +6880,7 @@
           <p:cNvPr id="2" name="タイトル 1">
             <a:extLst>
               <a:ext uri="{FF2B5EF4-FFF2-40B4-BE49-F238E27FC236}">
-                <a16:creationId xmlns:a16="http://schemas.microsoft.com/office/drawing/2014/main" id="{FAA8EBBD-6456-B940-EE50-E6057DAEC093}"/>
+                <a16:creationId xmlns:a16="http://schemas.microsoft.com/office/drawing/2014/main" id="{FAB13BE3-DDFD-600A-00A1-B4F0B726C1EB}"/>
               </a:ext>
             </a:extLst>
           </p:cNvPr>
@@ -6968,7 +6914,7 @@
           <p:cNvPr id="3" name="コンテンツ プレースホルダー 2">
             <a:extLst>
               <a:ext uri="{FF2B5EF4-FFF2-40B4-BE49-F238E27FC236}">
-                <a16:creationId xmlns:a16="http://schemas.microsoft.com/office/drawing/2014/main" id="{46C96F0D-39A0-7B53-A71E-67DF1A3CBE56}"/>
+                <a16:creationId xmlns:a16="http://schemas.microsoft.com/office/drawing/2014/main" id="{A6BD40A7-718F-D884-F5CC-508B9934CC63}"/>
               </a:ext>
             </a:extLst>
           </p:cNvPr>
@@ -6990,37 +6936,12 @@
           <a:lstStyle/>
           <a:p>
             <a:r>
-              <a:rPr lang="ja-JP" altLang="en-US" b="0" i="0" dirty="0">
-                <a:solidFill>
-                  <a:srgbClr val="000000"/>
-                </a:solidFill>
-                <a:effectLst/>
-                <a:latin typeface="Meiryo" panose="020B0604030504040204" pitchFamily="50" charset="-128"/>
-                <a:ea typeface="Meiryo" panose="020B0604030504040204" pitchFamily="50" charset="-128"/>
-              </a:rPr>
-              <a:t>新しく習った内容が私にとってかなり難しかったので、テストがさらに不安になりました、、。全部</a:t>
-            </a:r>
-            <a:r>
-              <a:rPr lang="en-US" altLang="ja-JP" b="0" i="0" dirty="0">
-                <a:solidFill>
-                  <a:srgbClr val="000000"/>
-                </a:solidFill>
-                <a:effectLst/>
-                <a:latin typeface="Meiryo" panose="020B0604030504040204" pitchFamily="50" charset="-128"/>
-                <a:ea typeface="Meiryo" panose="020B0604030504040204" pitchFamily="50" charset="-128"/>
-              </a:rPr>
-              <a:t>16</a:t>
-            </a:r>
-            <a:r>
-              <a:rPr lang="ja-JP" altLang="en-US" b="0" i="0" dirty="0">
-                <a:solidFill>
-                  <a:srgbClr val="000000"/>
-                </a:solidFill>
-                <a:effectLst/>
-                <a:latin typeface="Meiryo" panose="020B0604030504040204" pitchFamily="50" charset="-128"/>
-                <a:ea typeface="Meiryo" panose="020B0604030504040204" pitchFamily="50" charset="-128"/>
-              </a:rPr>
-              <a:t>進数で答えたのですが、答え方に決まりはありますか？また、多段の時のページテーブルをどう求めたら良いか教えて欲しいです。</a:t>
+              <a:rPr lang="en-US" altLang="ja-JP" dirty="0"/>
+              <a:t>39</a:t>
+            </a:r>
+            <a:r>
+              <a:rPr lang="ja-JP" altLang="en-US" dirty="0"/>
+              <a:t>ページのベース･レジスタと物理メモリの図がよく分かりません。もう少し解説していただけませんか？</a:t>
             </a:r>
             <a:endParaRPr lang="en-US" dirty="0"/>
           </a:p>
@@ -7029,7 +6950,7 @@
     </p:spTree>
     <p:extLst>
       <p:ext uri="{BB962C8B-B14F-4D97-AF65-F5344CB8AC3E}">
-        <p14:creationId xmlns:p14="http://schemas.microsoft.com/office/powerpoint/2010/main" val="4068132490"/>
+        <p14:creationId xmlns:p14="http://schemas.microsoft.com/office/powerpoint/2010/main" val="996855702"/>
       </p:ext>
     </p:extLst>
   </p:cSld>
@@ -7052,7 +6973,13 @@
   <p:cSld>
     <p:spTree>
       <p:nvGrpSpPr>
-        <p:cNvPr id="1" name=""/>
+        <p:cNvPr id="1" name="">
+          <a:extLst>
+            <a:ext uri="{FF2B5EF4-FFF2-40B4-BE49-F238E27FC236}">
+              <a16:creationId xmlns:a16="http://schemas.microsoft.com/office/drawing/2014/main" id="{B74E8F8D-2326-1A42-265B-155F4A36D3E3}"/>
+            </a:ext>
+          </a:extLst>
+        </p:cNvPr>
         <p:cNvGrpSpPr/>
         <p:nvPr/>
       </p:nvGrpSpPr>
@@ -7069,7 +6996,7 @@
           <p:cNvPr id="2" name="タイトル 1">
             <a:extLst>
               <a:ext uri="{FF2B5EF4-FFF2-40B4-BE49-F238E27FC236}">
-                <a16:creationId xmlns:a16="http://schemas.microsoft.com/office/drawing/2014/main" id="{FAA8EBBD-6456-B940-EE50-E6057DAEC093}"/>
+                <a16:creationId xmlns:a16="http://schemas.microsoft.com/office/drawing/2014/main" id="{3473AAD8-0CB0-39BD-2723-98925ED07BB3}"/>
               </a:ext>
             </a:extLst>
           </p:cNvPr>
@@ -7103,7 +7030,7 @@
           <p:cNvPr id="3" name="コンテンツ プレースホルダー 2">
             <a:extLst>
               <a:ext uri="{FF2B5EF4-FFF2-40B4-BE49-F238E27FC236}">
-                <a16:creationId xmlns:a16="http://schemas.microsoft.com/office/drawing/2014/main" id="{46C96F0D-39A0-7B53-A71E-67DF1A3CBE56}"/>
+                <a16:creationId xmlns:a16="http://schemas.microsoft.com/office/drawing/2014/main" id="{96484A00-7681-A2B0-9F5D-4FA79FE29EF2}"/>
               </a:ext>
             </a:extLst>
           </p:cNvPr>
@@ -7125,59 +7052,63 @@
           <a:lstStyle/>
           <a:p>
             <a:r>
-              <a:rPr lang="ja-JP" altLang="en-US" b="0" i="0" dirty="0">
-                <a:solidFill>
-                  <a:srgbClr val="000000"/>
-                </a:solidFill>
-                <a:effectLst/>
-                <a:latin typeface="Meiryo" panose="020B0604030504040204" pitchFamily="50" charset="-128"/>
-                <a:ea typeface="Meiryo" panose="020B0604030504040204" pitchFamily="50" charset="-128"/>
-              </a:rPr>
-              <a:t>課題</a:t>
-            </a:r>
-            <a:r>
-              <a:rPr lang="en-US" altLang="ja-JP" b="0" i="0" dirty="0">
-                <a:solidFill>
-                  <a:srgbClr val="000000"/>
-                </a:solidFill>
-                <a:effectLst/>
-                <a:latin typeface="Meiryo" panose="020B0604030504040204" pitchFamily="50" charset="-128"/>
-                <a:ea typeface="Meiryo" panose="020B0604030504040204" pitchFamily="50" charset="-128"/>
-              </a:rPr>
-              <a:t>11</a:t>
-            </a:r>
-            <a:r>
-              <a:rPr lang="ja-JP" altLang="en-US" b="0" i="0" dirty="0">
-                <a:solidFill>
-                  <a:srgbClr val="000000"/>
-                </a:solidFill>
-                <a:effectLst/>
-                <a:latin typeface="Meiryo" panose="020B0604030504040204" pitchFamily="50" charset="-128"/>
-                <a:ea typeface="Meiryo" panose="020B0604030504040204" pitchFamily="50" charset="-128"/>
-              </a:rPr>
-              <a:t>でページ・アドレスからマップされている先頭の物理アドレスを得る時も物理アドレスにアクセスしたと捉えて良いのでしょうか。それとも下位</a:t>
-            </a:r>
-            <a:r>
-              <a:rPr lang="en-US" altLang="ja-JP" b="0" i="0" dirty="0">
-                <a:solidFill>
-                  <a:srgbClr val="000000"/>
-                </a:solidFill>
-                <a:effectLst/>
-                <a:latin typeface="Meiryo" panose="020B0604030504040204" pitchFamily="50" charset="-128"/>
-                <a:ea typeface="Meiryo" panose="020B0604030504040204" pitchFamily="50" charset="-128"/>
-              </a:rPr>
-              <a:t>16</a:t>
-            </a:r>
-            <a:r>
-              <a:rPr lang="ja-JP" altLang="en-US" b="0" i="0" dirty="0">
-                <a:solidFill>
-                  <a:srgbClr val="000000"/>
-                </a:solidFill>
-                <a:effectLst/>
-                <a:latin typeface="Meiryo" panose="020B0604030504040204" pitchFamily="50" charset="-128"/>
-                <a:ea typeface="Meiryo" panose="020B0604030504040204" pitchFamily="50" charset="-128"/>
-              </a:rPr>
-              <a:t>ビットを結合してアクセスする時だけがアクセスでしょうか。</a:t>
+              <a:rPr lang="ja-JP" altLang="en-US" dirty="0"/>
+              <a:t>今回の課題では</a:t>
+            </a:r>
+            <a:r>
+              <a:rPr lang="en-US" altLang="ja-JP" dirty="0"/>
+              <a:t>TLB</a:t>
+            </a:r>
+            <a:r>
+              <a:rPr lang="ja-JP" altLang="en-US" dirty="0"/>
+              <a:t>が存在しませんでしたが、</a:t>
+            </a:r>
+            <a:r>
+              <a:rPr lang="en-US" altLang="ja-JP" dirty="0"/>
+              <a:t>TLB</a:t>
+            </a:r>
+            <a:r>
+              <a:rPr lang="ja-JP" altLang="en-US" dirty="0"/>
+              <a:t>が存在するような問題も出る可能性があるのでしょうか。</a:t>
+            </a:r>
+            <a:endParaRPr lang="en-US" altLang="ja-JP" dirty="0"/>
+          </a:p>
+          <a:p>
+            <a:r>
+              <a:rPr lang="ja-JP" altLang="en-US" dirty="0"/>
+              <a:t>ページ・テーブルは物理メモリ上に存在しましたが、</a:t>
+            </a:r>
+            <a:r>
+              <a:rPr lang="en-US" altLang="ja-JP" dirty="0"/>
+              <a:t>TLB</a:t>
+            </a:r>
+            <a:r>
+              <a:rPr lang="ja-JP" altLang="en-US" dirty="0"/>
+              <a:t>も物理メモリ上に存在して、ページ・テーブルで一度使った値</a:t>
+            </a:r>
+            <a:r>
+              <a:rPr lang="en-US" altLang="ja-JP" dirty="0"/>
+              <a:t>(</a:t>
+            </a:r>
+            <a:r>
+              <a:rPr lang="ja-JP" altLang="en-US" dirty="0"/>
+              <a:t>とその周辺の値</a:t>
+            </a:r>
+            <a:r>
+              <a:rPr lang="en-US" altLang="ja-JP" dirty="0"/>
+              <a:t>)</a:t>
+            </a:r>
+            <a:r>
+              <a:rPr lang="ja-JP" altLang="en-US" dirty="0"/>
+              <a:t>を</a:t>
+            </a:r>
+            <a:r>
+              <a:rPr lang="en-US" altLang="ja-JP" dirty="0"/>
+              <a:t>TLB</a:t>
+            </a:r>
+            <a:r>
+              <a:rPr lang="ja-JP" altLang="en-US" dirty="0"/>
+              <a:t>にコピーしておくという認識であっていますか？</a:t>
             </a:r>
             <a:endParaRPr lang="en-US" dirty="0"/>
           </a:p>
@@ -7186,7 +7117,7 @@
     </p:spTree>
     <p:extLst>
       <p:ext uri="{BB962C8B-B14F-4D97-AF65-F5344CB8AC3E}">
-        <p14:creationId xmlns:p14="http://schemas.microsoft.com/office/powerpoint/2010/main" val="983232549"/>
+        <p14:creationId xmlns:p14="http://schemas.microsoft.com/office/powerpoint/2010/main" val="1021054035"/>
       </p:ext>
     </p:extLst>
   </p:cSld>
@@ -7209,7 +7140,13 @@
   <p:cSld>
     <p:spTree>
       <p:nvGrpSpPr>
-        <p:cNvPr id="1" name=""/>
+        <p:cNvPr id="1" name="">
+          <a:extLst>
+            <a:ext uri="{FF2B5EF4-FFF2-40B4-BE49-F238E27FC236}">
+              <a16:creationId xmlns:a16="http://schemas.microsoft.com/office/drawing/2014/main" id="{B3629ABA-FF49-9C52-A28C-2EABEF12D70D}"/>
+            </a:ext>
+          </a:extLst>
+        </p:cNvPr>
         <p:cNvGrpSpPr/>
         <p:nvPr/>
       </p:nvGrpSpPr>
@@ -7226,7 +7163,7 @@
           <p:cNvPr id="2" name="タイトル 1">
             <a:extLst>
               <a:ext uri="{FF2B5EF4-FFF2-40B4-BE49-F238E27FC236}">
-                <a16:creationId xmlns:a16="http://schemas.microsoft.com/office/drawing/2014/main" id="{FAA8EBBD-6456-B940-EE50-E6057DAEC093}"/>
+                <a16:creationId xmlns:a16="http://schemas.microsoft.com/office/drawing/2014/main" id="{3B351A1C-AF28-1F60-1FCD-5993D5A522AC}"/>
               </a:ext>
             </a:extLst>
           </p:cNvPr>
@@ -7260,7 +7197,7 @@
           <p:cNvPr id="3" name="コンテンツ プレースホルダー 2">
             <a:extLst>
               <a:ext uri="{FF2B5EF4-FFF2-40B4-BE49-F238E27FC236}">
-                <a16:creationId xmlns:a16="http://schemas.microsoft.com/office/drawing/2014/main" id="{46C96F0D-39A0-7B53-A71E-67DF1A3CBE56}"/>
+                <a16:creationId xmlns:a16="http://schemas.microsoft.com/office/drawing/2014/main" id="{74627B1A-6F64-661A-3FAC-D6DC18463B1A}"/>
               </a:ext>
             </a:extLst>
           </p:cNvPr>
@@ -7282,169 +7219,55 @@
           <a:lstStyle/>
           <a:p>
             <a:r>
-              <a:rPr lang="ja-JP" altLang="en-US" b="0" i="0" dirty="0">
-                <a:solidFill>
-                  <a:srgbClr val="000000"/>
-                </a:solidFill>
-                <a:effectLst/>
-                <a:latin typeface="Meiryo" panose="020B0604030504040204" pitchFamily="50" charset="-128"/>
-                <a:ea typeface="Meiryo" panose="020B0604030504040204" pitchFamily="50" charset="-128"/>
-              </a:rPr>
-              <a:t>また、ページサイズが</a:t>
-            </a:r>
-            <a:r>
-              <a:rPr lang="en-US" altLang="ja-JP" b="0" i="0" dirty="0">
-                <a:solidFill>
-                  <a:srgbClr val="000000"/>
-                </a:solidFill>
-                <a:effectLst/>
-                <a:latin typeface="Meiryo" panose="020B0604030504040204" pitchFamily="50" charset="-128"/>
-                <a:ea typeface="Meiryo" panose="020B0604030504040204" pitchFamily="50" charset="-128"/>
-              </a:rPr>
-              <a:t>64KB</a:t>
-            </a:r>
-            <a:r>
-              <a:rPr lang="ja-JP" altLang="en-US" b="0" i="0" dirty="0">
-                <a:solidFill>
-                  <a:srgbClr val="000000"/>
-                </a:solidFill>
-                <a:effectLst/>
-                <a:latin typeface="Meiryo" panose="020B0604030504040204" pitchFamily="50" charset="-128"/>
-                <a:ea typeface="Meiryo" panose="020B0604030504040204" pitchFamily="50" charset="-128"/>
-              </a:rPr>
-              <a:t>の場合に仮想アドレスを分けるところがなぜ</a:t>
-            </a:r>
-            <a:r>
-              <a:rPr lang="en-US" altLang="ja-JP" b="0" i="0" dirty="0">
-                <a:solidFill>
-                  <a:srgbClr val="000000"/>
-                </a:solidFill>
-                <a:effectLst/>
-                <a:latin typeface="Meiryo" panose="020B0604030504040204" pitchFamily="50" charset="-128"/>
-                <a:ea typeface="Meiryo" panose="020B0604030504040204" pitchFamily="50" charset="-128"/>
-              </a:rPr>
-              <a:t>16</a:t>
-            </a:r>
-            <a:r>
-              <a:rPr lang="ja-JP" altLang="en-US" b="0" i="0" dirty="0">
-                <a:solidFill>
-                  <a:srgbClr val="000000"/>
-                </a:solidFill>
-                <a:effectLst/>
-                <a:latin typeface="Meiryo" panose="020B0604030504040204" pitchFamily="50" charset="-128"/>
-                <a:ea typeface="Meiryo" panose="020B0604030504040204" pitchFamily="50" charset="-128"/>
-              </a:rPr>
-              <a:t>ビットになるかがわからなくなりました。</a:t>
-            </a:r>
-            <a:r>
-              <a:rPr lang="en-US" altLang="ja-JP" b="0" i="0" dirty="0">
-                <a:solidFill>
-                  <a:srgbClr val="000000"/>
-                </a:solidFill>
-                <a:effectLst/>
-                <a:latin typeface="Meiryo" panose="020B0604030504040204" pitchFamily="50" charset="-128"/>
-                <a:ea typeface="Meiryo" panose="020B0604030504040204" pitchFamily="50" charset="-128"/>
-              </a:rPr>
-              <a:t>16</a:t>
-            </a:r>
-            <a:r>
-              <a:rPr lang="ja-JP" altLang="en-US" b="0" i="0" dirty="0">
-                <a:solidFill>
-                  <a:srgbClr val="000000"/>
-                </a:solidFill>
-                <a:effectLst/>
-                <a:latin typeface="Meiryo" panose="020B0604030504040204" pitchFamily="50" charset="-128"/>
-                <a:ea typeface="Meiryo" panose="020B0604030504040204" pitchFamily="50" charset="-128"/>
-              </a:rPr>
-              <a:t>ビットで</a:t>
-            </a:r>
-            <a:r>
-              <a:rPr lang="en-US" altLang="ja-JP" b="0" i="0" dirty="0">
-                <a:solidFill>
-                  <a:srgbClr val="000000"/>
-                </a:solidFill>
-                <a:effectLst/>
-                <a:latin typeface="Meiryo" panose="020B0604030504040204" pitchFamily="50" charset="-128"/>
-                <a:ea typeface="Meiryo" panose="020B0604030504040204" pitchFamily="50" charset="-128"/>
-              </a:rPr>
+              <a:rPr lang="ja-JP" altLang="en-US" dirty="0"/>
+              <a:t>特に印象的だったのは、仮想メモリには</a:t>
+            </a:r>
+            <a:r>
+              <a:rPr lang="en-US" altLang="ja-JP" dirty="0"/>
+              <a:t>OS</a:t>
+            </a:r>
+            <a:r>
+              <a:rPr lang="ja-JP" altLang="en-US" dirty="0"/>
+              <a:t>が関与しているということだった。これまで様々な授業で</a:t>
+            </a:r>
+            <a:r>
+              <a:rPr lang="en-US" altLang="ja-JP" dirty="0"/>
+              <a:t>OS</a:t>
+            </a:r>
+            <a:r>
+              <a:rPr lang="ja-JP" altLang="en-US" dirty="0"/>
+              <a:t>の役割を学んできたため、</a:t>
+            </a:r>
+            <a:r>
+              <a:rPr lang="en-US" altLang="ja-JP" dirty="0"/>
+              <a:t>OS</a:t>
+            </a:r>
+            <a:r>
+              <a:rPr lang="ja-JP" altLang="en-US" dirty="0"/>
+              <a:t>のやっていることは非常に多いのだなと感じた。</a:t>
+            </a:r>
+            <a:endParaRPr lang="en-US" altLang="ja-JP" dirty="0"/>
+          </a:p>
+          <a:p>
+            <a:r>
+              <a:rPr lang="ja-JP" altLang="en-US" dirty="0"/>
+              <a:t>また、</a:t>
+            </a:r>
+            <a:r>
+              <a:rPr lang="en-US" altLang="ja-JP" dirty="0"/>
               <a:t>2</a:t>
             </a:r>
             <a:r>
-              <a:rPr lang="ja-JP" altLang="en-US" b="0" i="0" dirty="0">
-                <a:solidFill>
-                  <a:srgbClr val="000000"/>
-                </a:solidFill>
-                <a:effectLst/>
-                <a:latin typeface="Meiryo" panose="020B0604030504040204" pitchFamily="50" charset="-128"/>
-                <a:ea typeface="Meiryo" panose="020B0604030504040204" pitchFamily="50" charset="-128"/>
-              </a:rPr>
-              <a:t>の</a:t>
-            </a:r>
-            <a:r>
-              <a:rPr lang="en-US" altLang="ja-JP" b="0" i="0" dirty="0">
-                <a:solidFill>
-                  <a:srgbClr val="000000"/>
-                </a:solidFill>
-                <a:effectLst/>
-                <a:latin typeface="Meiryo" panose="020B0604030504040204" pitchFamily="50" charset="-128"/>
-                <a:ea typeface="Meiryo" panose="020B0604030504040204" pitchFamily="50" charset="-128"/>
-              </a:rPr>
-              <a:t>16</a:t>
-            </a:r>
-            <a:r>
-              <a:rPr lang="ja-JP" altLang="en-US" b="0" i="0" dirty="0">
-                <a:solidFill>
-                  <a:srgbClr val="000000"/>
-                </a:solidFill>
-                <a:effectLst/>
-                <a:latin typeface="Meiryo" panose="020B0604030504040204" pitchFamily="50" charset="-128"/>
-                <a:ea typeface="Meiryo" panose="020B0604030504040204" pitchFamily="50" charset="-128"/>
-              </a:rPr>
-              <a:t>乗個の場所を表せるというのと、</a:t>
-            </a:r>
-            <a:r>
-              <a:rPr lang="en-US" altLang="ja-JP" b="0" i="0" dirty="0">
-                <a:solidFill>
-                  <a:srgbClr val="000000"/>
-                </a:solidFill>
-                <a:effectLst/>
-                <a:latin typeface="Meiryo" panose="020B0604030504040204" pitchFamily="50" charset="-128"/>
-                <a:ea typeface="Meiryo" panose="020B0604030504040204" pitchFamily="50" charset="-128"/>
-              </a:rPr>
-              <a:t>64KB</a:t>
-            </a:r>
-            <a:r>
-              <a:rPr lang="ja-JP" altLang="en-US" b="0" i="0" dirty="0">
-                <a:solidFill>
-                  <a:srgbClr val="000000"/>
-                </a:solidFill>
-                <a:effectLst/>
-                <a:latin typeface="Meiryo" panose="020B0604030504040204" pitchFamily="50" charset="-128"/>
-                <a:ea typeface="Meiryo" panose="020B0604030504040204" pitchFamily="50" charset="-128"/>
-              </a:rPr>
-              <a:t>が</a:t>
-            </a:r>
-            <a:r>
-              <a:rPr lang="en-US" altLang="ja-JP" b="0" i="0" dirty="0">
-                <a:solidFill>
-                  <a:srgbClr val="000000"/>
-                </a:solidFill>
-                <a:effectLst/>
-                <a:latin typeface="Meiryo" panose="020B0604030504040204" pitchFamily="50" charset="-128"/>
-                <a:ea typeface="Meiryo" panose="020B0604030504040204" pitchFamily="50" charset="-128"/>
-              </a:rPr>
-              <a:t>512000</a:t>
-            </a:r>
-            <a:r>
-              <a:rPr lang="ja-JP" altLang="en-US" b="0" i="0" dirty="0">
-                <a:solidFill>
-                  <a:srgbClr val="000000"/>
-                </a:solidFill>
-                <a:effectLst/>
-                <a:latin typeface="Meiryo" panose="020B0604030504040204" pitchFamily="50" charset="-128"/>
-                <a:ea typeface="Meiryo" panose="020B0604030504040204" pitchFamily="50" charset="-128"/>
-              </a:rPr>
-              <a:t>ビットという数字が合わないのでどう考えるのかもう一度解説してくださると幸いです。</a:t>
+              <a:rPr lang="ja-JP" altLang="en-US" dirty="0"/>
+              <a:t>段ページ・テーブルは単段ページ・テーブルよりも必要な容量がかなり少なくなるということも印象的だった。</a:t>
+            </a:r>
+            <a:r>
+              <a:rPr lang="en-US" altLang="ja-JP" dirty="0"/>
+              <a:t>2</a:t>
+            </a:r>
+            <a:r>
+              <a:rPr lang="ja-JP" altLang="en-US" dirty="0"/>
+              <a:t>段ページ・テーブルの仕組みは少し複雑に感じていたが、こんなにも容量を少なくできる技術なのかととても驚き、興味が湧いた。</a:t>
             </a:r>
             <a:endParaRPr lang="en-US" dirty="0"/>
           </a:p>
@@ -7453,7 +7276,7 @@
     </p:spTree>
     <p:extLst>
       <p:ext uri="{BB962C8B-B14F-4D97-AF65-F5344CB8AC3E}">
-        <p14:creationId xmlns:p14="http://schemas.microsoft.com/office/powerpoint/2010/main" val="2448319536"/>
+        <p14:creationId xmlns:p14="http://schemas.microsoft.com/office/powerpoint/2010/main" val="2662710397"/>
       </p:ext>
     </p:extLst>
   </p:cSld>
@@ -7476,7 +7299,13 @@
   <p:cSld>
     <p:spTree>
       <p:nvGrpSpPr>
-        <p:cNvPr id="1" name=""/>
+        <p:cNvPr id="1" name="">
+          <a:extLst>
+            <a:ext uri="{FF2B5EF4-FFF2-40B4-BE49-F238E27FC236}">
+              <a16:creationId xmlns:a16="http://schemas.microsoft.com/office/drawing/2014/main" id="{2D1766C8-E10B-D166-9D77-087978BB9997}"/>
+            </a:ext>
+          </a:extLst>
+        </p:cNvPr>
         <p:cNvGrpSpPr/>
         <p:nvPr/>
       </p:nvGrpSpPr>
@@ -7493,7 +7322,7 @@
           <p:cNvPr id="2" name="タイトル 1">
             <a:extLst>
               <a:ext uri="{FF2B5EF4-FFF2-40B4-BE49-F238E27FC236}">
-                <a16:creationId xmlns:a16="http://schemas.microsoft.com/office/drawing/2014/main" id="{FAA8EBBD-6456-B940-EE50-E6057DAEC093}"/>
+                <a16:creationId xmlns:a16="http://schemas.microsoft.com/office/drawing/2014/main" id="{B2DB8158-64E0-E9E3-6112-B34291C68661}"/>
               </a:ext>
             </a:extLst>
           </p:cNvPr>
@@ -7527,7 +7356,7 @@
           <p:cNvPr id="3" name="コンテンツ プレースホルダー 2">
             <a:extLst>
               <a:ext uri="{FF2B5EF4-FFF2-40B4-BE49-F238E27FC236}">
-                <a16:creationId xmlns:a16="http://schemas.microsoft.com/office/drawing/2014/main" id="{46C96F0D-39A0-7B53-A71E-67DF1A3CBE56}"/>
+                <a16:creationId xmlns:a16="http://schemas.microsoft.com/office/drawing/2014/main" id="{EC88B7DB-92B2-4563-260A-C7C8E05A8248}"/>
               </a:ext>
             </a:extLst>
           </p:cNvPr>
@@ -7548,138 +7377,10 @@
           <a:bodyPr/>
           <a:lstStyle/>
           <a:p>
-            <a:pPr algn="l"/>
-            <a:r>
-              <a:rPr lang="ja-JP" altLang="en-US" b="0" i="0" dirty="0">
-                <a:solidFill>
-                  <a:srgbClr val="000000"/>
-                </a:solidFill>
-                <a:effectLst/>
-                <a:latin typeface="Meiryo" panose="020B0604030504040204" pitchFamily="50" charset="-128"/>
-                <a:ea typeface="Meiryo" panose="020B0604030504040204" pitchFamily="50" charset="-128"/>
-              </a:rPr>
-              <a:t>スライド１０ページ目に</a:t>
-            </a:r>
-            <a:br>
-              <a:rPr lang="ja-JP" altLang="en-US" b="0" i="0" dirty="0">
-                <a:solidFill>
-                  <a:srgbClr val="000000"/>
-                </a:solidFill>
-                <a:effectLst/>
-                <a:latin typeface="Meiryo" panose="020B0604030504040204" pitchFamily="50" charset="-128"/>
-                <a:ea typeface="Meiryo" panose="020B0604030504040204" pitchFamily="50" charset="-128"/>
-              </a:rPr>
-            </a:br>
-            <a:r>
-              <a:rPr lang="ja-JP" altLang="en-US" b="0" i="0" dirty="0">
-                <a:solidFill>
-                  <a:srgbClr val="000000"/>
-                </a:solidFill>
-                <a:effectLst/>
-                <a:latin typeface="Meiryo" panose="020B0604030504040204" pitchFamily="50" charset="-128"/>
-                <a:ea typeface="Meiryo" panose="020B0604030504040204" pitchFamily="50" charset="-128"/>
-              </a:rPr>
-              <a:t>「</a:t>
-            </a:r>
-            <a:r>
-              <a:rPr lang="en-US" altLang="ja-JP" b="0" i="0" dirty="0">
-                <a:solidFill>
-                  <a:srgbClr val="000000"/>
-                </a:solidFill>
-                <a:effectLst/>
-                <a:latin typeface="Meiryo" panose="020B0604030504040204" pitchFamily="50" charset="-128"/>
-                <a:ea typeface="Meiryo" panose="020B0604030504040204" pitchFamily="50" charset="-128"/>
-              </a:rPr>
-              <a:t>(1) </a:t>
-            </a:r>
-            <a:r>
-              <a:rPr lang="ja-JP" altLang="en-US" b="0" i="0" dirty="0">
-                <a:solidFill>
-                  <a:srgbClr val="000000"/>
-                </a:solidFill>
-                <a:effectLst/>
-                <a:latin typeface="Meiryo" panose="020B0604030504040204" pitchFamily="50" charset="-128"/>
-                <a:ea typeface="Meiryo" panose="020B0604030504040204" pitchFamily="50" charset="-128"/>
-              </a:rPr>
-              <a:t>最初のアクセスで左のようにタグの </a:t>
-            </a:r>
-            <a:r>
-              <a:rPr lang="en-US" altLang="ja-JP" b="0" i="0" dirty="0">
-                <a:solidFill>
-                  <a:srgbClr val="000000"/>
-                </a:solidFill>
-                <a:effectLst/>
-                <a:latin typeface="Meiryo" panose="020B0604030504040204" pitchFamily="50" charset="-128"/>
-                <a:ea typeface="Meiryo" panose="020B0604030504040204" pitchFamily="50" charset="-128"/>
-              </a:rPr>
-              <a:t>0x580 </a:t>
-            </a:r>
-            <a:r>
-              <a:rPr lang="ja-JP" altLang="en-US" b="0" i="0" dirty="0">
-                <a:solidFill>
-                  <a:srgbClr val="000000"/>
-                </a:solidFill>
-                <a:effectLst/>
-                <a:latin typeface="Meiryo" panose="020B0604030504040204" pitchFamily="50" charset="-128"/>
-                <a:ea typeface="Meiryo" panose="020B0604030504040204" pitchFamily="50" charset="-128"/>
-              </a:rPr>
-              <a:t>が書き込まれた後はずっとそのまま」</a:t>
-            </a:r>
-            <a:br>
-              <a:rPr lang="ja-JP" altLang="en-US" b="0" i="0" dirty="0">
-                <a:solidFill>
-                  <a:srgbClr val="000000"/>
-                </a:solidFill>
-                <a:effectLst/>
-                <a:latin typeface="Meiryo" panose="020B0604030504040204" pitchFamily="50" charset="-128"/>
-                <a:ea typeface="Meiryo" panose="020B0604030504040204" pitchFamily="50" charset="-128"/>
-              </a:rPr>
-            </a:br>
-            <a:r>
-              <a:rPr lang="ja-JP" altLang="en-US" b="0" i="0" dirty="0">
-                <a:solidFill>
-                  <a:srgbClr val="000000"/>
-                </a:solidFill>
-                <a:effectLst/>
-                <a:latin typeface="Meiryo" panose="020B0604030504040204" pitchFamily="50" charset="-128"/>
-                <a:ea typeface="Meiryo" panose="020B0604030504040204" pitchFamily="50" charset="-128"/>
-              </a:rPr>
-              <a:t>とありますが、変化しないのでしょうか？</a:t>
-            </a:r>
-            <a:endParaRPr lang="en-US" altLang="ja-JP" b="0" i="0" dirty="0">
-              <a:solidFill>
-                <a:srgbClr val="000000"/>
-              </a:solidFill>
-              <a:effectLst/>
-              <a:latin typeface="Meiryo" panose="020B0604030504040204" pitchFamily="50" charset="-128"/>
-              <a:ea typeface="Meiryo" panose="020B0604030504040204" pitchFamily="50" charset="-128"/>
-            </a:endParaRPr>
-          </a:p>
-          <a:p>
-            <a:pPr lvl="1"/>
-            <a:endParaRPr lang="en-US" altLang="ja-JP" dirty="0">
-              <a:solidFill>
-                <a:srgbClr val="000000"/>
-              </a:solidFill>
-              <a:latin typeface="Meiryo" panose="020B0604030504040204" pitchFamily="50" charset="-128"/>
-              <a:ea typeface="Meiryo" panose="020B0604030504040204" pitchFamily="50" charset="-128"/>
-            </a:endParaRPr>
-          </a:p>
-          <a:p>
-            <a:pPr lvl="1"/>
-            <a:r>
-              <a:rPr lang="ja-JP" altLang="en-US" b="0" i="0" dirty="0">
-                <a:solidFill>
-                  <a:srgbClr val="000000"/>
-                </a:solidFill>
-                <a:effectLst/>
-                <a:latin typeface="Meiryo" panose="020B0604030504040204" pitchFamily="50" charset="-128"/>
-                <a:ea typeface="Meiryo" panose="020B0604030504040204" pitchFamily="50" charset="-128"/>
-              </a:rPr>
-              <a:t>すいません，これは間違いでした</a:t>
-            </a:r>
-          </a:p>
-          <a:p>
+            <a:r>
+              <a:rPr lang="ja-JP" altLang="en-US" dirty="0"/>
+              <a:t>今回の大きなメモリが用意されているように見せかける技術やキャッシュの大きくて速いメモリがあるように見せかける技術などコンピュータには見せかける技術が多く、人が使いやすいように工夫されていることを感じました。</a:t>
+            </a:r>
             <a:endParaRPr lang="en-US" dirty="0"/>
           </a:p>
         </p:txBody>
@@ -7687,7 +7388,7 @@
     </p:spTree>
     <p:extLst>
       <p:ext uri="{BB962C8B-B14F-4D97-AF65-F5344CB8AC3E}">
-        <p14:creationId xmlns:p14="http://schemas.microsoft.com/office/powerpoint/2010/main" val="3369599810"/>
+        <p14:creationId xmlns:p14="http://schemas.microsoft.com/office/powerpoint/2010/main" val="479859429"/>
       </p:ext>
     </p:extLst>
   </p:cSld>
@@ -7710,7 +7411,13 @@
   <p:cSld>
     <p:spTree>
       <p:nvGrpSpPr>
-        <p:cNvPr id="1" name=""/>
+        <p:cNvPr id="1" name="">
+          <a:extLst>
+            <a:ext uri="{FF2B5EF4-FFF2-40B4-BE49-F238E27FC236}">
+              <a16:creationId xmlns:a16="http://schemas.microsoft.com/office/drawing/2014/main" id="{4647B2AA-8168-A8DD-68B1-9F206BA30EFD}"/>
+            </a:ext>
+          </a:extLst>
+        </p:cNvPr>
         <p:cNvGrpSpPr/>
         <p:nvPr/>
       </p:nvGrpSpPr>
@@ -7724,10 +7431,10 @@
       </p:grpSpPr>
       <p:sp>
         <p:nvSpPr>
-          <p:cNvPr id="5" name="タイトル 4">
+          <p:cNvPr id="2" name="タイトル 1">
             <a:extLst>
               <a:ext uri="{FF2B5EF4-FFF2-40B4-BE49-F238E27FC236}">
-                <a16:creationId xmlns:a16="http://schemas.microsoft.com/office/drawing/2014/main" id="{8F251229-051B-3D76-6D82-1969A2E93664}"/>
+                <a16:creationId xmlns:a16="http://schemas.microsoft.com/office/drawing/2014/main" id="{36906D25-9D4D-3DAB-6D64-94F1814B6088}"/>
               </a:ext>
             </a:extLst>
           </p:cNvPr>
@@ -7738,14 +7445,19 @@
             <p:ph type="title"/>
           </p:nvPr>
         </p:nvSpPr>
-        <p:spPr/>
+        <p:spPr>
+          <a:xfrm>
+            <a:off x="611956" y="0"/>
+            <a:ext cx="8532044" cy="908972"/>
+          </a:xfrm>
+        </p:spPr>
         <p:txBody>
           <a:bodyPr/>
           <a:lstStyle/>
           <a:p>
             <a:r>
               <a:rPr lang="ja-JP" altLang="en-US" dirty="0"/>
-              <a:t>課題 １０ ダイレクトマップの場合 の系列２</a:t>
+              <a:t>質問とか感想</a:t>
             </a:r>
             <a:endParaRPr lang="en-US" dirty="0"/>
           </a:p>
@@ -7753,10 +7465,10 @@
       </p:sp>
       <p:sp>
         <p:nvSpPr>
-          <p:cNvPr id="7" name="コンテンツ プレースホルダー 2">
+          <p:cNvPr id="3" name="コンテンツ プレースホルダー 2">
             <a:extLst>
               <a:ext uri="{FF2B5EF4-FFF2-40B4-BE49-F238E27FC236}">
-                <a16:creationId xmlns:a16="http://schemas.microsoft.com/office/drawing/2014/main" id="{E21D1133-FC57-F955-23BE-11C267021F5C}"/>
+                <a16:creationId xmlns:a16="http://schemas.microsoft.com/office/drawing/2014/main" id="{603FD7A0-A14B-8C54-65B2-37B49D0F0216}"/>
               </a:ext>
             </a:extLst>
           </p:cNvPr>
@@ -7769,1398 +7481,34 @@
         </p:nvSpPr>
         <p:spPr>
           <a:xfrm>
-            <a:off x="611955" y="1088974"/>
-            <a:ext cx="7830087" cy="5220057"/>
-          </a:xfrm>
-        </p:spPr>
-        <p:txBody>
-          <a:bodyPr anchor="t"/>
-          <a:lstStyle/>
-          <a:p>
-            <a:pPr lvl="1">
-              <a:buFont typeface="+mj-lt"/>
-              <a:buAutoNum type="arabicPeriod"/>
-            </a:pPr>
-            <a:r>
-              <a:rPr lang="en-US" altLang="ja-JP" sz="1400" dirty="0">
-                <a:latin typeface="Consolas" panose="020B0609020204030204" pitchFamily="49" charset="0"/>
-              </a:rPr>
-              <a:t>0x8000, 0x9000, 0xA000, 0xB000, 0x8000, 0x9000, 0xA000, 0xB000</a:t>
-            </a:r>
-          </a:p>
-          <a:p>
-            <a:pPr marL="720000" lvl="2" indent="0">
-              <a:buNone/>
-            </a:pPr>
-            <a:r>
-              <a:rPr lang="ja-JP" altLang="en-US" sz="1400" dirty="0">
-                <a:latin typeface="Consolas" panose="020B0609020204030204" pitchFamily="49" charset="0"/>
-              </a:rPr>
-              <a:t>インデックス（オレンジ）を決定するビットが全部同じ </a:t>
-            </a:r>
-            <a:r>
-              <a:rPr lang="en-US" altLang="ja-JP" sz="1400" dirty="0">
-                <a:latin typeface="Consolas" panose="020B0609020204030204" pitchFamily="49" charset="0"/>
-              </a:rPr>
-              <a:t>= </a:t>
-            </a:r>
-            <a:r>
-              <a:rPr lang="ja-JP" altLang="en-US" sz="1400" dirty="0">
-                <a:latin typeface="Consolas" panose="020B0609020204030204" pitchFamily="49" charset="0"/>
-              </a:rPr>
-              <a:t>同じエントリへ上書き</a:t>
-            </a:r>
-            <a:endParaRPr lang="en-US" altLang="ja-JP" sz="1400" dirty="0">
-              <a:latin typeface="Consolas" panose="020B0609020204030204" pitchFamily="49" charset="0"/>
-            </a:endParaRPr>
-          </a:p>
-          <a:p>
-            <a:pPr marL="720000" lvl="2" indent="0">
-              <a:buNone/>
-            </a:pPr>
-            <a:r>
-              <a:rPr lang="ja-JP" altLang="en-US" sz="1400" dirty="0">
-                <a:latin typeface="Consolas" panose="020B0609020204030204" pitchFamily="49" charset="0"/>
-              </a:rPr>
-              <a:t>最後にアクセスされた </a:t>
-            </a:r>
-            <a:r>
-              <a:rPr lang="en-US" altLang="ja-JP" sz="1400" dirty="0">
-                <a:latin typeface="Consolas" panose="020B0609020204030204" pitchFamily="49" charset="0"/>
-              </a:rPr>
-              <a:t>0xb000 </a:t>
-            </a:r>
-            <a:r>
-              <a:rPr lang="ja-JP" altLang="en-US" sz="1400" dirty="0">
-                <a:latin typeface="Consolas" panose="020B0609020204030204" pitchFamily="49" charset="0"/>
-              </a:rPr>
-              <a:t>の分が残る</a:t>
-            </a:r>
-            <a:endParaRPr lang="en-US" altLang="ja-JP" sz="1400" dirty="0">
-              <a:latin typeface="Consolas" panose="020B0609020204030204" pitchFamily="49" charset="0"/>
-            </a:endParaRPr>
-          </a:p>
-          <a:p>
-            <a:pPr lvl="2">
-              <a:buFont typeface="+mj-lt"/>
-              <a:buAutoNum type="arabicPeriod"/>
-            </a:pPr>
-            <a:r>
-              <a:rPr lang="en-US" altLang="ja-JP" sz="1400" dirty="0">
-                <a:latin typeface="Consolas" panose="020B0609020204030204" pitchFamily="49" charset="0"/>
-              </a:rPr>
-              <a:t>0x8000 = 0b1000 0000 000</a:t>
-            </a:r>
-            <a:r>
-              <a:rPr lang="en-US" altLang="ja-JP" sz="1400" dirty="0">
-                <a:solidFill>
-                  <a:schemeClr val="accent6"/>
-                </a:solidFill>
-                <a:latin typeface="Consolas" panose="020B0609020204030204" pitchFamily="49" charset="0"/>
-              </a:rPr>
-              <a:t>0 0</a:t>
-            </a:r>
-            <a:r>
-              <a:rPr lang="en-US" altLang="ja-JP" sz="1400" dirty="0">
-                <a:solidFill>
-                  <a:schemeClr val="accent3"/>
-                </a:solidFill>
-                <a:latin typeface="Consolas" panose="020B0609020204030204" pitchFamily="49" charset="0"/>
-              </a:rPr>
-              <a:t>000 miss</a:t>
-            </a:r>
-          </a:p>
-          <a:p>
-            <a:pPr lvl="2">
-              <a:buFont typeface="+mj-lt"/>
-              <a:buAutoNum type="arabicPeriod"/>
-            </a:pPr>
-            <a:r>
-              <a:rPr lang="en-US" altLang="ja-JP" sz="1400" dirty="0">
-                <a:latin typeface="Consolas" panose="020B0609020204030204" pitchFamily="49" charset="0"/>
-              </a:rPr>
-              <a:t>0x9000 = 0b1001 0000 000</a:t>
-            </a:r>
-            <a:r>
-              <a:rPr lang="en-US" altLang="ja-JP" sz="1400" dirty="0">
-                <a:solidFill>
-                  <a:schemeClr val="accent6"/>
-                </a:solidFill>
-                <a:latin typeface="Consolas" panose="020B0609020204030204" pitchFamily="49" charset="0"/>
-              </a:rPr>
-              <a:t>0 0</a:t>
-            </a:r>
-            <a:r>
-              <a:rPr lang="en-US" altLang="ja-JP" sz="1400" dirty="0">
-                <a:solidFill>
-                  <a:schemeClr val="accent3"/>
-                </a:solidFill>
-                <a:latin typeface="Consolas" panose="020B0609020204030204" pitchFamily="49" charset="0"/>
-              </a:rPr>
-              <a:t>000 miss</a:t>
-            </a:r>
-            <a:endParaRPr lang="en-US" altLang="ja-JP" sz="1400" dirty="0">
-              <a:latin typeface="Consolas" panose="020B0609020204030204" pitchFamily="49" charset="0"/>
-            </a:endParaRPr>
-          </a:p>
-          <a:p>
-            <a:pPr lvl="2">
-              <a:buFont typeface="+mj-lt"/>
-              <a:buAutoNum type="arabicPeriod"/>
-            </a:pPr>
-            <a:r>
-              <a:rPr lang="en-US" altLang="ja-JP" sz="1400" dirty="0">
-                <a:latin typeface="Consolas" panose="020B0609020204030204" pitchFamily="49" charset="0"/>
-              </a:rPr>
-              <a:t>0xA000 = 0b1010 0000 000</a:t>
-            </a:r>
-            <a:r>
-              <a:rPr lang="en-US" altLang="ja-JP" sz="1400" dirty="0">
-                <a:solidFill>
-                  <a:schemeClr val="accent6"/>
-                </a:solidFill>
-                <a:latin typeface="Consolas" panose="020B0609020204030204" pitchFamily="49" charset="0"/>
-              </a:rPr>
-              <a:t>0 0</a:t>
-            </a:r>
-            <a:r>
-              <a:rPr lang="en-US" altLang="ja-JP" sz="1400" dirty="0">
-                <a:solidFill>
-                  <a:schemeClr val="accent3"/>
-                </a:solidFill>
-                <a:latin typeface="Consolas" panose="020B0609020204030204" pitchFamily="49" charset="0"/>
-              </a:rPr>
-              <a:t>000 miss</a:t>
-            </a:r>
-            <a:endParaRPr lang="en-US" altLang="ja-JP" sz="1400" dirty="0">
-              <a:latin typeface="Consolas" panose="020B0609020204030204" pitchFamily="49" charset="0"/>
-            </a:endParaRPr>
-          </a:p>
-          <a:p>
-            <a:pPr lvl="2">
-              <a:buFont typeface="+mj-lt"/>
-              <a:buAutoNum type="arabicPeriod"/>
-            </a:pPr>
-            <a:r>
-              <a:rPr lang="en-US" altLang="ja-JP" sz="1400" dirty="0">
-                <a:latin typeface="Consolas" panose="020B0609020204030204" pitchFamily="49" charset="0"/>
-              </a:rPr>
-              <a:t>0xB000 = 0b1011 0000 000</a:t>
-            </a:r>
-            <a:r>
-              <a:rPr lang="en-US" altLang="ja-JP" sz="1400" dirty="0">
-                <a:solidFill>
-                  <a:schemeClr val="accent6"/>
-                </a:solidFill>
-                <a:latin typeface="Consolas" panose="020B0609020204030204" pitchFamily="49" charset="0"/>
-              </a:rPr>
-              <a:t>0 0</a:t>
-            </a:r>
-            <a:r>
-              <a:rPr lang="en-US" altLang="ja-JP" sz="1400" dirty="0">
-                <a:solidFill>
-                  <a:schemeClr val="accent3"/>
-                </a:solidFill>
-                <a:latin typeface="Consolas" panose="020B0609020204030204" pitchFamily="49" charset="0"/>
-              </a:rPr>
-              <a:t>000 miss</a:t>
-            </a:r>
-            <a:endParaRPr lang="en-US" altLang="ja-JP" sz="1400" dirty="0">
-              <a:latin typeface="Consolas" panose="020B0609020204030204" pitchFamily="49" charset="0"/>
-            </a:endParaRPr>
-          </a:p>
-          <a:p>
-            <a:pPr lvl="2">
-              <a:buFont typeface="+mj-lt"/>
-              <a:buAutoNum type="arabicPeriod"/>
-            </a:pPr>
-            <a:r>
-              <a:rPr lang="en-US" altLang="ja-JP" sz="1400" dirty="0">
-                <a:latin typeface="Consolas" panose="020B0609020204030204" pitchFamily="49" charset="0"/>
-              </a:rPr>
-              <a:t>0x8000 = 0b1000 0000 000</a:t>
-            </a:r>
-            <a:r>
-              <a:rPr lang="en-US" altLang="ja-JP" sz="1400" dirty="0">
-                <a:solidFill>
-                  <a:schemeClr val="accent6"/>
-                </a:solidFill>
-                <a:latin typeface="Consolas" panose="020B0609020204030204" pitchFamily="49" charset="0"/>
-              </a:rPr>
-              <a:t>0 0</a:t>
-            </a:r>
-            <a:r>
-              <a:rPr lang="en-US" altLang="ja-JP" sz="1400" dirty="0">
-                <a:solidFill>
-                  <a:schemeClr val="accent3"/>
-                </a:solidFill>
-                <a:latin typeface="Consolas" panose="020B0609020204030204" pitchFamily="49" charset="0"/>
-              </a:rPr>
-              <a:t>000 miss</a:t>
-            </a:r>
-            <a:endParaRPr lang="en-US" altLang="ja-JP" sz="1400" dirty="0">
-              <a:latin typeface="Consolas" panose="020B0609020204030204" pitchFamily="49" charset="0"/>
-            </a:endParaRPr>
-          </a:p>
-          <a:p>
-            <a:pPr lvl="2">
-              <a:buFont typeface="+mj-lt"/>
-              <a:buAutoNum type="arabicPeriod"/>
-            </a:pPr>
-            <a:r>
-              <a:rPr lang="en-US" altLang="ja-JP" sz="1400" dirty="0">
-                <a:latin typeface="Consolas" panose="020B0609020204030204" pitchFamily="49" charset="0"/>
-              </a:rPr>
-              <a:t>0x9000 = 0b1001 0000 000</a:t>
-            </a:r>
-            <a:r>
-              <a:rPr lang="en-US" altLang="ja-JP" sz="1400" dirty="0">
-                <a:solidFill>
-                  <a:schemeClr val="accent6"/>
-                </a:solidFill>
-                <a:latin typeface="Consolas" panose="020B0609020204030204" pitchFamily="49" charset="0"/>
-              </a:rPr>
-              <a:t>0 0</a:t>
-            </a:r>
-            <a:r>
-              <a:rPr lang="en-US" altLang="ja-JP" sz="1400" dirty="0">
-                <a:solidFill>
-                  <a:schemeClr val="accent3"/>
-                </a:solidFill>
-                <a:latin typeface="Consolas" panose="020B0609020204030204" pitchFamily="49" charset="0"/>
-              </a:rPr>
-              <a:t>000 miss</a:t>
-            </a:r>
-            <a:endParaRPr lang="en-US" altLang="ja-JP" sz="1400" dirty="0">
-              <a:latin typeface="Consolas" panose="020B0609020204030204" pitchFamily="49" charset="0"/>
-            </a:endParaRPr>
-          </a:p>
-          <a:p>
-            <a:pPr lvl="2">
-              <a:buFont typeface="+mj-lt"/>
-              <a:buAutoNum type="arabicPeriod"/>
-            </a:pPr>
-            <a:r>
-              <a:rPr lang="en-US" altLang="ja-JP" sz="1400" dirty="0">
-                <a:latin typeface="Consolas" panose="020B0609020204030204" pitchFamily="49" charset="0"/>
-              </a:rPr>
-              <a:t>0xA000 = 0b1010 0000 000</a:t>
-            </a:r>
-            <a:r>
-              <a:rPr lang="en-US" altLang="ja-JP" sz="1400" dirty="0">
-                <a:solidFill>
-                  <a:schemeClr val="accent6"/>
-                </a:solidFill>
-                <a:latin typeface="Consolas" panose="020B0609020204030204" pitchFamily="49" charset="0"/>
-              </a:rPr>
-              <a:t>0 0</a:t>
-            </a:r>
-            <a:r>
-              <a:rPr lang="en-US" altLang="ja-JP" sz="1400" dirty="0">
-                <a:solidFill>
-                  <a:schemeClr val="accent3"/>
-                </a:solidFill>
-                <a:latin typeface="Consolas" panose="020B0609020204030204" pitchFamily="49" charset="0"/>
-              </a:rPr>
-              <a:t>000 miss</a:t>
-            </a:r>
-            <a:endParaRPr lang="en-US" altLang="ja-JP" sz="1400" dirty="0">
-              <a:latin typeface="Consolas" panose="020B0609020204030204" pitchFamily="49" charset="0"/>
-            </a:endParaRPr>
-          </a:p>
-          <a:p>
-            <a:pPr lvl="2">
-              <a:buFont typeface="+mj-lt"/>
-              <a:buAutoNum type="arabicPeriod"/>
-            </a:pPr>
-            <a:r>
-              <a:rPr lang="en-US" altLang="ja-JP" sz="1400" dirty="0">
-                <a:latin typeface="Consolas" panose="020B0609020204030204" pitchFamily="49" charset="0"/>
-              </a:rPr>
-              <a:t>0xB000 = 0b1011 0000 000</a:t>
-            </a:r>
-            <a:r>
-              <a:rPr lang="en-US" altLang="ja-JP" sz="1400" dirty="0">
-                <a:solidFill>
-                  <a:schemeClr val="accent6"/>
-                </a:solidFill>
-                <a:latin typeface="Consolas" panose="020B0609020204030204" pitchFamily="49" charset="0"/>
-              </a:rPr>
-              <a:t>0 0</a:t>
-            </a:r>
-            <a:r>
-              <a:rPr lang="en-US" altLang="ja-JP" sz="1400" dirty="0">
-                <a:solidFill>
-                  <a:schemeClr val="accent3"/>
-                </a:solidFill>
-                <a:latin typeface="Consolas" panose="020B0609020204030204" pitchFamily="49" charset="0"/>
-              </a:rPr>
-              <a:t>000 miss  </a:t>
-            </a:r>
-            <a:br>
-              <a:rPr lang="en-US" altLang="ja-JP" sz="1400" dirty="0">
-                <a:solidFill>
-                  <a:schemeClr val="accent3"/>
-                </a:solidFill>
-                <a:latin typeface="Consolas" panose="020B0609020204030204" pitchFamily="49" charset="0"/>
-              </a:rPr>
-            </a:br>
-            <a:r>
-              <a:rPr lang="ja-JP" altLang="en-US" sz="1400" dirty="0">
-                <a:solidFill>
-                  <a:schemeClr val="accent3"/>
-                </a:solidFill>
-                <a:latin typeface="Consolas" panose="020B0609020204030204" pitchFamily="49" charset="0"/>
-              </a:rPr>
-              <a:t>　　　　　</a:t>
-            </a:r>
-            <a:r>
-              <a:rPr lang="en-US" altLang="ja-JP" sz="1400" dirty="0">
-                <a:latin typeface="Consolas" panose="020B0609020204030204" pitchFamily="49" charset="0"/>
-              </a:rPr>
-              <a:t>0b101 1000 0000=0x580</a:t>
-            </a:r>
-          </a:p>
-          <a:p>
-            <a:pPr lvl="2">
-              <a:buFont typeface="+mj-lt"/>
-              <a:buAutoNum type="arabicPeriod"/>
-            </a:pPr>
-            <a:endParaRPr lang="en-US" altLang="ja-JP" sz="1400" dirty="0">
-              <a:latin typeface="Consolas" panose="020B0609020204030204" pitchFamily="49" charset="0"/>
-            </a:endParaRPr>
-          </a:p>
-        </p:txBody>
-      </p:sp>
-      <p:sp>
-        <p:nvSpPr>
-          <p:cNvPr id="2" name="スライド番号プレースホルダー 1">
-            <a:extLst>
-              <a:ext uri="{FF2B5EF4-FFF2-40B4-BE49-F238E27FC236}">
-                <a16:creationId xmlns:a16="http://schemas.microsoft.com/office/drawing/2014/main" id="{40B77A9A-899F-2270-7269-9E9BA0B25E86}"/>
-              </a:ext>
-            </a:extLst>
-          </p:cNvPr>
-          <p:cNvSpPr>
-            <a:spLocks noGrp="1"/>
-          </p:cNvSpPr>
-          <p:nvPr>
-            <p:ph type="sldNum" sz="quarter" idx="4294967295"/>
-          </p:nvPr>
-        </p:nvSpPr>
-        <p:spPr>
-          <a:xfrm>
-            <a:off x="8424863" y="6308725"/>
-            <a:ext cx="719137" cy="549275"/>
+            <a:off x="611956" y="1088974"/>
+            <a:ext cx="7920088" cy="5220058"/>
           </a:xfrm>
         </p:spPr>
         <p:txBody>
           <a:bodyPr/>
           <a:lstStyle/>
           <a:p>
-            <a:fld id="{D2D8002D-B5B0-4BAC-B1F6-782DDCCE6D9C}" type="slidenum">
-              <a:rPr kumimoji="1" lang="ja-JP" altLang="en-US" smtClean="0"/>
-              <a:pPr/>
-              <a:t>24</a:t>
-            </a:fld>
-            <a:endParaRPr kumimoji="1" lang="ja-JP" altLang="en-US" dirty="0"/>
-          </a:p>
-        </p:txBody>
-      </p:sp>
-      <p:sp>
-        <p:nvSpPr>
-          <p:cNvPr id="4" name="正方形/長方形 3">
-            <a:extLst>
-              <a:ext uri="{FF2B5EF4-FFF2-40B4-BE49-F238E27FC236}">
-                <a16:creationId xmlns:a16="http://schemas.microsoft.com/office/drawing/2014/main" id="{AC393CB0-AD44-B0F2-135F-3AF85432425B}"/>
-              </a:ext>
-            </a:extLst>
-          </p:cNvPr>
-          <p:cNvSpPr/>
-          <p:nvPr/>
-        </p:nvSpPr>
-        <p:spPr bwMode="auto">
-          <a:xfrm>
-            <a:off x="1601966" y="5139019"/>
-            <a:ext cx="720008" cy="360004"/>
-          </a:xfrm>
-          <a:prstGeom prst="rect">
-            <a:avLst/>
-          </a:prstGeom>
-          <a:noFill/>
-          <a:ln w="9525">
-            <a:solidFill>
-              <a:schemeClr val="accent5"/>
-            </a:solidFill>
-            <a:headEnd/>
-            <a:tailEnd type="triangle" w="sm" len="med"/>
-          </a:ln>
-          <a:effectLst/>
-        </p:spPr>
-        <p:style>
-          <a:lnRef idx="1">
-            <a:schemeClr val="accent5"/>
-          </a:lnRef>
-          <a:fillRef idx="2">
-            <a:schemeClr val="accent5"/>
-          </a:fillRef>
-          <a:effectRef idx="1">
-            <a:schemeClr val="accent5"/>
-          </a:effectRef>
-          <a:fontRef idx="minor">
-            <a:schemeClr val="dk1"/>
-          </a:fontRef>
-        </p:style>
-        <p:txBody>
-          <a:bodyPr rot="0" spcFirstLastPara="0" vertOverflow="overflow" horzOverflow="overflow" vert="horz" wrap="none" lIns="91440" tIns="45720" rIns="91440" bIns="45720" numCol="1" spcCol="0" rtlCol="0" fromWordArt="0" anchor="ctr" anchorCtr="0" forceAA="0" compatLnSpc="1">
-            <a:prstTxWarp prst="textNoShape">
-              <a:avLst/>
-            </a:prstTxWarp>
-            <a:noAutofit/>
-          </a:bodyPr>
-          <a:lstStyle/>
-          <a:p>
-            <a:pPr algn="ctr"/>
-            <a:r>
-              <a:rPr lang="en-US" altLang="ja-JP" sz="1400" dirty="0">
-                <a:latin typeface="Consolas" panose="020B0609020204030204" pitchFamily="49" charset="0"/>
-              </a:rPr>
-              <a:t>0x580</a:t>
-            </a:r>
-            <a:endParaRPr kumimoji="1" lang="ja-JP" altLang="en-US" sz="1400" b="1" dirty="0">
-              <a:solidFill>
-                <a:schemeClr val="accent5"/>
-              </a:solidFill>
-              <a:latin typeface="Consolas" panose="020B0609020204030204" pitchFamily="49" charset="0"/>
-            </a:endParaRPr>
-          </a:p>
-        </p:txBody>
-      </p:sp>
-      <p:sp>
-        <p:nvSpPr>
-          <p:cNvPr id="6" name="正方形/長方形 5">
-            <a:extLst>
-              <a:ext uri="{FF2B5EF4-FFF2-40B4-BE49-F238E27FC236}">
-                <a16:creationId xmlns:a16="http://schemas.microsoft.com/office/drawing/2014/main" id="{C140DBA5-CCF0-864C-FC1E-E28B8B70F7C9}"/>
-              </a:ext>
-            </a:extLst>
-          </p:cNvPr>
-          <p:cNvSpPr/>
-          <p:nvPr/>
-        </p:nvSpPr>
-        <p:spPr bwMode="auto">
-          <a:xfrm>
-            <a:off x="1601966" y="5499023"/>
-            <a:ext cx="720008" cy="360004"/>
-          </a:xfrm>
-          <a:prstGeom prst="rect">
-            <a:avLst/>
-          </a:prstGeom>
-          <a:noFill/>
-          <a:ln w="9525">
-            <a:solidFill>
-              <a:schemeClr val="accent5"/>
-            </a:solidFill>
-            <a:headEnd/>
-            <a:tailEnd type="triangle" w="sm" len="med"/>
-          </a:ln>
-          <a:effectLst/>
-        </p:spPr>
-        <p:style>
-          <a:lnRef idx="1">
-            <a:schemeClr val="accent5"/>
-          </a:lnRef>
-          <a:fillRef idx="2">
-            <a:schemeClr val="accent5"/>
-          </a:fillRef>
-          <a:effectRef idx="1">
-            <a:schemeClr val="accent5"/>
-          </a:effectRef>
-          <a:fontRef idx="minor">
-            <a:schemeClr val="dk1"/>
-          </a:fontRef>
-        </p:style>
-        <p:txBody>
-          <a:bodyPr rot="0" spcFirstLastPara="0" vertOverflow="overflow" horzOverflow="overflow" vert="horz" wrap="none" lIns="91440" tIns="45720" rIns="91440" bIns="45720" numCol="1" spcCol="0" rtlCol="0" fromWordArt="0" anchor="ctr" anchorCtr="0" forceAA="0" compatLnSpc="1">
-            <a:prstTxWarp prst="textNoShape">
-              <a:avLst/>
-            </a:prstTxWarp>
-            <a:noAutofit/>
-          </a:bodyPr>
-          <a:lstStyle/>
-          <a:p>
-            <a:pPr algn="ctr"/>
-            <a:endParaRPr kumimoji="1" lang="ja-JP" altLang="en-US" sz="1400" dirty="0">
-              <a:solidFill>
-                <a:schemeClr val="tx1">
-                  <a:lumMod val="75000"/>
-                  <a:lumOff val="25000"/>
-                </a:schemeClr>
-              </a:solidFill>
-              <a:latin typeface="Consolas" panose="020B0609020204030204" pitchFamily="49" charset="0"/>
-            </a:endParaRPr>
-          </a:p>
-        </p:txBody>
-      </p:sp>
-      <p:sp>
-        <p:nvSpPr>
-          <p:cNvPr id="10" name="正方形/長方形 9">
-            <a:extLst>
-              <a:ext uri="{FF2B5EF4-FFF2-40B4-BE49-F238E27FC236}">
-                <a16:creationId xmlns:a16="http://schemas.microsoft.com/office/drawing/2014/main" id="{31261164-F89D-CD94-4251-A867C531C4D0}"/>
-              </a:ext>
-            </a:extLst>
-          </p:cNvPr>
-          <p:cNvSpPr/>
-          <p:nvPr/>
-        </p:nvSpPr>
-        <p:spPr bwMode="auto">
-          <a:xfrm>
-            <a:off x="1601966" y="5859027"/>
-            <a:ext cx="720008" cy="360004"/>
-          </a:xfrm>
-          <a:prstGeom prst="rect">
-            <a:avLst/>
-          </a:prstGeom>
-          <a:noFill/>
-          <a:ln w="9525">
-            <a:solidFill>
-              <a:schemeClr val="accent5"/>
-            </a:solidFill>
-            <a:headEnd/>
-            <a:tailEnd type="triangle" w="sm" len="med"/>
-          </a:ln>
-          <a:effectLst/>
-        </p:spPr>
-        <p:style>
-          <a:lnRef idx="1">
-            <a:schemeClr val="accent5"/>
-          </a:lnRef>
-          <a:fillRef idx="2">
-            <a:schemeClr val="accent5"/>
-          </a:fillRef>
-          <a:effectRef idx="1">
-            <a:schemeClr val="accent5"/>
-          </a:effectRef>
-          <a:fontRef idx="minor">
-            <a:schemeClr val="dk1"/>
-          </a:fontRef>
-        </p:style>
-        <p:txBody>
-          <a:bodyPr rot="0" spcFirstLastPara="0" vertOverflow="overflow" horzOverflow="overflow" vert="horz" wrap="none" lIns="91440" tIns="45720" rIns="91440" bIns="45720" numCol="1" spcCol="0" rtlCol="0" fromWordArt="0" anchor="ctr" anchorCtr="0" forceAA="0" compatLnSpc="1">
-            <a:prstTxWarp prst="textNoShape">
-              <a:avLst/>
-            </a:prstTxWarp>
-            <a:noAutofit/>
-          </a:bodyPr>
-          <a:lstStyle/>
-          <a:p>
-            <a:pPr algn="ctr"/>
-            <a:endParaRPr kumimoji="1" lang="ja-JP" altLang="en-US" sz="1400" b="1" dirty="0">
-              <a:solidFill>
-                <a:schemeClr val="accent5"/>
-              </a:solidFill>
-              <a:latin typeface="Consolas" panose="020B0609020204030204" pitchFamily="49" charset="0"/>
-            </a:endParaRPr>
-          </a:p>
-        </p:txBody>
-      </p:sp>
-      <p:sp>
-        <p:nvSpPr>
-          <p:cNvPr id="11" name="正方形/長方形 10">
-            <a:extLst>
-              <a:ext uri="{FF2B5EF4-FFF2-40B4-BE49-F238E27FC236}">
-                <a16:creationId xmlns:a16="http://schemas.microsoft.com/office/drawing/2014/main" id="{90536433-D4FD-70AC-1E99-B6D6FF49107F}"/>
-              </a:ext>
-            </a:extLst>
-          </p:cNvPr>
-          <p:cNvSpPr/>
-          <p:nvPr/>
-        </p:nvSpPr>
-        <p:spPr bwMode="auto">
-          <a:xfrm>
-            <a:off x="1601966" y="6219031"/>
-            <a:ext cx="720008" cy="360004"/>
-          </a:xfrm>
-          <a:prstGeom prst="rect">
-            <a:avLst/>
-          </a:prstGeom>
-          <a:noFill/>
-          <a:ln w="9525">
-            <a:solidFill>
-              <a:schemeClr val="accent5"/>
-            </a:solidFill>
-            <a:headEnd/>
-            <a:tailEnd type="triangle" w="sm" len="med"/>
-          </a:ln>
-          <a:effectLst/>
-        </p:spPr>
-        <p:style>
-          <a:lnRef idx="1">
-            <a:schemeClr val="accent5"/>
-          </a:lnRef>
-          <a:fillRef idx="2">
-            <a:schemeClr val="accent5"/>
-          </a:fillRef>
-          <a:effectRef idx="1">
-            <a:schemeClr val="accent5"/>
-          </a:effectRef>
-          <a:fontRef idx="minor">
-            <a:schemeClr val="dk1"/>
-          </a:fontRef>
-        </p:style>
-        <p:txBody>
-          <a:bodyPr rot="0" spcFirstLastPara="0" vertOverflow="overflow" horzOverflow="overflow" vert="horz" wrap="none" lIns="91440" tIns="45720" rIns="91440" bIns="45720" numCol="1" spcCol="0" rtlCol="0" fromWordArt="0" anchor="ctr" anchorCtr="0" forceAA="0" compatLnSpc="1">
-            <a:prstTxWarp prst="textNoShape">
-              <a:avLst/>
-            </a:prstTxWarp>
-            <a:noAutofit/>
-          </a:bodyPr>
-          <a:lstStyle/>
-          <a:p>
-            <a:pPr algn="ctr"/>
-            <a:endParaRPr kumimoji="1" lang="ja-JP" altLang="en-US" sz="1400" b="1" dirty="0">
-              <a:solidFill>
-                <a:schemeClr val="accent5"/>
-              </a:solidFill>
-              <a:latin typeface="Consolas" panose="020B0609020204030204" pitchFamily="49" charset="0"/>
-            </a:endParaRPr>
-          </a:p>
-        </p:txBody>
-      </p:sp>
-      <p:sp>
-        <p:nvSpPr>
-          <p:cNvPr id="14" name="正方形/長方形 13">
-            <a:extLst>
-              <a:ext uri="{FF2B5EF4-FFF2-40B4-BE49-F238E27FC236}">
-                <a16:creationId xmlns:a16="http://schemas.microsoft.com/office/drawing/2014/main" id="{7CDA8AFD-90F5-A529-0E22-51B509029226}"/>
-              </a:ext>
-            </a:extLst>
-          </p:cNvPr>
-          <p:cNvSpPr/>
-          <p:nvPr/>
-        </p:nvSpPr>
-        <p:spPr bwMode="auto">
-          <a:xfrm>
-            <a:off x="1601967" y="4779015"/>
-            <a:ext cx="720007" cy="360004"/>
-          </a:xfrm>
-          <a:prstGeom prst="rect">
-            <a:avLst/>
-          </a:prstGeom>
-          <a:noFill/>
-          <a:ln>
-            <a:noFill/>
-            <a:headEnd/>
-            <a:tailEnd type="triangle" w="sm" len="med"/>
-          </a:ln>
-          <a:effectLst/>
-        </p:spPr>
-        <p:style>
-          <a:lnRef idx="1">
-            <a:schemeClr val="accent5"/>
-          </a:lnRef>
-          <a:fillRef idx="2">
-            <a:schemeClr val="accent5"/>
-          </a:fillRef>
-          <a:effectRef idx="1">
-            <a:schemeClr val="accent5"/>
-          </a:effectRef>
-          <a:fontRef idx="minor">
-            <a:schemeClr val="dk1"/>
-          </a:fontRef>
-        </p:style>
-        <p:txBody>
-          <a:bodyPr rot="0" spcFirstLastPara="0" vertOverflow="overflow" horzOverflow="overflow" vert="horz" wrap="none" lIns="91440" tIns="45720" rIns="91440" bIns="45720" numCol="1" spcCol="0" rtlCol="0" fromWordArt="0" anchor="ctr" anchorCtr="0" forceAA="0" compatLnSpc="1">
-            <a:prstTxWarp prst="textNoShape">
-              <a:avLst/>
-            </a:prstTxWarp>
-            <a:noAutofit/>
-          </a:bodyPr>
-          <a:lstStyle/>
-          <a:p>
-            <a:pPr algn="ctr"/>
-            <a:r>
-              <a:rPr kumimoji="1" lang="ja-JP" altLang="en-US" sz="1600" dirty="0">
-                <a:solidFill>
-                  <a:schemeClr val="accent5"/>
-                </a:solidFill>
-                <a:latin typeface="+mn-ea"/>
-              </a:rPr>
-              <a:t>タグ</a:t>
-            </a:r>
-          </a:p>
-        </p:txBody>
-      </p:sp>
-      <p:sp>
-        <p:nvSpPr>
-          <p:cNvPr id="16" name="正方形/長方形 15">
-            <a:extLst>
-              <a:ext uri="{FF2B5EF4-FFF2-40B4-BE49-F238E27FC236}">
-                <a16:creationId xmlns:a16="http://schemas.microsoft.com/office/drawing/2014/main" id="{838DAF8E-EBE5-3F25-2059-B948B621D3CB}"/>
-              </a:ext>
-            </a:extLst>
-          </p:cNvPr>
-          <p:cNvSpPr/>
-          <p:nvPr/>
-        </p:nvSpPr>
-        <p:spPr bwMode="auto">
-          <a:xfrm>
-            <a:off x="1241962" y="5139019"/>
-            <a:ext cx="360003" cy="360004"/>
-          </a:xfrm>
-          <a:prstGeom prst="rect">
-            <a:avLst/>
-          </a:prstGeom>
-          <a:noFill/>
-          <a:ln>
-            <a:noFill/>
-            <a:headEnd/>
-            <a:tailEnd type="triangle" w="sm" len="med"/>
-          </a:ln>
-          <a:effectLst/>
-        </p:spPr>
-        <p:style>
-          <a:lnRef idx="1">
-            <a:schemeClr val="accent5"/>
-          </a:lnRef>
-          <a:fillRef idx="2">
-            <a:schemeClr val="accent5"/>
-          </a:fillRef>
-          <a:effectRef idx="1">
-            <a:schemeClr val="accent5"/>
-          </a:effectRef>
-          <a:fontRef idx="minor">
-            <a:schemeClr val="dk1"/>
-          </a:fontRef>
-        </p:style>
-        <p:txBody>
-          <a:bodyPr rot="0" spcFirstLastPara="0" vertOverflow="overflow" horzOverflow="overflow" vert="horz" wrap="none" lIns="91440" tIns="45720" rIns="91440" bIns="45720" numCol="1" spcCol="0" rtlCol="0" fromWordArt="0" anchor="ctr" anchorCtr="0" forceAA="0" compatLnSpc="1">
-            <a:prstTxWarp prst="textNoShape">
-              <a:avLst/>
-            </a:prstTxWarp>
-            <a:noAutofit/>
-          </a:bodyPr>
-          <a:lstStyle/>
-          <a:p>
-            <a:pPr algn="ctr"/>
-            <a:r>
-              <a:rPr kumimoji="1" lang="ja-JP" altLang="en-US" sz="1600" dirty="0">
-                <a:solidFill>
-                  <a:schemeClr val="tx1">
-                    <a:lumMod val="75000"/>
-                    <a:lumOff val="25000"/>
-                  </a:schemeClr>
-                </a:solidFill>
-                <a:latin typeface="+mn-ea"/>
-              </a:rPr>
-              <a:t>０</a:t>
-            </a:r>
-          </a:p>
-        </p:txBody>
-      </p:sp>
-      <p:sp>
-        <p:nvSpPr>
-          <p:cNvPr id="17" name="正方形/長方形 16">
-            <a:extLst>
-              <a:ext uri="{FF2B5EF4-FFF2-40B4-BE49-F238E27FC236}">
-                <a16:creationId xmlns:a16="http://schemas.microsoft.com/office/drawing/2014/main" id="{2D292777-2157-5A4A-A9FA-B8ADBD810D07}"/>
-              </a:ext>
-            </a:extLst>
-          </p:cNvPr>
-          <p:cNvSpPr/>
-          <p:nvPr/>
-        </p:nvSpPr>
-        <p:spPr bwMode="auto">
-          <a:xfrm>
-            <a:off x="1241962" y="5499023"/>
-            <a:ext cx="360003" cy="360004"/>
-          </a:xfrm>
-          <a:prstGeom prst="rect">
-            <a:avLst/>
-          </a:prstGeom>
-          <a:noFill/>
-          <a:ln>
-            <a:noFill/>
-            <a:headEnd/>
-            <a:tailEnd type="triangle" w="sm" len="med"/>
-          </a:ln>
-          <a:effectLst/>
-        </p:spPr>
-        <p:style>
-          <a:lnRef idx="1">
-            <a:schemeClr val="accent5"/>
-          </a:lnRef>
-          <a:fillRef idx="2">
-            <a:schemeClr val="accent5"/>
-          </a:fillRef>
-          <a:effectRef idx="1">
-            <a:schemeClr val="accent5"/>
-          </a:effectRef>
-          <a:fontRef idx="minor">
-            <a:schemeClr val="dk1"/>
-          </a:fontRef>
-        </p:style>
-        <p:txBody>
-          <a:bodyPr rot="0" spcFirstLastPara="0" vertOverflow="overflow" horzOverflow="overflow" vert="horz" wrap="none" lIns="91440" tIns="45720" rIns="91440" bIns="45720" numCol="1" spcCol="0" rtlCol="0" fromWordArt="0" anchor="ctr" anchorCtr="0" forceAA="0" compatLnSpc="1">
-            <a:prstTxWarp prst="textNoShape">
-              <a:avLst/>
-            </a:prstTxWarp>
-            <a:noAutofit/>
-          </a:bodyPr>
-          <a:lstStyle/>
-          <a:p>
-            <a:pPr algn="ctr"/>
-            <a:r>
-              <a:rPr kumimoji="1" lang="en-US" altLang="ja-JP" sz="1600" dirty="0">
-                <a:solidFill>
-                  <a:schemeClr val="tx1">
-                    <a:lumMod val="75000"/>
-                    <a:lumOff val="25000"/>
-                  </a:schemeClr>
-                </a:solidFill>
-                <a:latin typeface="+mn-ea"/>
-              </a:rPr>
-              <a:t>1</a:t>
-            </a:r>
-            <a:endParaRPr kumimoji="1" lang="ja-JP" altLang="en-US" sz="1600" dirty="0">
-              <a:solidFill>
-                <a:schemeClr val="tx1">
-                  <a:lumMod val="75000"/>
-                  <a:lumOff val="25000"/>
-                </a:schemeClr>
-              </a:solidFill>
-              <a:latin typeface="+mn-ea"/>
-            </a:endParaRPr>
-          </a:p>
-        </p:txBody>
-      </p:sp>
-      <p:sp>
-        <p:nvSpPr>
-          <p:cNvPr id="18" name="正方形/長方形 17">
-            <a:extLst>
-              <a:ext uri="{FF2B5EF4-FFF2-40B4-BE49-F238E27FC236}">
-                <a16:creationId xmlns:a16="http://schemas.microsoft.com/office/drawing/2014/main" id="{EDB3A50F-71A5-D307-F8F1-7BA02D3F0B03}"/>
-              </a:ext>
-            </a:extLst>
-          </p:cNvPr>
-          <p:cNvSpPr/>
-          <p:nvPr/>
-        </p:nvSpPr>
-        <p:spPr bwMode="auto">
-          <a:xfrm>
-            <a:off x="1241962" y="5859027"/>
-            <a:ext cx="360003" cy="360004"/>
-          </a:xfrm>
-          <a:prstGeom prst="rect">
-            <a:avLst/>
-          </a:prstGeom>
-          <a:noFill/>
-          <a:ln>
-            <a:noFill/>
-            <a:headEnd/>
-            <a:tailEnd type="triangle" w="sm" len="med"/>
-          </a:ln>
-          <a:effectLst/>
-        </p:spPr>
-        <p:style>
-          <a:lnRef idx="1">
-            <a:schemeClr val="accent5"/>
-          </a:lnRef>
-          <a:fillRef idx="2">
-            <a:schemeClr val="accent5"/>
-          </a:fillRef>
-          <a:effectRef idx="1">
-            <a:schemeClr val="accent5"/>
-          </a:effectRef>
-          <a:fontRef idx="minor">
-            <a:schemeClr val="dk1"/>
-          </a:fontRef>
-        </p:style>
-        <p:txBody>
-          <a:bodyPr rot="0" spcFirstLastPara="0" vertOverflow="overflow" horzOverflow="overflow" vert="horz" wrap="none" lIns="91440" tIns="45720" rIns="91440" bIns="45720" numCol="1" spcCol="0" rtlCol="0" fromWordArt="0" anchor="ctr" anchorCtr="0" forceAA="0" compatLnSpc="1">
-            <a:prstTxWarp prst="textNoShape">
-              <a:avLst/>
-            </a:prstTxWarp>
-            <a:noAutofit/>
-          </a:bodyPr>
-          <a:lstStyle/>
-          <a:p>
-            <a:pPr algn="ctr"/>
-            <a:r>
-              <a:rPr kumimoji="1" lang="en-US" altLang="ja-JP" sz="1600" dirty="0">
-                <a:solidFill>
-                  <a:schemeClr val="tx1">
-                    <a:lumMod val="75000"/>
-                    <a:lumOff val="25000"/>
-                  </a:schemeClr>
-                </a:solidFill>
-                <a:latin typeface="+mn-ea"/>
-              </a:rPr>
-              <a:t>2</a:t>
-            </a:r>
-            <a:endParaRPr kumimoji="1" lang="ja-JP" altLang="en-US" sz="1600" dirty="0">
-              <a:solidFill>
-                <a:schemeClr val="tx1">
-                  <a:lumMod val="75000"/>
-                  <a:lumOff val="25000"/>
-                </a:schemeClr>
-              </a:solidFill>
-              <a:latin typeface="+mn-ea"/>
-            </a:endParaRPr>
-          </a:p>
-        </p:txBody>
-      </p:sp>
-      <p:sp>
-        <p:nvSpPr>
-          <p:cNvPr id="19" name="正方形/長方形 18">
-            <a:extLst>
-              <a:ext uri="{FF2B5EF4-FFF2-40B4-BE49-F238E27FC236}">
-                <a16:creationId xmlns:a16="http://schemas.microsoft.com/office/drawing/2014/main" id="{136F2A28-CFF1-6093-DB52-3486C4515124}"/>
-              </a:ext>
-            </a:extLst>
-          </p:cNvPr>
-          <p:cNvSpPr/>
-          <p:nvPr/>
-        </p:nvSpPr>
-        <p:spPr bwMode="auto">
-          <a:xfrm>
-            <a:off x="1241962" y="6219031"/>
-            <a:ext cx="360003" cy="360004"/>
-          </a:xfrm>
-          <a:prstGeom prst="rect">
-            <a:avLst/>
-          </a:prstGeom>
-          <a:noFill/>
-          <a:ln>
-            <a:noFill/>
-            <a:headEnd/>
-            <a:tailEnd type="triangle" w="sm" len="med"/>
-          </a:ln>
-          <a:effectLst/>
-        </p:spPr>
-        <p:style>
-          <a:lnRef idx="1">
-            <a:schemeClr val="accent5"/>
-          </a:lnRef>
-          <a:fillRef idx="2">
-            <a:schemeClr val="accent5"/>
-          </a:fillRef>
-          <a:effectRef idx="1">
-            <a:schemeClr val="accent5"/>
-          </a:effectRef>
-          <a:fontRef idx="minor">
-            <a:schemeClr val="dk1"/>
-          </a:fontRef>
-        </p:style>
-        <p:txBody>
-          <a:bodyPr rot="0" spcFirstLastPara="0" vertOverflow="overflow" horzOverflow="overflow" vert="horz" wrap="none" lIns="91440" tIns="45720" rIns="91440" bIns="45720" numCol="1" spcCol="0" rtlCol="0" fromWordArt="0" anchor="ctr" anchorCtr="0" forceAA="0" compatLnSpc="1">
-            <a:prstTxWarp prst="textNoShape">
-              <a:avLst/>
-            </a:prstTxWarp>
-            <a:noAutofit/>
-          </a:bodyPr>
-          <a:lstStyle/>
-          <a:p>
-            <a:pPr algn="ctr"/>
-            <a:r>
-              <a:rPr kumimoji="1" lang="en-US" altLang="ja-JP" sz="1600" dirty="0">
-                <a:solidFill>
-                  <a:schemeClr val="tx1">
-                    <a:lumMod val="75000"/>
-                    <a:lumOff val="25000"/>
-                  </a:schemeClr>
-                </a:solidFill>
-                <a:latin typeface="+mn-ea"/>
-              </a:rPr>
-              <a:t>3</a:t>
-            </a:r>
-            <a:endParaRPr kumimoji="1" lang="ja-JP" altLang="en-US" sz="1600" dirty="0">
-              <a:solidFill>
-                <a:schemeClr val="tx1">
-                  <a:lumMod val="75000"/>
-                  <a:lumOff val="25000"/>
-                </a:schemeClr>
-              </a:solidFill>
-              <a:latin typeface="+mn-ea"/>
-            </a:endParaRPr>
-          </a:p>
-        </p:txBody>
-      </p:sp>
-      <p:sp>
-        <p:nvSpPr>
-          <p:cNvPr id="3" name="コンテンツ プレースホルダー 2">
-            <a:extLst>
-              <a:ext uri="{FF2B5EF4-FFF2-40B4-BE49-F238E27FC236}">
-                <a16:creationId xmlns:a16="http://schemas.microsoft.com/office/drawing/2014/main" id="{66AC32EC-20E8-F59A-04BB-C70E8CD61382}"/>
-              </a:ext>
-            </a:extLst>
-          </p:cNvPr>
-          <p:cNvSpPr txBox="1">
-            <a:spLocks/>
-          </p:cNvSpPr>
-          <p:nvPr/>
-        </p:nvSpPr>
-        <p:spPr bwMode="auto">
-          <a:xfrm>
-            <a:off x="2771980" y="4869016"/>
-            <a:ext cx="5670063" cy="1710019"/>
-          </a:xfrm>
-          <a:prstGeom prst="rect">
-            <a:avLst/>
-          </a:prstGeom>
-          <a:noFill/>
-          <a:ln w="9525">
-            <a:noFill/>
-            <a:miter lim="800000"/>
-            <a:headEnd/>
-            <a:tailEnd/>
-          </a:ln>
-          <a:effectLst/>
-        </p:spPr>
-        <p:txBody>
-          <a:bodyPr vert="horz" wrap="square" lIns="91440" tIns="45720" rIns="91440" bIns="45720" numCol="1" anchor="t" anchorCtr="0" compatLnSpc="1">
-            <a:prstTxWarp prst="textNoShape">
-              <a:avLst/>
-            </a:prstTxWarp>
-          </a:bodyPr>
-          <a:lstStyle>
-            <a:lvl1pPr marL="360000" indent="-360000" algn="l" rtl="0" eaLnBrk="1" fontAlgn="base" hangingPunct="1">
-              <a:lnSpc>
-                <a:spcPct val="110000"/>
-              </a:lnSpc>
-              <a:spcBef>
-                <a:spcPts val="2400"/>
-              </a:spcBef>
-              <a:spcAft>
-                <a:spcPts val="600"/>
-              </a:spcAft>
-              <a:buClr>
-                <a:schemeClr val="accent4"/>
-              </a:buClr>
-              <a:buFont typeface="Wingdings" panose="05000000000000000000" pitchFamily="2" charset="2"/>
-              <a:buChar char="n"/>
-              <a:tabLst>
-                <a:tab pos="1543050" algn="l"/>
-              </a:tabLst>
-              <a:defRPr kumimoji="1" sz="2000">
-                <a:solidFill>
-                  <a:schemeClr val="tx1">
-                    <a:lumMod val="75000"/>
-                    <a:lumOff val="25000"/>
-                  </a:schemeClr>
-                </a:solidFill>
-                <a:latin typeface="+mn-lt"/>
-                <a:ea typeface="メイリオ" pitchFamily="50" charset="-128"/>
-                <a:cs typeface="メイリオ" pitchFamily="50" charset="-128"/>
-              </a:defRPr>
-            </a:lvl1pPr>
-            <a:lvl2pPr marL="720000" indent="-360000" algn="l" rtl="0" eaLnBrk="1" fontAlgn="base" hangingPunct="1">
-              <a:lnSpc>
-                <a:spcPct val="110000"/>
-              </a:lnSpc>
-              <a:spcBef>
-                <a:spcPts val="300"/>
-              </a:spcBef>
-              <a:spcAft>
-                <a:spcPts val="300"/>
-              </a:spcAft>
-              <a:buClr>
-                <a:schemeClr val="accent4">
-                  <a:lumMod val="60000"/>
-                  <a:lumOff val="40000"/>
-                </a:schemeClr>
-              </a:buClr>
-              <a:buSzPct val="90000"/>
-              <a:buFont typeface="Wingdings" panose="05000000000000000000" pitchFamily="2" charset="2"/>
-              <a:buChar char="l"/>
-              <a:tabLst>
-                <a:tab pos="1543050" algn="l"/>
-              </a:tabLst>
-              <a:defRPr kumimoji="1" sz="2000">
-                <a:solidFill>
-                  <a:schemeClr val="tx1">
-                    <a:lumMod val="75000"/>
-                    <a:lumOff val="25000"/>
-                  </a:schemeClr>
-                </a:solidFill>
-                <a:latin typeface="+mn-lt"/>
-                <a:ea typeface="メイリオ" pitchFamily="50" charset="-128"/>
-                <a:cs typeface="メイリオ" pitchFamily="50" charset="-128"/>
-              </a:defRPr>
-            </a:lvl2pPr>
-            <a:lvl3pPr marL="1080000" indent="-360000" algn="l" rtl="0" eaLnBrk="1" fontAlgn="base" hangingPunct="1">
-              <a:lnSpc>
-                <a:spcPct val="110000"/>
-              </a:lnSpc>
-              <a:spcBef>
-                <a:spcPts val="300"/>
-              </a:spcBef>
-              <a:spcAft>
-                <a:spcPts val="300"/>
-              </a:spcAft>
-              <a:buClr>
-                <a:schemeClr val="accent4">
-                  <a:lumMod val="60000"/>
-                  <a:lumOff val="40000"/>
-                </a:schemeClr>
-              </a:buClr>
-              <a:buSzPct val="70000"/>
-              <a:buFont typeface="メイリオ" panose="020B0604030504040204" pitchFamily="50" charset="-128"/>
-              <a:buChar char="○"/>
-              <a:tabLst>
-                <a:tab pos="1543050" algn="l"/>
-              </a:tabLst>
-              <a:defRPr kumimoji="1" sz="2000">
-                <a:solidFill>
-                  <a:schemeClr val="tx1">
-                    <a:lumMod val="75000"/>
-                    <a:lumOff val="25000"/>
-                  </a:schemeClr>
-                </a:solidFill>
-                <a:latin typeface="+mn-lt"/>
-                <a:ea typeface="メイリオ" pitchFamily="50" charset="-128"/>
-                <a:cs typeface="メイリオ" pitchFamily="50" charset="-128"/>
-              </a:defRPr>
-            </a:lvl3pPr>
-            <a:lvl4pPr marL="1440000" indent="-360000" algn="l" rtl="0" eaLnBrk="1" fontAlgn="base" hangingPunct="1">
-              <a:lnSpc>
-                <a:spcPct val="100000"/>
-              </a:lnSpc>
-              <a:spcBef>
-                <a:spcPts val="300"/>
-              </a:spcBef>
-              <a:spcAft>
-                <a:spcPts val="300"/>
-              </a:spcAft>
-              <a:buClr>
-                <a:schemeClr val="accent4">
-                  <a:lumMod val="60000"/>
-                  <a:lumOff val="40000"/>
-                </a:schemeClr>
-              </a:buClr>
-              <a:buSzPct val="60000"/>
-              <a:buFont typeface="メイリオ" panose="020B0604030504040204" pitchFamily="50" charset="-128"/>
-              <a:buChar char="◇"/>
-              <a:tabLst>
-                <a:tab pos="1543050" algn="l"/>
-              </a:tabLst>
-              <a:defRPr kumimoji="1" sz="2000">
-                <a:solidFill>
-                  <a:schemeClr val="tx1">
-                    <a:lumMod val="75000"/>
-                    <a:lumOff val="25000"/>
-                  </a:schemeClr>
-                </a:solidFill>
-                <a:latin typeface="+mn-lt"/>
-                <a:ea typeface="メイリオ" pitchFamily="50" charset="-128"/>
-                <a:cs typeface="メイリオ" pitchFamily="50" charset="-128"/>
-              </a:defRPr>
-            </a:lvl4pPr>
-            <a:lvl5pPr marL="1800000" indent="-360000" algn="l" rtl="0" eaLnBrk="1" fontAlgn="base" hangingPunct="1">
-              <a:lnSpc>
-                <a:spcPct val="110000"/>
-              </a:lnSpc>
-              <a:spcBef>
-                <a:spcPts val="300"/>
-              </a:spcBef>
-              <a:spcAft>
-                <a:spcPts val="300"/>
-              </a:spcAft>
-              <a:buClr>
-                <a:schemeClr val="accent4">
-                  <a:lumMod val="60000"/>
-                  <a:lumOff val="40000"/>
-                </a:schemeClr>
-              </a:buClr>
-              <a:buSzPct val="80000"/>
-              <a:buFont typeface="メイリオ" panose="020B0604030504040204" pitchFamily="50" charset="-128"/>
-              <a:buChar char="＋"/>
-              <a:tabLst>
-                <a:tab pos="1543050" algn="l"/>
-              </a:tabLst>
-              <a:defRPr kumimoji="1" sz="2000">
-                <a:solidFill>
-                  <a:schemeClr val="tx1">
-                    <a:lumMod val="75000"/>
-                    <a:lumOff val="25000"/>
-                  </a:schemeClr>
-                </a:solidFill>
-                <a:latin typeface="+mn-lt"/>
-                <a:ea typeface="メイリオ" pitchFamily="50" charset="-128"/>
-                <a:cs typeface="メイリオ" pitchFamily="50" charset="-128"/>
-              </a:defRPr>
-            </a:lvl5pPr>
-            <a:lvl6pPr marL="1885950" indent="-195263" algn="l" rtl="0" eaLnBrk="1" fontAlgn="base" hangingPunct="1">
-              <a:spcBef>
-                <a:spcPct val="20000"/>
-              </a:spcBef>
-              <a:spcAft>
-                <a:spcPct val="0"/>
-              </a:spcAft>
-              <a:buClr>
-                <a:schemeClr val="hlink"/>
-              </a:buClr>
-              <a:buChar char="•"/>
-              <a:tabLst>
-                <a:tab pos="1543050" algn="l"/>
-              </a:tabLst>
-              <a:defRPr kumimoji="1" sz="1500">
-                <a:solidFill>
-                  <a:schemeClr val="tx1"/>
-                </a:solidFill>
-                <a:latin typeface="+mn-lt"/>
-                <a:ea typeface="+mn-ea"/>
-              </a:defRPr>
-            </a:lvl6pPr>
-            <a:lvl7pPr marL="2228850" indent="-195263" algn="l" rtl="0" eaLnBrk="1" fontAlgn="base" hangingPunct="1">
-              <a:spcBef>
-                <a:spcPct val="20000"/>
-              </a:spcBef>
-              <a:spcAft>
-                <a:spcPct val="0"/>
-              </a:spcAft>
-              <a:buClr>
-                <a:schemeClr val="hlink"/>
-              </a:buClr>
-              <a:buChar char="•"/>
-              <a:tabLst>
-                <a:tab pos="1543050" algn="l"/>
-              </a:tabLst>
-              <a:defRPr kumimoji="1" sz="1500">
-                <a:solidFill>
-                  <a:schemeClr val="tx1"/>
-                </a:solidFill>
-                <a:latin typeface="+mn-lt"/>
-                <a:ea typeface="+mn-ea"/>
-              </a:defRPr>
-            </a:lvl7pPr>
-            <a:lvl8pPr marL="2571750" indent="-195263" algn="l" rtl="0" eaLnBrk="1" fontAlgn="base" hangingPunct="1">
-              <a:spcBef>
-                <a:spcPct val="20000"/>
-              </a:spcBef>
-              <a:spcAft>
-                <a:spcPct val="0"/>
-              </a:spcAft>
-              <a:buClr>
-                <a:schemeClr val="hlink"/>
-              </a:buClr>
-              <a:buChar char="•"/>
-              <a:tabLst>
-                <a:tab pos="1543050" algn="l"/>
-              </a:tabLst>
-              <a:defRPr kumimoji="1" sz="1500">
-                <a:solidFill>
-                  <a:schemeClr val="tx1"/>
-                </a:solidFill>
-                <a:latin typeface="+mn-lt"/>
-                <a:ea typeface="+mn-ea"/>
-              </a:defRPr>
-            </a:lvl8pPr>
-            <a:lvl9pPr marL="2914650" indent="-195263" algn="l" rtl="0" eaLnBrk="1" fontAlgn="base" hangingPunct="1">
-              <a:spcBef>
-                <a:spcPct val="20000"/>
-              </a:spcBef>
-              <a:spcAft>
-                <a:spcPct val="0"/>
-              </a:spcAft>
-              <a:buClr>
-                <a:schemeClr val="hlink"/>
-              </a:buClr>
-              <a:buChar char="•"/>
-              <a:tabLst>
-                <a:tab pos="1543050" algn="l"/>
-              </a:tabLst>
-              <a:defRPr kumimoji="1" sz="1500">
-                <a:solidFill>
-                  <a:schemeClr val="tx1"/>
-                </a:solidFill>
-                <a:latin typeface="+mn-lt"/>
-                <a:ea typeface="+mn-ea"/>
-              </a:defRPr>
-            </a:lvl9pPr>
-          </a:lstStyle>
-          <a:p>
-            <a:pPr lvl="1"/>
-            <a:r>
-              <a:rPr lang="en-US" altLang="ja-JP" sz="1400" kern="0" dirty="0">
-                <a:latin typeface="Consolas" panose="020B0609020204030204" pitchFamily="49" charset="0"/>
-              </a:rPr>
-              <a:t>(1) </a:t>
-            </a:r>
-            <a:r>
-              <a:rPr lang="ja-JP" altLang="en-US" sz="1400" kern="0" dirty="0">
-                <a:latin typeface="Consolas" panose="020B0609020204030204" pitchFamily="49" charset="0"/>
-              </a:rPr>
-              <a:t>タグが上書きされていき，最後に </a:t>
-            </a:r>
-            <a:r>
-              <a:rPr lang="en-US" altLang="ja-JP" sz="1400" kern="0" dirty="0">
-                <a:latin typeface="Consolas" panose="020B0609020204030204" pitchFamily="49" charset="0"/>
-              </a:rPr>
-              <a:t>0x580 </a:t>
-            </a:r>
-            <a:r>
-              <a:rPr lang="ja-JP" altLang="en-US" sz="1400" kern="0" dirty="0">
-                <a:latin typeface="Consolas" panose="020B0609020204030204" pitchFamily="49" charset="0"/>
-              </a:rPr>
-              <a:t>が書き込まれる</a:t>
-            </a:r>
-            <a:endParaRPr lang="en-US" altLang="ja-JP" sz="1400" kern="0" dirty="0">
-              <a:latin typeface="Consolas" panose="020B0609020204030204" pitchFamily="49" charset="0"/>
-            </a:endParaRPr>
-          </a:p>
-          <a:p>
-            <a:pPr lvl="1"/>
-            <a:r>
-              <a:rPr lang="en-US" altLang="ja-JP" sz="1400" kern="0" dirty="0">
-                <a:latin typeface="Consolas" panose="020B0609020204030204" pitchFamily="49" charset="0"/>
-              </a:rPr>
-              <a:t>(2) </a:t>
-            </a:r>
-            <a:r>
-              <a:rPr lang="ja-JP" altLang="en-US" sz="1400" kern="0" dirty="0">
-                <a:latin typeface="Consolas" panose="020B0609020204030204" pitchFamily="49" charset="0"/>
-              </a:rPr>
-              <a:t>ヒット率：</a:t>
-            </a:r>
-            <a:r>
-              <a:rPr lang="en-US" altLang="ja-JP" sz="1400" kern="0" dirty="0">
-                <a:latin typeface="Consolas" panose="020B0609020204030204" pitchFamily="49" charset="0"/>
-              </a:rPr>
-              <a:t>0</a:t>
-            </a:r>
-          </a:p>
-          <a:p>
-            <a:pPr lvl="1"/>
-            <a:r>
-              <a:rPr lang="en-US" altLang="ja-JP" sz="1400" kern="0" dirty="0">
-                <a:latin typeface="Consolas" panose="020B0609020204030204" pitchFamily="49" charset="0"/>
-              </a:rPr>
-              <a:t>(3) </a:t>
-            </a:r>
-            <a:r>
-              <a:rPr lang="ja-JP" altLang="en-US" sz="1400" kern="0" dirty="0">
-                <a:latin typeface="Consolas" panose="020B0609020204030204" pitchFamily="49" charset="0"/>
-              </a:rPr>
-              <a:t>全部ミスなので局所性がない</a:t>
-            </a:r>
-            <a:endParaRPr lang="en-US" altLang="ja-JP" sz="1400" kern="0" dirty="0">
-              <a:latin typeface="Consolas" panose="020B0609020204030204" pitchFamily="49" charset="0"/>
-            </a:endParaRPr>
-          </a:p>
-          <a:p>
-            <a:pPr lvl="3"/>
-            <a:endParaRPr lang="en-US" altLang="ja-JP" sz="1400" kern="0" dirty="0">
-              <a:latin typeface="Consolas" panose="020B0609020204030204" pitchFamily="49" charset="0"/>
-            </a:endParaRPr>
+            <a:r>
+              <a:rPr lang="ja-JP" altLang="en-US" dirty="0"/>
+              <a:t>期末テストについて、</a:t>
+            </a:r>
+            <a:r>
+              <a:rPr lang="en-US" altLang="ja-JP" dirty="0"/>
+              <a:t>A4</a:t>
+            </a:r>
+            <a:r>
+              <a:rPr lang="ja-JP" altLang="en-US" dirty="0"/>
+              <a:t>の紙に何を書いたらよいのか悩んでいます。語句などが問われることはありますか？</a:t>
+            </a:r>
+            <a:endParaRPr lang="en-US" dirty="0"/>
           </a:p>
         </p:txBody>
       </p:sp>
     </p:spTree>
     <p:extLst>
       <p:ext uri="{BB962C8B-B14F-4D97-AF65-F5344CB8AC3E}">
-        <p14:creationId xmlns:p14="http://schemas.microsoft.com/office/powerpoint/2010/main" val="1293703810"/>
+        <p14:creationId xmlns:p14="http://schemas.microsoft.com/office/powerpoint/2010/main" val="2071206092"/>
       </p:ext>
     </p:extLst>
   </p:cSld>
@@ -9247,16 +7595,19 @@
         </p:nvSpPr>
         <p:spPr>
           <a:xfrm>
-            <a:off x="611956" y="1088974"/>
-            <a:ext cx="7920088" cy="5220058"/>
+            <a:off x="611956" y="1988984"/>
+            <a:ext cx="7920088" cy="2520028"/>
           </a:xfrm>
         </p:spPr>
         <p:txBody>
           <a:bodyPr/>
           <a:lstStyle/>
           <a:p>
-            <a:r>
-              <a:rPr lang="ja-JP" altLang="en-US" b="0" i="0" dirty="0">
+            <a:pPr marL="1080000" lvl="3" indent="0">
+              <a:buNone/>
+            </a:pPr>
+            <a:r>
+              <a:rPr lang="en-US" altLang="ja-JP" b="0" i="0" dirty="0">
                 <a:solidFill>
                   <a:srgbClr val="000000"/>
                 </a:solidFill>
@@ -9264,10 +7615,10 @@
                 <a:latin typeface="Meiryo" panose="020B0604030504040204" pitchFamily="50" charset="-128"/>
                 <a:ea typeface="Meiryo" panose="020B0604030504040204" pitchFamily="50" charset="-128"/>
               </a:rPr>
-              <a:t>スライド</a:t>
-            </a:r>
-            <a:r>
-              <a:rPr lang="en-US" altLang="ja-JP" b="0" i="0" dirty="0">
+              <a:t>		</a:t>
+            </a:r>
+            <a:r>
+              <a:rPr lang="ja-JP" altLang="en-US" b="0" i="0" dirty="0">
                 <a:solidFill>
                   <a:srgbClr val="000000"/>
                 </a:solidFill>
@@ -9275,10 +7626,10 @@
                 <a:latin typeface="Meiryo" panose="020B0604030504040204" pitchFamily="50" charset="-128"/>
                 <a:ea typeface="Meiryo" panose="020B0604030504040204" pitchFamily="50" charset="-128"/>
               </a:rPr>
-              <a:t>46</a:t>
-            </a:r>
-            <a:r>
-              <a:rPr lang="ja-JP" altLang="en-US" b="0" i="0" dirty="0">
+              <a:t>一学期間おつかれさまでした</a:t>
+            </a:r>
+            <a:br>
+              <a:rPr lang="en-US" altLang="ja-JP" b="0" i="0" dirty="0">
                 <a:solidFill>
                   <a:srgbClr val="000000"/>
                 </a:solidFill>
@@ -9286,10 +7637,9 @@
                 <a:latin typeface="Meiryo" panose="020B0604030504040204" pitchFamily="50" charset="-128"/>
                 <a:ea typeface="Meiryo" panose="020B0604030504040204" pitchFamily="50" charset="-128"/>
               </a:rPr>
-              <a:t>ページ目に</a:t>
-            </a:r>
-            <a:br>
-              <a:rPr lang="ja-JP" altLang="en-US" b="0" i="0" dirty="0">
+            </a:br>
+            <a:r>
+              <a:rPr lang="en-US" altLang="ja-JP" b="0" i="0" dirty="0">
                 <a:solidFill>
                   <a:srgbClr val="000000"/>
                 </a:solidFill>
@@ -9297,7 +7647,8 @@
                 <a:latin typeface="Meiryo" panose="020B0604030504040204" pitchFamily="50" charset="-128"/>
                 <a:ea typeface="Meiryo" panose="020B0604030504040204" pitchFamily="50" charset="-128"/>
               </a:rPr>
-            </a:br>
+              <a:t>		</a:t>
+            </a:r>
             <a:r>
               <a:rPr lang="ja-JP" altLang="en-US" b="0" i="0" dirty="0">
                 <a:solidFill>
@@ -9307,138 +7658,7 @@
                 <a:latin typeface="Meiryo" panose="020B0604030504040204" pitchFamily="50" charset="-128"/>
                 <a:ea typeface="Meiryo" panose="020B0604030504040204" pitchFamily="50" charset="-128"/>
               </a:rPr>
-              <a:t>「</a:t>
-            </a:r>
-            <a:r>
-              <a:rPr lang="en-US" altLang="ja-JP" b="0" i="0" dirty="0">
-                <a:solidFill>
-                  <a:srgbClr val="000000"/>
-                </a:solidFill>
-                <a:effectLst/>
-                <a:latin typeface="Meiryo" panose="020B0604030504040204" pitchFamily="50" charset="-128"/>
-                <a:ea typeface="Meiryo" panose="020B0604030504040204" pitchFamily="50" charset="-128"/>
-              </a:rPr>
-              <a:t>2</a:t>
-            </a:r>
-            <a:r>
-              <a:rPr lang="ja-JP" altLang="en-US" b="0" i="0" dirty="0">
-                <a:solidFill>
-                  <a:srgbClr val="000000"/>
-                </a:solidFill>
-                <a:effectLst/>
-                <a:latin typeface="Meiryo" panose="020B0604030504040204" pitchFamily="50" charset="-128"/>
-                <a:ea typeface="Meiryo" panose="020B0604030504040204" pitchFamily="50" charset="-128"/>
-              </a:rPr>
-              <a:t>段：ポインタが </a:t>
-            </a:r>
-            <a:r>
-              <a:rPr lang="en-US" altLang="ja-JP" b="0" i="0" dirty="0">
-                <a:solidFill>
-                  <a:srgbClr val="000000"/>
-                </a:solidFill>
-                <a:effectLst/>
-                <a:latin typeface="Meiryo" panose="020B0604030504040204" pitchFamily="50" charset="-128"/>
-                <a:ea typeface="Meiryo" panose="020B0604030504040204" pitchFamily="50" charset="-128"/>
-              </a:rPr>
-              <a:t>2^10+2^10=2K </a:t>
-            </a:r>
-            <a:r>
-              <a:rPr lang="ja-JP" altLang="en-US" b="0" i="0" dirty="0">
-                <a:solidFill>
-                  <a:srgbClr val="000000"/>
-                </a:solidFill>
-                <a:effectLst/>
-                <a:latin typeface="Meiryo" panose="020B0604030504040204" pitchFamily="50" charset="-128"/>
-                <a:ea typeface="Meiryo" panose="020B0604030504040204" pitchFamily="50" charset="-128"/>
-              </a:rPr>
-              <a:t>個」</a:t>
-            </a:r>
-            <a:br>
-              <a:rPr lang="ja-JP" altLang="en-US" b="0" i="0" dirty="0">
-                <a:solidFill>
-                  <a:srgbClr val="000000"/>
-                </a:solidFill>
-                <a:effectLst/>
-                <a:latin typeface="Meiryo" panose="020B0604030504040204" pitchFamily="50" charset="-128"/>
-                <a:ea typeface="Meiryo" panose="020B0604030504040204" pitchFamily="50" charset="-128"/>
-              </a:rPr>
-            </a:br>
-            <a:r>
-              <a:rPr lang="ja-JP" altLang="en-US" b="0" i="0" dirty="0">
-                <a:solidFill>
-                  <a:srgbClr val="000000"/>
-                </a:solidFill>
-                <a:effectLst/>
-                <a:latin typeface="Meiryo" panose="020B0604030504040204" pitchFamily="50" charset="-128"/>
-                <a:ea typeface="Meiryo" panose="020B0604030504040204" pitchFamily="50" charset="-128"/>
-              </a:rPr>
-              <a:t>とありますが、</a:t>
-            </a:r>
-            <a:r>
-              <a:rPr lang="en-US" altLang="ja-JP" b="0" i="0" dirty="0">
-                <a:solidFill>
-                  <a:srgbClr val="000000"/>
-                </a:solidFill>
-                <a:effectLst/>
-                <a:latin typeface="Meiryo" panose="020B0604030504040204" pitchFamily="50" charset="-128"/>
-                <a:ea typeface="Meiryo" panose="020B0604030504040204" pitchFamily="50" charset="-128"/>
-              </a:rPr>
-              <a:t>L1</a:t>
-            </a:r>
-            <a:r>
-              <a:rPr lang="ja-JP" altLang="en-US" b="0" i="0" dirty="0">
-                <a:solidFill>
-                  <a:srgbClr val="000000"/>
-                </a:solidFill>
-                <a:effectLst/>
-                <a:latin typeface="Meiryo" panose="020B0604030504040204" pitchFamily="50" charset="-128"/>
-                <a:ea typeface="Meiryo" panose="020B0604030504040204" pitchFamily="50" charset="-128"/>
-              </a:rPr>
-              <a:t>ポインタの数だけ</a:t>
-            </a:r>
-            <a:r>
-              <a:rPr lang="en-US" altLang="ja-JP" b="0" i="0" dirty="0">
-                <a:solidFill>
-                  <a:srgbClr val="000000"/>
-                </a:solidFill>
-                <a:effectLst/>
-                <a:latin typeface="Meiryo" panose="020B0604030504040204" pitchFamily="50" charset="-128"/>
-                <a:ea typeface="Meiryo" panose="020B0604030504040204" pitchFamily="50" charset="-128"/>
-              </a:rPr>
-              <a:t>L2</a:t>
-            </a:r>
-            <a:r>
-              <a:rPr lang="ja-JP" altLang="en-US" b="0" i="0" dirty="0">
-                <a:solidFill>
-                  <a:srgbClr val="000000"/>
-                </a:solidFill>
-                <a:effectLst/>
-                <a:latin typeface="Meiryo" panose="020B0604030504040204" pitchFamily="50" charset="-128"/>
-                <a:ea typeface="Meiryo" panose="020B0604030504040204" pitchFamily="50" charset="-128"/>
-              </a:rPr>
-              <a:t>ポインタがあったら</a:t>
-            </a:r>
-            <a:r>
-              <a:rPr lang="en-US" altLang="ja-JP" b="0" i="0" dirty="0">
-                <a:solidFill>
-                  <a:srgbClr val="000000"/>
-                </a:solidFill>
-                <a:effectLst/>
-                <a:latin typeface="Meiryo" panose="020B0604030504040204" pitchFamily="50" charset="-128"/>
-                <a:ea typeface="Meiryo" panose="020B0604030504040204" pitchFamily="50" charset="-128"/>
-              </a:rPr>
-              <a:t>2^10*2^10=2^20</a:t>
-            </a:r>
-            <a:r>
-              <a:rPr lang="ja-JP" altLang="en-US" b="0" i="0" dirty="0">
-                <a:solidFill>
-                  <a:srgbClr val="000000"/>
-                </a:solidFill>
-                <a:effectLst/>
-                <a:latin typeface="Meiryo" panose="020B0604030504040204" pitchFamily="50" charset="-128"/>
-                <a:ea typeface="Meiryo" panose="020B0604030504040204" pitchFamily="50" charset="-128"/>
-              </a:rPr>
-              <a:t>になるように感じて少し不思議に思いました。</a:t>
+              <a:t>テストがんばってください</a:t>
             </a:r>
             <a:endParaRPr lang="en-US" altLang="ja-JP" b="0" i="0" dirty="0">
               <a:solidFill>
@@ -9450,8 +7670,7 @@
             </a:endParaRPr>
           </a:p>
           <a:p>
-            <a:pPr lvl="1"/>
-            <a:endParaRPr lang="en-US" altLang="ja-JP" dirty="0">
+            <a:endParaRPr lang="en-US" dirty="0">
               <a:solidFill>
                 <a:srgbClr val="000000"/>
               </a:solidFill>
@@ -9459,1917 +7678,836 @@
               <a:ea typeface="Meiryo" panose="020B0604030504040204" pitchFamily="50" charset="-128"/>
             </a:endParaRPr>
           </a:p>
-          <a:p>
-            <a:pPr lvl="1"/>
-            <a:r>
-              <a:rPr lang="en-US" altLang="ja-JP" dirty="0">
-                <a:solidFill>
-                  <a:srgbClr val="000000"/>
-                </a:solidFill>
-                <a:latin typeface="Meiryo" panose="020B0604030504040204" pitchFamily="50" charset="-128"/>
-                <a:ea typeface="Meiryo" panose="020B0604030504040204" pitchFamily="50" charset="-128"/>
-              </a:rPr>
-              <a:t>L1 </a:t>
-            </a:r>
-            <a:r>
-              <a:rPr lang="ja-JP" altLang="en-US" dirty="0">
-                <a:solidFill>
-                  <a:srgbClr val="000000"/>
-                </a:solidFill>
-                <a:latin typeface="Meiryo" panose="020B0604030504040204" pitchFamily="50" charset="-128"/>
-                <a:ea typeface="Meiryo" panose="020B0604030504040204" pitchFamily="50" charset="-128"/>
-              </a:rPr>
-              <a:t>の中の１エントリだけが確保され </a:t>
-            </a:r>
-            <a:r>
-              <a:rPr lang="en-US" altLang="ja-JP" dirty="0">
-                <a:solidFill>
-                  <a:srgbClr val="000000"/>
-                </a:solidFill>
-                <a:latin typeface="Meiryo" panose="020B0604030504040204" pitchFamily="50" charset="-128"/>
-                <a:ea typeface="Meiryo" panose="020B0604030504040204" pitchFamily="50" charset="-128"/>
-              </a:rPr>
-              <a:t>L2 </a:t>
-            </a:r>
-            <a:r>
-              <a:rPr lang="ja-JP" altLang="en-US" dirty="0">
-                <a:solidFill>
-                  <a:srgbClr val="000000"/>
-                </a:solidFill>
-                <a:latin typeface="Meiryo" panose="020B0604030504040204" pitchFamily="50" charset="-128"/>
-                <a:ea typeface="Meiryo" panose="020B0604030504040204" pitchFamily="50" charset="-128"/>
-              </a:rPr>
-              <a:t>ポインタが１つだけある形です</a:t>
-            </a:r>
-            <a:endParaRPr lang="en-US" altLang="ja-JP" dirty="0">
-              <a:solidFill>
-                <a:srgbClr val="000000"/>
-              </a:solidFill>
-              <a:latin typeface="Meiryo" panose="020B0604030504040204" pitchFamily="50" charset="-128"/>
-              <a:ea typeface="Meiryo" panose="020B0604030504040204" pitchFamily="50" charset="-128"/>
-            </a:endParaRPr>
-          </a:p>
-          <a:p>
-            <a:pPr lvl="1"/>
-            <a:endParaRPr lang="ja-JP" altLang="en-US" b="0" i="0" dirty="0">
-              <a:solidFill>
-                <a:srgbClr val="000000"/>
-              </a:solidFill>
-              <a:effectLst/>
-              <a:latin typeface="Meiryo" panose="020B0604030504040204" pitchFamily="50" charset="-128"/>
-              <a:ea typeface="Meiryo" panose="020B0604030504040204" pitchFamily="50" charset="-128"/>
-            </a:endParaRPr>
-          </a:p>
-          <a:p>
-            <a:endParaRPr lang="en-US" dirty="0"/>
-          </a:p>
-        </p:txBody>
-      </p:sp>
-    </p:spTree>
-    <p:extLst>
-      <p:ext uri="{BB962C8B-B14F-4D97-AF65-F5344CB8AC3E}">
-        <p14:creationId xmlns:p14="http://schemas.microsoft.com/office/powerpoint/2010/main" val="2395592163"/>
-      </p:ext>
-    </p:extLst>
-  </p:cSld>
-  <p:clrMapOvr>
-    <a:masterClrMapping/>
-  </p:clrMapOvr>
-  <mc:AlternateContent xmlns:mc="http://schemas.openxmlformats.org/markup-compatibility/2006" xmlns:p14="http://schemas.microsoft.com/office/powerpoint/2010/main">
-    <mc:Choice Requires="p14">
-      <p:transition p14:dur="10"/>
-    </mc:Choice>
-    <mc:Fallback xmlns="">
-      <p:transition/>
-    </mc:Fallback>
-  </mc:AlternateContent>
-</p:sld>
-</file>
-
-<file path=ppt/slides/slide26.xml><?xml version="1.0" encoding="utf-8"?>
-<p:sld xmlns:a="http://schemas.openxmlformats.org/drawingml/2006/main" xmlns:r="http://schemas.openxmlformats.org/officeDocument/2006/relationships" xmlns:p="http://schemas.openxmlformats.org/presentationml/2006/main">
-  <p:cSld>
-    <p:spTree>
-      <p:nvGrpSpPr>
-        <p:cNvPr id="1" name=""/>
-        <p:cNvGrpSpPr/>
-        <p:nvPr/>
-      </p:nvGrpSpPr>
-      <p:grpSpPr>
-        <a:xfrm>
-          <a:off x="0" y="0"/>
-          <a:ext cx="0" cy="0"/>
-          <a:chOff x="0" y="0"/>
-          <a:chExt cx="0" cy="0"/>
-        </a:xfrm>
-      </p:grpSpPr>
-      <p:sp>
-        <p:nvSpPr>
-          <p:cNvPr id="2" name="タイトル 1"/>
-          <p:cNvSpPr>
-            <a:spLocks noGrp="1"/>
-          </p:cNvSpPr>
-          <p:nvPr>
-            <p:ph type="title"/>
-          </p:nvPr>
-        </p:nvSpPr>
-        <p:spPr/>
-        <p:txBody>
-          <a:bodyPr/>
-          <a:lstStyle/>
-          <a:p>
-            <a:r>
-              <a:rPr kumimoji="1" lang="ja-JP" altLang="en-US" dirty="0"/>
-              <a:t>２段ページの利点：必要な容量が少ない</a:t>
-            </a:r>
-          </a:p>
-        </p:txBody>
-      </p:sp>
-      <p:sp>
-        <p:nvSpPr>
-          <p:cNvPr id="3" name="テキスト プレースホルダー 2"/>
-          <p:cNvSpPr>
-            <a:spLocks noGrp="1"/>
-          </p:cNvSpPr>
-          <p:nvPr>
-            <p:ph type="body" sz="quarter" idx="10"/>
-          </p:nvPr>
-        </p:nvSpPr>
-        <p:spPr>
-          <a:xfrm>
-            <a:off x="611956" y="5229020"/>
-            <a:ext cx="8280092" cy="1079705"/>
-          </a:xfrm>
-        </p:spPr>
-        <p:txBody>
-          <a:bodyPr/>
-          <a:lstStyle/>
-          <a:p>
-            <a:r>
-              <a:rPr lang="en-US" altLang="ja-JP" dirty="0"/>
-              <a:t>4KB </a:t>
-            </a:r>
-            <a:r>
-              <a:rPr lang="ja-JP" altLang="en-US" dirty="0" err="1"/>
-              <a:t>のメ</a:t>
-            </a:r>
-            <a:r>
-              <a:rPr lang="ja-JP" altLang="en-US" dirty="0"/>
-              <a:t>モリを確保したときにページテーブルに必要な容量：</a:t>
-            </a:r>
-            <a:endParaRPr lang="en-US" altLang="ja-JP" dirty="0"/>
-          </a:p>
-          <a:p>
-            <a:pPr lvl="1"/>
-            <a:r>
-              <a:rPr lang="ja-JP" altLang="en-US" dirty="0"/>
-              <a:t>単段：ポインタが </a:t>
-            </a:r>
-            <a:r>
-              <a:rPr lang="en-US" altLang="ja-JP" dirty="0"/>
-              <a:t>2^20=</a:t>
-            </a:r>
-            <a:r>
-              <a:rPr lang="en-US" altLang="ja-JP" dirty="0">
-                <a:solidFill>
-                  <a:schemeClr val="accent5"/>
-                </a:solidFill>
-              </a:rPr>
-              <a:t>1024K </a:t>
-            </a:r>
-            <a:r>
-              <a:rPr lang="ja-JP" altLang="en-US" dirty="0">
-                <a:solidFill>
-                  <a:schemeClr val="accent5"/>
-                </a:solidFill>
-              </a:rPr>
-              <a:t>個</a:t>
-            </a:r>
-            <a:endParaRPr lang="en-US" altLang="ja-JP" dirty="0">
-              <a:solidFill>
-                <a:schemeClr val="accent5"/>
-              </a:solidFill>
-            </a:endParaRPr>
-          </a:p>
-          <a:p>
-            <a:pPr lvl="1"/>
-            <a:r>
-              <a:rPr lang="en-US" altLang="ja-JP" dirty="0"/>
-              <a:t>2</a:t>
-            </a:r>
-            <a:r>
-              <a:rPr lang="ja-JP" altLang="en-US" dirty="0"/>
-              <a:t>段：ポインタが </a:t>
-            </a:r>
-            <a:r>
-              <a:rPr lang="en-US" altLang="ja-JP" dirty="0">
-                <a:solidFill>
-                  <a:schemeClr val="accent5"/>
-                </a:solidFill>
-              </a:rPr>
-              <a:t>2^10</a:t>
-            </a:r>
-            <a:r>
-              <a:rPr lang="en-US" altLang="ja-JP" dirty="0"/>
-              <a:t>+</a:t>
-            </a:r>
-            <a:r>
-              <a:rPr lang="en-US" altLang="ja-JP" dirty="0">
-                <a:solidFill>
-                  <a:schemeClr val="accent4"/>
-                </a:solidFill>
-              </a:rPr>
-              <a:t>2^10</a:t>
-            </a:r>
-            <a:r>
-              <a:rPr lang="en-US" altLang="ja-JP" dirty="0"/>
-              <a:t>=</a:t>
-            </a:r>
-            <a:r>
-              <a:rPr lang="en-US" altLang="ja-JP" dirty="0">
-                <a:solidFill>
-                  <a:schemeClr val="accent4"/>
-                </a:solidFill>
-              </a:rPr>
-              <a:t>2K </a:t>
-            </a:r>
-            <a:r>
-              <a:rPr lang="ja-JP" altLang="en-US" dirty="0">
-                <a:solidFill>
-                  <a:schemeClr val="accent4"/>
-                </a:solidFill>
-              </a:rPr>
-              <a:t>個</a:t>
-            </a:r>
-          </a:p>
-        </p:txBody>
-      </p:sp>
-      <p:cxnSp>
-        <p:nvCxnSpPr>
-          <p:cNvPr id="9" name="直線コネクタ 8"/>
-          <p:cNvCxnSpPr/>
-          <p:nvPr/>
-        </p:nvCxnSpPr>
-        <p:spPr bwMode="auto">
-          <a:xfrm flipV="1">
-            <a:off x="2681979" y="1268977"/>
-            <a:ext cx="0" cy="1440015"/>
-          </a:xfrm>
-          <a:prstGeom prst="line">
-            <a:avLst/>
-          </a:prstGeom>
-          <a:ln>
-            <a:headEnd type="triangle" w="med" len="med"/>
-            <a:tailEnd type="triangle" w="med" len="med"/>
-          </a:ln>
-        </p:spPr>
-        <p:style>
-          <a:lnRef idx="2">
-            <a:schemeClr val="accent5"/>
-          </a:lnRef>
-          <a:fillRef idx="0">
-            <a:schemeClr val="accent5"/>
-          </a:fillRef>
-          <a:effectRef idx="1">
-            <a:schemeClr val="accent5"/>
-          </a:effectRef>
-          <a:fontRef idx="minor">
-            <a:schemeClr val="tx1"/>
-          </a:fontRef>
-        </p:style>
-      </p:cxnSp>
-      <p:sp>
-        <p:nvSpPr>
-          <p:cNvPr id="10" name="正方形/長方形 9"/>
-          <p:cNvSpPr/>
-          <p:nvPr/>
-        </p:nvSpPr>
-        <p:spPr bwMode="auto">
-          <a:xfrm>
-            <a:off x="3041983" y="908972"/>
-            <a:ext cx="720007" cy="360004"/>
-          </a:xfrm>
-          <a:prstGeom prst="rect">
-            <a:avLst/>
-          </a:prstGeom>
-          <a:noFill/>
-          <a:ln>
-            <a:noFill/>
-            <a:headEnd/>
-            <a:tailEnd type="triangle" w="sm" len="med"/>
-          </a:ln>
-          <a:effectLst/>
-        </p:spPr>
-        <p:style>
-          <a:lnRef idx="1">
-            <a:schemeClr val="accent5"/>
-          </a:lnRef>
-          <a:fillRef idx="2">
-            <a:schemeClr val="accent5"/>
-          </a:fillRef>
-          <a:effectRef idx="1">
-            <a:schemeClr val="accent5"/>
-          </a:effectRef>
-          <a:fontRef idx="minor">
-            <a:schemeClr val="dk1"/>
-          </a:fontRef>
-        </p:style>
-        <p:txBody>
-          <a:bodyPr rot="0" spcFirstLastPara="0" vertOverflow="overflow" horzOverflow="overflow" vert="horz" wrap="none" lIns="91440" tIns="45720" rIns="91440" bIns="45720" numCol="1" spcCol="0" rtlCol="0" fromWordArt="0" anchor="ctr" anchorCtr="0" forceAA="0" compatLnSpc="1">
-            <a:prstTxWarp prst="textNoShape">
-              <a:avLst/>
-            </a:prstTxWarp>
-            <a:noAutofit/>
-          </a:bodyPr>
-          <a:lstStyle/>
-          <a:p>
-            <a:pPr algn="ctr"/>
-            <a:r>
-              <a:rPr kumimoji="1" lang="ja-JP" altLang="en-US" sz="1600" dirty="0">
-                <a:solidFill>
-                  <a:schemeClr val="tx1">
-                    <a:lumMod val="75000"/>
-                    <a:lumOff val="25000"/>
-                  </a:schemeClr>
-                </a:solidFill>
-                <a:latin typeface="+mn-ea"/>
-              </a:rPr>
-              <a:t>単段ページ・テーブル</a:t>
-            </a:r>
-          </a:p>
-        </p:txBody>
-      </p:sp>
-      <p:sp>
-        <p:nvSpPr>
-          <p:cNvPr id="11" name="正方形/長方形 10"/>
-          <p:cNvSpPr/>
-          <p:nvPr/>
-        </p:nvSpPr>
-        <p:spPr bwMode="auto">
-          <a:xfrm>
-            <a:off x="521955" y="1898983"/>
-            <a:ext cx="540006" cy="270003"/>
-          </a:xfrm>
-          <a:prstGeom prst="rect">
-            <a:avLst/>
-          </a:prstGeom>
-          <a:noFill/>
-          <a:ln>
-            <a:noFill/>
-            <a:headEnd/>
-            <a:tailEnd type="triangle" w="sm" len="med"/>
-          </a:ln>
-          <a:effectLst/>
-        </p:spPr>
-        <p:style>
-          <a:lnRef idx="1">
-            <a:schemeClr val="accent3"/>
-          </a:lnRef>
-          <a:fillRef idx="2">
-            <a:schemeClr val="accent3"/>
-          </a:fillRef>
-          <a:effectRef idx="1">
-            <a:schemeClr val="accent3"/>
-          </a:effectRef>
-          <a:fontRef idx="minor">
-            <a:schemeClr val="dk1"/>
-          </a:fontRef>
-        </p:style>
-        <p:txBody>
-          <a:bodyPr rot="0" spcFirstLastPara="0" vertOverflow="overflow" horzOverflow="overflow" vert="horz" wrap="none" lIns="91440" tIns="45720" rIns="91440" bIns="45720" numCol="1" spcCol="0" rtlCol="0" fromWordArt="0" anchor="ctr" anchorCtr="0" forceAA="0" compatLnSpc="1">
-            <a:prstTxWarp prst="textNoShape">
-              <a:avLst/>
-            </a:prstTxWarp>
-            <a:noAutofit/>
-          </a:bodyPr>
-          <a:lstStyle/>
-          <a:p>
-            <a:r>
-              <a:rPr kumimoji="1" lang="ja-JP" altLang="en-US" dirty="0">
-                <a:solidFill>
-                  <a:schemeClr val="tx1">
-                    <a:lumMod val="75000"/>
-                    <a:lumOff val="25000"/>
-                  </a:schemeClr>
-                </a:solidFill>
-                <a:latin typeface="Consolas" panose="020B0609020204030204" pitchFamily="49" charset="0"/>
-              </a:rPr>
-              <a:t>ポインタが</a:t>
-            </a:r>
-            <a:endParaRPr kumimoji="1" lang="en-US" altLang="ja-JP" dirty="0">
-              <a:solidFill>
-                <a:schemeClr val="tx1">
-                  <a:lumMod val="75000"/>
-                  <a:lumOff val="25000"/>
-                </a:schemeClr>
-              </a:solidFill>
-              <a:latin typeface="Consolas" panose="020B0609020204030204" pitchFamily="49" charset="0"/>
-            </a:endParaRPr>
-          </a:p>
-          <a:p>
-            <a:r>
-              <a:rPr lang="en-US" altLang="ja-JP" dirty="0">
-                <a:solidFill>
-                  <a:schemeClr val="accent5"/>
-                </a:solidFill>
-                <a:latin typeface="Consolas" panose="020B0609020204030204" pitchFamily="49" charset="0"/>
-              </a:rPr>
-              <a:t>2^20</a:t>
-            </a:r>
-            <a:r>
-              <a:rPr lang="ja-JP" altLang="en-US" dirty="0">
-                <a:solidFill>
-                  <a:schemeClr val="tx1">
-                    <a:lumMod val="75000"/>
-                    <a:lumOff val="25000"/>
-                  </a:schemeClr>
-                </a:solidFill>
-                <a:latin typeface="Consolas" panose="020B0609020204030204" pitchFamily="49" charset="0"/>
-              </a:rPr>
-              <a:t>個並んで</a:t>
-            </a:r>
-            <a:r>
-              <a:rPr kumimoji="1" lang="ja-JP" altLang="en-US" dirty="0">
-                <a:solidFill>
-                  <a:schemeClr val="tx1">
-                    <a:lumMod val="75000"/>
-                    <a:lumOff val="25000"/>
-                  </a:schemeClr>
-                </a:solidFill>
-                <a:latin typeface="Consolas" panose="020B0609020204030204" pitchFamily="49" charset="0"/>
-              </a:rPr>
-              <a:t>いる</a:t>
-            </a:r>
-          </a:p>
-        </p:txBody>
-      </p:sp>
-      <p:sp>
-        <p:nvSpPr>
-          <p:cNvPr id="12" name="正方形/長方形 11"/>
-          <p:cNvSpPr/>
-          <p:nvPr/>
-        </p:nvSpPr>
-        <p:spPr bwMode="auto">
-          <a:xfrm>
-            <a:off x="521955" y="3789004"/>
-            <a:ext cx="540006" cy="270003"/>
-          </a:xfrm>
-          <a:prstGeom prst="rect">
-            <a:avLst/>
-          </a:prstGeom>
-          <a:noFill/>
-          <a:ln>
-            <a:noFill/>
-            <a:headEnd/>
-            <a:tailEnd type="triangle" w="sm" len="med"/>
-          </a:ln>
-          <a:effectLst/>
-        </p:spPr>
-        <p:style>
-          <a:lnRef idx="1">
-            <a:schemeClr val="accent3"/>
-          </a:lnRef>
-          <a:fillRef idx="2">
-            <a:schemeClr val="accent3"/>
-          </a:fillRef>
-          <a:effectRef idx="1">
-            <a:schemeClr val="accent3"/>
-          </a:effectRef>
-          <a:fontRef idx="minor">
-            <a:schemeClr val="dk1"/>
-          </a:fontRef>
-        </p:style>
-        <p:txBody>
-          <a:bodyPr rot="0" spcFirstLastPara="0" vertOverflow="overflow" horzOverflow="overflow" vert="horz" wrap="none" lIns="91440" tIns="45720" rIns="91440" bIns="45720" numCol="1" spcCol="0" rtlCol="0" fromWordArt="0" anchor="ctr" anchorCtr="0" forceAA="0" compatLnSpc="1">
-            <a:prstTxWarp prst="textNoShape">
-              <a:avLst/>
-            </a:prstTxWarp>
-            <a:noAutofit/>
-          </a:bodyPr>
-          <a:lstStyle/>
-          <a:p>
-            <a:r>
-              <a:rPr kumimoji="1" lang="ja-JP" altLang="en-US" dirty="0">
-                <a:solidFill>
-                  <a:schemeClr val="tx1">
-                    <a:lumMod val="75000"/>
-                    <a:lumOff val="25000"/>
-                  </a:schemeClr>
-                </a:solidFill>
-                <a:latin typeface="Consolas" panose="020B0609020204030204" pitchFamily="49" charset="0"/>
-              </a:rPr>
-              <a:t>ポインタが</a:t>
-            </a:r>
-            <a:endParaRPr kumimoji="1" lang="en-US" altLang="ja-JP" dirty="0">
-              <a:solidFill>
-                <a:schemeClr val="tx1">
-                  <a:lumMod val="75000"/>
-                  <a:lumOff val="25000"/>
-                </a:schemeClr>
-              </a:solidFill>
-              <a:latin typeface="Consolas" panose="020B0609020204030204" pitchFamily="49" charset="0"/>
-            </a:endParaRPr>
-          </a:p>
-          <a:p>
-            <a:r>
-              <a:rPr lang="en-US" altLang="ja-JP" dirty="0">
-                <a:solidFill>
-                  <a:schemeClr val="accent5"/>
-                </a:solidFill>
-                <a:latin typeface="Consolas" panose="020B0609020204030204" pitchFamily="49" charset="0"/>
-              </a:rPr>
-              <a:t>2^10</a:t>
-            </a:r>
-            <a:r>
-              <a:rPr lang="ja-JP" altLang="en-US" dirty="0">
-                <a:solidFill>
-                  <a:schemeClr val="tx1">
-                    <a:lumMod val="75000"/>
-                    <a:lumOff val="25000"/>
-                  </a:schemeClr>
-                </a:solidFill>
-                <a:latin typeface="Consolas" panose="020B0609020204030204" pitchFamily="49" charset="0"/>
-              </a:rPr>
-              <a:t>個並んで</a:t>
-            </a:r>
-            <a:r>
-              <a:rPr kumimoji="1" lang="ja-JP" altLang="en-US" dirty="0">
-                <a:solidFill>
-                  <a:schemeClr val="tx1">
-                    <a:lumMod val="75000"/>
-                    <a:lumOff val="25000"/>
-                  </a:schemeClr>
-                </a:solidFill>
-                <a:latin typeface="Consolas" panose="020B0609020204030204" pitchFamily="49" charset="0"/>
-              </a:rPr>
-              <a:t>いる</a:t>
-            </a:r>
-          </a:p>
-        </p:txBody>
-      </p:sp>
-      <p:sp>
-        <p:nvSpPr>
-          <p:cNvPr id="13" name="正方形/長方形 12">
+        </p:txBody>
+      </p:sp>
+      <p:sp>
+        <p:nvSpPr>
+          <p:cNvPr id="4" name="正方形/長方形 3">
             <a:extLst>
               <a:ext uri="{FF2B5EF4-FFF2-40B4-BE49-F238E27FC236}">
-                <a16:creationId xmlns:a16="http://schemas.microsoft.com/office/drawing/2014/main" id="{41F8EEC9-9620-4E9C-9B16-22677D3FA888}"/>
+                <a16:creationId xmlns:a16="http://schemas.microsoft.com/office/drawing/2014/main" id="{BEF6E61C-D39D-D2AE-20A4-0DDBE01D30E7}"/>
               </a:ext>
             </a:extLst>
           </p:cNvPr>
           <p:cNvSpPr/>
           <p:nvPr/>
         </p:nvSpPr>
-        <p:spPr bwMode="auto">
-          <a:xfrm>
-            <a:off x="2861981" y="3248998"/>
-            <a:ext cx="1080012" cy="1440016"/>
+        <p:spPr>
+          <a:xfrm>
+            <a:off x="1691968" y="3879005"/>
+            <a:ext cx="1345240" cy="738664"/>
           </a:xfrm>
           <a:prstGeom prst="rect">
             <a:avLst/>
           </a:prstGeom>
-          <a:ln>
-            <a:headEnd/>
-            <a:tailEnd type="triangle" w="sm" len="med"/>
-          </a:ln>
-        </p:spPr>
-        <p:style>
-          <a:lnRef idx="1">
-            <a:schemeClr val="dk1"/>
-          </a:lnRef>
-          <a:fillRef idx="2">
-            <a:schemeClr val="dk1"/>
-          </a:fillRef>
-          <a:effectRef idx="1">
-            <a:schemeClr val="dk1"/>
-          </a:effectRef>
-          <a:fontRef idx="minor">
-            <a:schemeClr val="dk1"/>
-          </a:fontRef>
-        </p:style>
-        <p:txBody>
-          <a:bodyPr rot="0" spcFirstLastPara="0" vertOverflow="overflow" horzOverflow="overflow" vert="horz" wrap="none" lIns="91440" tIns="45720" rIns="91440" bIns="45720" numCol="1" spcCol="0" rtlCol="0" fromWordArt="0" anchor="ctr" anchorCtr="0" forceAA="0" compatLnSpc="1">
-            <a:prstTxWarp prst="textNoShape">
-              <a:avLst/>
-            </a:prstTxWarp>
-            <a:noAutofit/>
+        </p:spPr>
+        <p:txBody>
+          <a:bodyPr wrap="none">
+            <a:spAutoFit/>
           </a:bodyPr>
           <a:lstStyle/>
           <a:p>
-            <a:pPr algn="ctr"/>
-            <a:endParaRPr kumimoji="1" lang="ja-JP" altLang="en-US" dirty="0">
-              <a:solidFill>
-                <a:schemeClr val="tx1">
-                  <a:lumMod val="75000"/>
-                  <a:lumOff val="25000"/>
-                </a:schemeClr>
-              </a:solidFill>
-              <a:latin typeface="+mn-ea"/>
-            </a:endParaRPr>
-          </a:p>
-        </p:txBody>
-      </p:sp>
-      <p:sp>
-        <p:nvSpPr>
-          <p:cNvPr id="14" name="正方形/長方形 13">
+            <a:r>
+              <a:rPr lang="ja-JP" altLang="en-US" sz="1400" b="1" dirty="0">
+                <a:solidFill>
+                  <a:schemeClr val="accent1"/>
+                </a:solidFill>
+                <a:effectLst>
+                  <a:outerShdw blurRad="38100" dist="38100" dir="2700000" algn="tl">
+                    <a:srgbClr val="000000">
+                      <a:alpha val="43137"/>
+                    </a:srgbClr>
+                  </a:outerShdw>
+                </a:effectLst>
+                <a:latin typeface="ＭＳ Ｐゴシック" pitchFamily="50" charset="-128"/>
+                <a:ea typeface="ＭＳ Ｐゴシック" pitchFamily="50" charset="-128"/>
+              </a:rPr>
+              <a:t>  ∧∧</a:t>
+            </a:r>
+          </a:p>
+          <a:p>
+            <a:r>
+              <a:rPr lang="en-US" altLang="ja-JP" sz="1400" b="1" dirty="0">
+                <a:solidFill>
+                  <a:schemeClr val="accent1"/>
+                </a:solidFill>
+                <a:effectLst>
+                  <a:outerShdw blurRad="38100" dist="38100" dir="2700000" algn="tl">
+                    <a:srgbClr val="000000">
+                      <a:alpha val="43137"/>
+                    </a:srgbClr>
+                  </a:outerShdw>
+                </a:effectLst>
+                <a:latin typeface="ＭＳ Ｐゴシック" pitchFamily="50" charset="-128"/>
+                <a:ea typeface="ＭＳ Ｐゴシック" pitchFamily="50" charset="-128"/>
+              </a:rPr>
+              <a:t> (,,</a:t>
+            </a:r>
+            <a:r>
+              <a:rPr lang="ja-JP" altLang="en-US" sz="1400" b="1" dirty="0">
+                <a:solidFill>
+                  <a:schemeClr val="accent1"/>
+                </a:solidFill>
+                <a:effectLst>
+                  <a:outerShdw blurRad="38100" dist="38100" dir="2700000" algn="tl">
+                    <a:srgbClr val="000000">
+                      <a:alpha val="43137"/>
+                    </a:srgbClr>
+                  </a:outerShdw>
+                </a:effectLst>
+                <a:latin typeface="ＭＳ Ｐゴシック" pitchFamily="50" charset="-128"/>
+                <a:ea typeface="ＭＳ Ｐゴシック" pitchFamily="50" charset="-128"/>
+              </a:rPr>
+              <a:t>ﾟ</a:t>
+            </a:r>
+            <a:r>
+              <a:rPr lang="en-US" altLang="ja-JP" sz="1400" b="1" dirty="0">
+                <a:solidFill>
+                  <a:schemeClr val="accent1"/>
+                </a:solidFill>
+                <a:effectLst>
+                  <a:outerShdw blurRad="38100" dist="38100" dir="2700000" algn="tl">
+                    <a:srgbClr val="000000">
+                      <a:alpha val="43137"/>
+                    </a:srgbClr>
+                  </a:outerShdw>
+                </a:effectLst>
+                <a:latin typeface="ＭＳ Ｐゴシック" pitchFamily="50" charset="-128"/>
+                <a:ea typeface="ＭＳ Ｐゴシック" pitchFamily="50" charset="-128"/>
+              </a:rPr>
+              <a:t>Д</a:t>
+            </a:r>
+            <a:r>
+              <a:rPr lang="ja-JP" altLang="en-US" sz="1400" b="1" dirty="0">
+                <a:solidFill>
+                  <a:schemeClr val="accent1"/>
+                </a:solidFill>
+                <a:effectLst>
+                  <a:outerShdw blurRad="38100" dist="38100" dir="2700000" algn="tl">
+                    <a:srgbClr val="000000">
+                      <a:alpha val="43137"/>
+                    </a:srgbClr>
+                  </a:outerShdw>
+                </a:effectLst>
+                <a:latin typeface="ＭＳ Ｐゴシック" pitchFamily="50" charset="-128"/>
+                <a:ea typeface="ＭＳ Ｐゴシック" pitchFamily="50" charset="-128"/>
+              </a:rPr>
+              <a:t>ﾟ</a:t>
+            </a:r>
+            <a:r>
+              <a:rPr lang="en-US" altLang="ja-JP" sz="1400" b="1" dirty="0">
+                <a:solidFill>
+                  <a:schemeClr val="accent1"/>
+                </a:solidFill>
+                <a:effectLst>
+                  <a:outerShdw blurRad="38100" dist="38100" dir="2700000" algn="tl">
+                    <a:srgbClr val="000000">
+                      <a:alpha val="43137"/>
+                    </a:srgbClr>
+                  </a:outerShdw>
+                </a:effectLst>
+                <a:latin typeface="ＭＳ Ｐゴシック" pitchFamily="50" charset="-128"/>
+                <a:ea typeface="ＭＳ Ｐゴシック" pitchFamily="50" charset="-128"/>
+              </a:rPr>
+              <a:t>) </a:t>
+            </a:r>
+            <a:r>
+              <a:rPr lang="ja-JP" altLang="en-US" sz="1400" b="1" dirty="0">
+                <a:solidFill>
+                  <a:schemeClr val="accent1"/>
+                </a:solidFill>
+                <a:effectLst>
+                  <a:outerShdw blurRad="38100" dist="38100" dir="2700000" algn="tl">
+                    <a:srgbClr val="000000">
+                      <a:alpha val="43137"/>
+                    </a:srgbClr>
+                  </a:outerShdw>
+                </a:effectLst>
+                <a:latin typeface="ＭＳ Ｐゴシック" pitchFamily="50" charset="-128"/>
+                <a:ea typeface="ＭＳ Ｐゴシック" pitchFamily="50" charset="-128"/>
+              </a:rPr>
+              <a:t>ｵﾂｶﾚｰ</a:t>
+            </a:r>
+            <a:r>
+              <a:rPr lang="en-US" altLang="ja-JP" sz="1400" b="1" dirty="0">
+                <a:solidFill>
+                  <a:schemeClr val="accent1"/>
+                </a:solidFill>
+                <a:effectLst>
+                  <a:outerShdw blurRad="38100" dist="38100" dir="2700000" algn="tl">
+                    <a:srgbClr val="000000">
+                      <a:alpha val="43137"/>
+                    </a:srgbClr>
+                  </a:outerShdw>
+                </a:effectLst>
+                <a:latin typeface="ＭＳ Ｐゴシック" pitchFamily="50" charset="-128"/>
+                <a:ea typeface="ＭＳ Ｐゴシック" pitchFamily="50" charset="-128"/>
+              </a:rPr>
+              <a:t> </a:t>
+            </a:r>
+          </a:p>
+          <a:p>
+            <a:r>
+              <a:rPr lang="ja-JP" altLang="en-US" sz="1400" b="1" dirty="0">
+                <a:solidFill>
+                  <a:schemeClr val="accent1"/>
+                </a:solidFill>
+                <a:effectLst>
+                  <a:outerShdw blurRad="38100" dist="38100" dir="2700000" algn="tl">
+                    <a:srgbClr val="000000">
+                      <a:alpha val="43137"/>
+                    </a:srgbClr>
+                  </a:outerShdw>
+                </a:effectLst>
+                <a:latin typeface="ＭＳ Ｐゴシック" pitchFamily="50" charset="-128"/>
+                <a:ea typeface="ＭＳ Ｐゴシック" pitchFamily="50" charset="-128"/>
+              </a:rPr>
+              <a:t>（つ   つ</a:t>
+            </a:r>
+          </a:p>
+        </p:txBody>
+      </p:sp>
+      <p:sp>
+        <p:nvSpPr>
+          <p:cNvPr id="5" name="正方形/長方形 4">
             <a:extLst>
               <a:ext uri="{FF2B5EF4-FFF2-40B4-BE49-F238E27FC236}">
-                <a16:creationId xmlns:a16="http://schemas.microsoft.com/office/drawing/2014/main" id="{F8E9AEA5-3FB4-455D-9495-C980C57584B6}"/>
+                <a16:creationId xmlns:a16="http://schemas.microsoft.com/office/drawing/2014/main" id="{BF9881AD-21CB-364F-EA9B-9CF70A1392E6}"/>
               </a:ext>
             </a:extLst>
           </p:cNvPr>
           <p:cNvSpPr/>
           <p:nvPr/>
         </p:nvSpPr>
-        <p:spPr bwMode="auto">
-          <a:xfrm>
-            <a:off x="2861981" y="3248998"/>
-            <a:ext cx="1080012" cy="180002"/>
+        <p:spPr>
+          <a:xfrm>
+            <a:off x="3131984" y="3879005"/>
+            <a:ext cx="1255472" cy="738664"/>
           </a:xfrm>
           <a:prstGeom prst="rect">
             <a:avLst/>
           </a:prstGeom>
-          <a:noFill/>
-          <a:ln>
-            <a:solidFill>
-              <a:schemeClr val="tx1">
-                <a:lumMod val="75000"/>
-                <a:lumOff val="25000"/>
-              </a:schemeClr>
-            </a:solidFill>
-            <a:headEnd/>
-            <a:tailEnd type="triangle" w="sm" len="med"/>
-          </a:ln>
-          <a:effectLst/>
-        </p:spPr>
-        <p:style>
-          <a:lnRef idx="1">
-            <a:schemeClr val="accent1"/>
-          </a:lnRef>
-          <a:fillRef idx="2">
-            <a:schemeClr val="accent1"/>
-          </a:fillRef>
-          <a:effectRef idx="1">
-            <a:schemeClr val="accent1"/>
-          </a:effectRef>
-          <a:fontRef idx="minor">
-            <a:schemeClr val="dk1"/>
-          </a:fontRef>
-        </p:style>
-        <p:txBody>
-          <a:bodyPr rot="0" spcFirstLastPara="0" vertOverflow="overflow" horzOverflow="overflow" vert="horz" wrap="none" lIns="91440" tIns="45720" rIns="91440" bIns="45720" numCol="1" spcCol="0" rtlCol="0" fromWordArt="0" anchor="ctr" anchorCtr="0" forceAA="0" compatLnSpc="1">
-            <a:prstTxWarp prst="textNoShape">
-              <a:avLst/>
-            </a:prstTxWarp>
-            <a:noAutofit/>
+        </p:spPr>
+        <p:txBody>
+          <a:bodyPr wrap="none">
+            <a:spAutoFit/>
           </a:bodyPr>
           <a:lstStyle/>
           <a:p>
-            <a:pPr algn="ctr"/>
-            <a:r>
-              <a:rPr lang="en-US" altLang="ja-JP" sz="1200" dirty="0">
-                <a:solidFill>
-                  <a:schemeClr val="tx1">
-                    <a:lumMod val="75000"/>
-                    <a:lumOff val="25000"/>
+            <a:r>
+              <a:rPr lang="ja-JP" altLang="en-US" sz="1400" b="1" dirty="0">
+                <a:solidFill>
+                  <a:schemeClr val="accent3">
+                    <a:lumMod val="50000"/>
                   </a:schemeClr>
                 </a:solidFill>
-                <a:latin typeface="+mn-ea"/>
-              </a:rPr>
-              <a:t>NULL</a:t>
-            </a:r>
-            <a:endParaRPr kumimoji="1" lang="ja-JP" altLang="en-US" sz="1200" dirty="0">
-              <a:solidFill>
-                <a:schemeClr val="tx1">
-                  <a:lumMod val="75000"/>
-                  <a:lumOff val="25000"/>
-                </a:schemeClr>
-              </a:solidFill>
-              <a:latin typeface="+mn-ea"/>
-            </a:endParaRPr>
-          </a:p>
-        </p:txBody>
-      </p:sp>
-      <p:sp>
-        <p:nvSpPr>
-          <p:cNvPr id="15" name="正方形/長方形 14">
+                <a:effectLst>
+                  <a:outerShdw blurRad="38100" dist="38100" dir="2700000" algn="tl">
+                    <a:srgbClr val="000000">
+                      <a:alpha val="43137"/>
+                    </a:srgbClr>
+                  </a:outerShdw>
+                </a:effectLst>
+                <a:latin typeface="ＭＳ Ｐゴシック" pitchFamily="50" charset="-128"/>
+                <a:ea typeface="ＭＳ Ｐゴシック" pitchFamily="50" charset="-128"/>
+              </a:rPr>
+              <a:t> ∧</a:t>
+            </a:r>
+            <a:r>
+              <a:rPr lang="ja-JP" altLang="en-US" sz="1400" dirty="0">
+                <a:solidFill>
+                  <a:schemeClr val="accent3">
+                    <a:lumMod val="50000"/>
+                  </a:schemeClr>
+                </a:solidFill>
+                <a:effectLst>
+                  <a:outerShdw blurRad="38100" dist="38100" dir="2700000" algn="tl">
+                    <a:srgbClr val="000000">
+                      <a:alpha val="43137"/>
+                    </a:srgbClr>
+                  </a:outerShdw>
+                </a:effectLst>
+                <a:latin typeface="ＭＳ Ｐゴシック" pitchFamily="50" charset="-128"/>
+                <a:ea typeface="ＭＳ Ｐゴシック" pitchFamily="50" charset="-128"/>
+              </a:rPr>
+              <a:t>＿</a:t>
+            </a:r>
+            <a:r>
+              <a:rPr lang="ja-JP" altLang="en-US" sz="1400" b="1" dirty="0">
+                <a:solidFill>
+                  <a:schemeClr val="accent3">
+                    <a:lumMod val="50000"/>
+                  </a:schemeClr>
+                </a:solidFill>
+                <a:effectLst>
+                  <a:outerShdw blurRad="38100" dist="38100" dir="2700000" algn="tl">
+                    <a:srgbClr val="000000">
+                      <a:alpha val="43137"/>
+                    </a:srgbClr>
+                  </a:outerShdw>
+                </a:effectLst>
+                <a:latin typeface="ＭＳ Ｐゴシック" pitchFamily="50" charset="-128"/>
+                <a:ea typeface="ＭＳ Ｐゴシック" pitchFamily="50" charset="-128"/>
+              </a:rPr>
+              <a:t>∧</a:t>
+            </a:r>
+          </a:p>
+          <a:p>
+            <a:r>
+              <a:rPr lang="en-US" altLang="ja-JP" sz="1400" b="1" dirty="0">
+                <a:solidFill>
+                  <a:schemeClr val="accent3">
+                    <a:lumMod val="50000"/>
+                  </a:schemeClr>
+                </a:solidFill>
+                <a:effectLst>
+                  <a:outerShdw blurRad="38100" dist="38100" dir="2700000" algn="tl">
+                    <a:srgbClr val="000000">
+                      <a:alpha val="43137"/>
+                    </a:srgbClr>
+                  </a:outerShdw>
+                </a:effectLst>
+                <a:latin typeface="ＭＳ Ｐゴシック" pitchFamily="50" charset="-128"/>
+                <a:ea typeface="ＭＳ Ｐゴシック" pitchFamily="50" charset="-128"/>
+              </a:rPr>
+              <a:t> (</a:t>
+            </a:r>
+            <a:r>
+              <a:rPr lang="ja-JP" altLang="en-US" sz="1400" dirty="0">
+                <a:solidFill>
+                  <a:schemeClr val="accent3">
+                    <a:lumMod val="50000"/>
+                  </a:schemeClr>
+                </a:solidFill>
+                <a:effectLst>
+                  <a:outerShdw blurRad="38100" dist="38100" dir="2700000" algn="tl">
+                    <a:srgbClr val="000000">
+                      <a:alpha val="43137"/>
+                    </a:srgbClr>
+                  </a:outerShdw>
+                </a:effectLst>
+                <a:latin typeface="ＭＳ Ｐゴシック" pitchFamily="50" charset="-128"/>
+                <a:ea typeface="ＭＳ Ｐゴシック" pitchFamily="50" charset="-128"/>
+              </a:rPr>
+              <a:t>  </a:t>
+            </a:r>
+            <a:r>
+              <a:rPr lang="en-US" altLang="ja-JP" sz="1400" dirty="0">
+                <a:solidFill>
+                  <a:schemeClr val="accent3">
+                    <a:lumMod val="50000"/>
+                  </a:schemeClr>
+                </a:solidFill>
+                <a:effectLst>
+                  <a:outerShdw blurRad="38100" dist="38100" dir="2700000" algn="tl">
+                    <a:srgbClr val="000000">
+                      <a:alpha val="43137"/>
+                    </a:srgbClr>
+                  </a:outerShdw>
+                </a:effectLst>
+                <a:latin typeface="ＭＳ Ｐゴシック" pitchFamily="50" charset="-128"/>
+                <a:ea typeface="ＭＳ Ｐゴシック" pitchFamily="50" charset="-128"/>
+              </a:rPr>
+              <a:t>´∀</a:t>
+            </a:r>
+            <a:r>
+              <a:rPr lang="ja-JP" altLang="en-US" sz="1400" dirty="0">
+                <a:solidFill>
+                  <a:schemeClr val="accent3">
+                    <a:lumMod val="50000"/>
+                  </a:schemeClr>
+                </a:solidFill>
+                <a:effectLst>
+                  <a:outerShdw blurRad="38100" dist="38100" dir="2700000" algn="tl">
+                    <a:srgbClr val="000000">
+                      <a:alpha val="43137"/>
+                    </a:srgbClr>
+                  </a:outerShdw>
+                </a:effectLst>
+                <a:latin typeface="ＭＳ Ｐゴシック" pitchFamily="50" charset="-128"/>
+                <a:ea typeface="ＭＳ Ｐゴシック" pitchFamily="50" charset="-128"/>
+              </a:rPr>
+              <a:t>｀</a:t>
+            </a:r>
+            <a:r>
+              <a:rPr lang="en-US" altLang="ja-JP" sz="1400" b="1" dirty="0">
+                <a:solidFill>
+                  <a:schemeClr val="accent3">
+                    <a:lumMod val="50000"/>
+                  </a:schemeClr>
+                </a:solidFill>
+                <a:effectLst>
+                  <a:outerShdw blurRad="38100" dist="38100" dir="2700000" algn="tl">
+                    <a:srgbClr val="000000">
+                      <a:alpha val="43137"/>
+                    </a:srgbClr>
+                  </a:outerShdw>
+                </a:effectLst>
+                <a:latin typeface="ＭＳ Ｐゴシック" pitchFamily="50" charset="-128"/>
+                <a:ea typeface="ＭＳ Ｐゴシック" pitchFamily="50" charset="-128"/>
+              </a:rPr>
+              <a:t>) </a:t>
+            </a:r>
+            <a:r>
+              <a:rPr lang="ja-JP" altLang="en-US" sz="1400" b="1" dirty="0">
+                <a:solidFill>
+                  <a:schemeClr val="accent3">
+                    <a:lumMod val="50000"/>
+                  </a:schemeClr>
+                </a:solidFill>
+                <a:effectLst>
+                  <a:outerShdw blurRad="38100" dist="38100" dir="2700000" algn="tl">
+                    <a:srgbClr val="000000">
+                      <a:alpha val="43137"/>
+                    </a:srgbClr>
+                  </a:outerShdw>
+                </a:effectLst>
+                <a:latin typeface="ＭＳ Ｐゴシック" pitchFamily="50" charset="-128"/>
+                <a:ea typeface="ＭＳ Ｐゴシック" pitchFamily="50" charset="-128"/>
+              </a:rPr>
+              <a:t>ﾏﾀﾈ</a:t>
+            </a:r>
+            <a:r>
+              <a:rPr lang="en-US" altLang="ja-JP" sz="1400" b="1" dirty="0">
+                <a:solidFill>
+                  <a:schemeClr val="accent3">
+                    <a:lumMod val="50000"/>
+                  </a:schemeClr>
+                </a:solidFill>
+                <a:effectLst>
+                  <a:outerShdw blurRad="38100" dist="38100" dir="2700000" algn="tl">
+                    <a:srgbClr val="000000">
+                      <a:alpha val="43137"/>
+                    </a:srgbClr>
+                  </a:outerShdw>
+                </a:effectLst>
+                <a:latin typeface="ＭＳ Ｐゴシック" pitchFamily="50" charset="-128"/>
+                <a:ea typeface="ＭＳ Ｐゴシック" pitchFamily="50" charset="-128"/>
+              </a:rPr>
+              <a:t> </a:t>
+            </a:r>
+          </a:p>
+          <a:p>
+            <a:r>
+              <a:rPr lang="ja-JP" altLang="en-US" sz="1400" b="1" dirty="0">
+                <a:solidFill>
+                  <a:schemeClr val="accent3">
+                    <a:lumMod val="50000"/>
+                  </a:schemeClr>
+                </a:solidFill>
+                <a:effectLst>
+                  <a:outerShdw blurRad="38100" dist="38100" dir="2700000" algn="tl">
+                    <a:srgbClr val="000000">
+                      <a:alpha val="43137"/>
+                    </a:srgbClr>
+                  </a:outerShdw>
+                </a:effectLst>
+                <a:latin typeface="ＭＳ Ｐゴシック" pitchFamily="50" charset="-128"/>
+                <a:ea typeface="ＭＳ Ｐゴシック" pitchFamily="50" charset="-128"/>
+              </a:rPr>
+              <a:t>（つ    つ</a:t>
+            </a:r>
+          </a:p>
+        </p:txBody>
+      </p:sp>
+      <p:sp>
+        <p:nvSpPr>
+          <p:cNvPr id="6" name="正方形/長方形 5">
             <a:extLst>
               <a:ext uri="{FF2B5EF4-FFF2-40B4-BE49-F238E27FC236}">
-                <a16:creationId xmlns:a16="http://schemas.microsoft.com/office/drawing/2014/main" id="{2582A728-F7F5-4B2F-8E43-305BF7418F28}"/>
+                <a16:creationId xmlns:a16="http://schemas.microsoft.com/office/drawing/2014/main" id="{A5AB8729-CCFA-F03B-A727-4DDC6BE4202A}"/>
               </a:ext>
             </a:extLst>
           </p:cNvPr>
           <p:cNvSpPr/>
           <p:nvPr/>
         </p:nvSpPr>
-        <p:spPr bwMode="auto">
-          <a:xfrm>
-            <a:off x="2861981" y="3429000"/>
-            <a:ext cx="1080012" cy="180002"/>
+        <p:spPr>
+          <a:xfrm>
+            <a:off x="4572000" y="3879005"/>
+            <a:ext cx="1361270" cy="738664"/>
           </a:xfrm>
           <a:prstGeom prst="rect">
             <a:avLst/>
           </a:prstGeom>
-          <a:noFill/>
-          <a:ln>
-            <a:solidFill>
-              <a:schemeClr val="tx1">
-                <a:lumMod val="75000"/>
-                <a:lumOff val="25000"/>
-              </a:schemeClr>
-            </a:solidFill>
-            <a:headEnd/>
-            <a:tailEnd type="triangle" w="sm" len="med"/>
-          </a:ln>
-          <a:effectLst/>
-        </p:spPr>
-        <p:style>
-          <a:lnRef idx="1">
-            <a:schemeClr val="accent1"/>
-          </a:lnRef>
-          <a:fillRef idx="2">
-            <a:schemeClr val="accent1"/>
-          </a:fillRef>
-          <a:effectRef idx="1">
-            <a:schemeClr val="accent1"/>
-          </a:effectRef>
-          <a:fontRef idx="minor">
-            <a:schemeClr val="dk1"/>
-          </a:fontRef>
-        </p:style>
-        <p:txBody>
-          <a:bodyPr rot="0" spcFirstLastPara="0" vertOverflow="overflow" horzOverflow="overflow" vert="horz" wrap="none" lIns="91440" tIns="45720" rIns="91440" bIns="45720" numCol="1" spcCol="0" rtlCol="0" fromWordArt="0" anchor="ctr" anchorCtr="0" forceAA="0" compatLnSpc="1">
-            <a:prstTxWarp prst="textNoShape">
-              <a:avLst/>
-            </a:prstTxWarp>
-            <a:noAutofit/>
+        </p:spPr>
+        <p:txBody>
+          <a:bodyPr wrap="none">
+            <a:spAutoFit/>
           </a:bodyPr>
           <a:lstStyle/>
           <a:p>
-            <a:pPr algn="ctr"/>
-            <a:r>
-              <a:rPr kumimoji="1" lang="en-US" altLang="ja-JP" sz="1200" dirty="0">
-                <a:solidFill>
-                  <a:schemeClr val="tx1">
-                    <a:lumMod val="75000"/>
-                    <a:lumOff val="25000"/>
-                  </a:schemeClr>
-                </a:solidFill>
-                <a:latin typeface="+mn-ea"/>
-              </a:rPr>
-              <a:t>NULL</a:t>
-            </a:r>
-            <a:endParaRPr kumimoji="1" lang="ja-JP" altLang="en-US" sz="1200" dirty="0">
+            <a:r>
+              <a:rPr lang="ja-JP" altLang="en-US" sz="1400" b="1" dirty="0">
+                <a:solidFill>
+                  <a:schemeClr val="accent2"/>
+                </a:solidFill>
+                <a:effectLst>
+                  <a:outerShdw blurRad="38100" dist="38100" dir="2700000" algn="tl">
+                    <a:srgbClr val="000000">
+                      <a:alpha val="43137"/>
+                    </a:srgbClr>
+                  </a:outerShdw>
+                </a:effectLst>
+                <a:latin typeface="ＭＳ Ｐゴシック" pitchFamily="50" charset="-128"/>
+                <a:ea typeface="ＭＳ Ｐゴシック" pitchFamily="50" charset="-128"/>
+              </a:rPr>
+              <a:t> ∧∧</a:t>
+            </a:r>
+            <a:r>
+              <a:rPr lang="en-US" altLang="ja-JP" sz="1400" b="1" dirty="0">
+                <a:solidFill>
+                  <a:schemeClr val="accent2"/>
+                </a:solidFill>
+                <a:effectLst>
+                  <a:outerShdw blurRad="38100" dist="38100" dir="2700000" algn="tl">
+                    <a:srgbClr val="000000">
+                      <a:alpha val="43137"/>
+                    </a:srgbClr>
+                  </a:outerShdw>
+                </a:effectLst>
+                <a:latin typeface="ＭＳ Ｐゴシック" pitchFamily="50" charset="-128"/>
+                <a:ea typeface="ＭＳ Ｐゴシック" pitchFamily="50" charset="-128"/>
+              </a:rPr>
+              <a:t>.</a:t>
+            </a:r>
+          </a:p>
+          <a:p>
+            <a:r>
+              <a:rPr lang="en-US" altLang="ja-JP" sz="1400" b="1" dirty="0">
+                <a:solidFill>
+                  <a:schemeClr val="accent2"/>
+                </a:solidFill>
+                <a:effectLst>
+                  <a:outerShdw blurRad="38100" dist="38100" dir="2700000" algn="tl">
+                    <a:srgbClr val="000000">
+                      <a:alpha val="43137"/>
+                    </a:srgbClr>
+                  </a:outerShdw>
+                </a:effectLst>
+                <a:latin typeface="ＭＳ Ｐゴシック" pitchFamily="50" charset="-128"/>
+                <a:ea typeface="ＭＳ Ｐゴシック" pitchFamily="50" charset="-128"/>
+              </a:rPr>
+              <a:t> (*</a:t>
+            </a:r>
+            <a:r>
+              <a:rPr lang="ja-JP" altLang="en-US" sz="1400" b="1" dirty="0">
+                <a:solidFill>
+                  <a:schemeClr val="accent2"/>
+                </a:solidFill>
+                <a:effectLst>
+                  <a:outerShdw blurRad="38100" dist="38100" dir="2700000" algn="tl">
+                    <a:srgbClr val="000000">
+                      <a:alpha val="43137"/>
+                    </a:srgbClr>
+                  </a:outerShdw>
+                </a:effectLst>
+                <a:latin typeface="ＭＳ Ｐゴシック" pitchFamily="50" charset="-128"/>
+                <a:ea typeface="ＭＳ Ｐゴシック" pitchFamily="50" charset="-128"/>
+              </a:rPr>
+              <a:t>ﾟーﾟ</a:t>
+            </a:r>
+            <a:r>
+              <a:rPr lang="en-US" altLang="ja-JP" sz="1400" b="1" dirty="0">
+                <a:solidFill>
+                  <a:schemeClr val="accent2"/>
+                </a:solidFill>
+                <a:effectLst>
+                  <a:outerShdw blurRad="38100" dist="38100" dir="2700000" algn="tl">
+                    <a:srgbClr val="000000">
+                      <a:alpha val="43137"/>
+                    </a:srgbClr>
+                  </a:outerShdw>
+                </a:effectLst>
+                <a:latin typeface="ＭＳ Ｐゴシック" pitchFamily="50" charset="-128"/>
+                <a:ea typeface="ＭＳ Ｐゴシック" pitchFamily="50" charset="-128"/>
+              </a:rPr>
+              <a:t>) </a:t>
+            </a:r>
+            <a:r>
+              <a:rPr lang="ja-JP" altLang="en-US" sz="1400" b="1" dirty="0">
+                <a:solidFill>
+                  <a:schemeClr val="accent2"/>
+                </a:solidFill>
+                <a:effectLst>
+                  <a:outerShdw blurRad="38100" dist="38100" dir="2700000" algn="tl">
+                    <a:srgbClr val="000000">
+                      <a:alpha val="43137"/>
+                    </a:srgbClr>
+                  </a:outerShdw>
+                </a:effectLst>
+                <a:latin typeface="ＭＳ Ｐゴシック" pitchFamily="50" charset="-128"/>
+                <a:ea typeface="ＭＳ Ｐゴシック" pitchFamily="50" charset="-128"/>
+              </a:rPr>
+              <a:t>ｶﾞﾝﾊﾞｯﾃ</a:t>
+            </a:r>
+            <a:endParaRPr lang="en-US" altLang="ja-JP" sz="1400" b="1" dirty="0">
               <a:solidFill>
-                <a:schemeClr val="tx1">
-                  <a:lumMod val="75000"/>
-                  <a:lumOff val="25000"/>
-                </a:schemeClr>
+                <a:schemeClr val="accent2"/>
               </a:solidFill>
-              <a:latin typeface="+mn-ea"/>
+              <a:effectLst>
+                <a:outerShdw blurRad="38100" dist="38100" dir="2700000" algn="tl">
+                  <a:srgbClr val="000000">
+                    <a:alpha val="43137"/>
+                  </a:srgbClr>
+                </a:outerShdw>
+              </a:effectLst>
+              <a:latin typeface="ＭＳ Ｐゴシック" pitchFamily="50" charset="-128"/>
+              <a:ea typeface="ＭＳ Ｐゴシック" pitchFamily="50" charset="-128"/>
             </a:endParaRPr>
           </a:p>
-        </p:txBody>
-      </p:sp>
-      <p:sp>
-        <p:nvSpPr>
-          <p:cNvPr id="16" name="正方形/長方形 15">
+          <a:p>
+            <a:r>
+              <a:rPr lang="ja-JP" altLang="en-US" sz="1400" b="1" dirty="0">
+                <a:solidFill>
+                  <a:schemeClr val="accent2"/>
+                </a:solidFill>
+                <a:effectLst>
+                  <a:outerShdw blurRad="38100" dist="38100" dir="2700000" algn="tl">
+                    <a:srgbClr val="000000">
+                      <a:alpha val="43137"/>
+                    </a:srgbClr>
+                  </a:outerShdw>
+                </a:effectLst>
+                <a:latin typeface="ＭＳ Ｐゴシック" pitchFamily="50" charset="-128"/>
+                <a:ea typeface="ＭＳ Ｐゴシック" pitchFamily="50" charset="-128"/>
+              </a:rPr>
+              <a:t>（つ   つ</a:t>
+            </a:r>
+          </a:p>
+        </p:txBody>
+      </p:sp>
+      <p:sp>
+        <p:nvSpPr>
+          <p:cNvPr id="7" name="正方形/長方形 6">
             <a:extLst>
               <a:ext uri="{FF2B5EF4-FFF2-40B4-BE49-F238E27FC236}">
-                <a16:creationId xmlns:a16="http://schemas.microsoft.com/office/drawing/2014/main" id="{F8E9AEA5-3FB4-455D-9495-C980C57584B6}"/>
+                <a16:creationId xmlns:a16="http://schemas.microsoft.com/office/drawing/2014/main" id="{8AE12378-1AF0-6392-12F9-D33C8FFF8AD3}"/>
               </a:ext>
             </a:extLst>
           </p:cNvPr>
           <p:cNvSpPr/>
           <p:nvPr/>
         </p:nvSpPr>
-        <p:spPr bwMode="auto">
-          <a:xfrm>
-            <a:off x="2861981" y="3609002"/>
-            <a:ext cx="1080012" cy="180002"/>
+        <p:spPr>
+          <a:xfrm>
+            <a:off x="6102017" y="3879005"/>
+            <a:ext cx="1383712" cy="738664"/>
           </a:xfrm>
           <a:prstGeom prst="rect">
             <a:avLst/>
           </a:prstGeom>
-          <a:ln>
-            <a:headEnd/>
-            <a:tailEnd type="triangle" w="sm" len="med"/>
-          </a:ln>
-          <a:effectLst/>
-        </p:spPr>
-        <p:style>
-          <a:lnRef idx="1">
-            <a:schemeClr val="accent5"/>
-          </a:lnRef>
-          <a:fillRef idx="2">
-            <a:schemeClr val="accent5"/>
-          </a:fillRef>
-          <a:effectRef idx="1">
-            <a:schemeClr val="accent5"/>
-          </a:effectRef>
-          <a:fontRef idx="minor">
-            <a:schemeClr val="dk1"/>
-          </a:fontRef>
-        </p:style>
-        <p:txBody>
-          <a:bodyPr rot="0" spcFirstLastPara="0" vertOverflow="overflow" horzOverflow="overflow" vert="horz" wrap="none" lIns="91440" tIns="45720" rIns="91440" bIns="45720" numCol="1" spcCol="0" rtlCol="0" fromWordArt="0" anchor="ctr" anchorCtr="0" forceAA="0" compatLnSpc="1">
-            <a:prstTxWarp prst="textNoShape">
-              <a:avLst/>
-            </a:prstTxWarp>
-            <a:noAutofit/>
+        </p:spPr>
+        <p:txBody>
+          <a:bodyPr wrap="none">
+            <a:spAutoFit/>
           </a:bodyPr>
           <a:lstStyle/>
           <a:p>
-            <a:pPr algn="ctr"/>
-            <a:endParaRPr kumimoji="1" lang="ja-JP" altLang="en-US" dirty="0">
+            <a:r>
+              <a:rPr lang="ja-JP" altLang="en-US" sz="1400" b="1" dirty="0">
+                <a:solidFill>
+                  <a:schemeClr val="accent4"/>
+                </a:solidFill>
+                <a:effectLst>
+                  <a:outerShdw blurRad="38100" dist="38100" dir="2700000" algn="tl">
+                    <a:srgbClr val="000000">
+                      <a:alpha val="43137"/>
+                    </a:srgbClr>
+                  </a:outerShdw>
+                </a:effectLst>
+                <a:latin typeface="ＭＳ Ｐゴシック" pitchFamily="50" charset="-128"/>
+                <a:ea typeface="ＭＳ Ｐゴシック" pitchFamily="50" charset="-128"/>
+              </a:rPr>
+              <a:t> ∧＿∧</a:t>
+            </a:r>
+          </a:p>
+          <a:p>
+            <a:r>
+              <a:rPr lang="el-GR" altLang="ja-JP" sz="1400" b="1" dirty="0">
+                <a:solidFill>
+                  <a:schemeClr val="accent4"/>
+                </a:solidFill>
+                <a:effectLst>
+                  <a:outerShdw blurRad="38100" dist="38100" dir="2700000" algn="tl">
+                    <a:srgbClr val="000000">
+                      <a:alpha val="43137"/>
+                    </a:srgbClr>
+                  </a:outerShdw>
+                </a:effectLst>
+                <a:latin typeface="ＭＳ Ｐゴシック" pitchFamily="50" charset="-128"/>
+                <a:ea typeface="ＭＳ Ｐゴシック" pitchFamily="50" charset="-128"/>
+              </a:rPr>
+              <a:t>(</a:t>
+            </a:r>
+            <a:r>
+              <a:rPr lang="en-US" altLang="ja-JP" sz="1400" b="1" dirty="0">
+                <a:solidFill>
+                  <a:schemeClr val="accent4"/>
+                </a:solidFill>
+                <a:effectLst>
+                  <a:outerShdw blurRad="38100" dist="38100" dir="2700000" algn="tl">
+                    <a:srgbClr val="000000">
+                      <a:alpha val="43137"/>
+                    </a:srgbClr>
+                  </a:outerShdw>
+                </a:effectLst>
+                <a:latin typeface="ＭＳ Ｐゴシック" pitchFamily="50" charset="-128"/>
+                <a:ea typeface="ＭＳ Ｐゴシック" pitchFamily="50" charset="-128"/>
+              </a:rPr>
+              <a:t> </a:t>
+            </a:r>
+            <a:r>
+              <a:rPr lang="el-GR" altLang="ja-JP" sz="1400" b="1" dirty="0">
+                <a:solidFill>
+                  <a:schemeClr val="accent4"/>
+                </a:solidFill>
+                <a:effectLst>
+                  <a:outerShdw blurRad="38100" dist="38100" dir="2700000" algn="tl">
+                    <a:srgbClr val="000000">
+                      <a:alpha val="43137"/>
+                    </a:srgbClr>
+                  </a:outerShdw>
+                </a:effectLst>
+                <a:latin typeface="ＭＳ Ｐゴシック" pitchFamily="50" charset="-128"/>
+                <a:ea typeface="ＭＳ Ｐゴシック" pitchFamily="50" charset="-128"/>
+              </a:rPr>
+              <a:t>´</a:t>
+            </a:r>
+            <a:r>
+              <a:rPr lang="ja-JP" altLang="el-GR" sz="1400" b="1" dirty="0">
+                <a:solidFill>
+                  <a:schemeClr val="accent4"/>
+                </a:solidFill>
+                <a:effectLst>
+                  <a:outerShdw blurRad="38100" dist="38100" dir="2700000" algn="tl">
+                    <a:srgbClr val="000000">
+                      <a:alpha val="43137"/>
+                    </a:srgbClr>
+                  </a:outerShdw>
+                </a:effectLst>
+                <a:latin typeface="ＭＳ Ｐゴシック" pitchFamily="50" charset="-128"/>
+                <a:ea typeface="ＭＳ Ｐゴシック" pitchFamily="50" charset="-128"/>
+              </a:rPr>
+              <a:t>・</a:t>
+            </a:r>
+            <a:r>
+              <a:rPr lang="el-GR" altLang="ja-JP" sz="1400" b="1" dirty="0">
+                <a:solidFill>
+                  <a:schemeClr val="accent4"/>
+                </a:solidFill>
+                <a:effectLst>
+                  <a:outerShdw blurRad="38100" dist="38100" dir="2700000" algn="tl">
+                    <a:srgbClr val="000000">
+                      <a:alpha val="43137"/>
+                    </a:srgbClr>
+                  </a:outerShdw>
+                </a:effectLst>
+                <a:latin typeface="ＭＳ Ｐゴシック" pitchFamily="50" charset="-128"/>
+                <a:ea typeface="ＭＳ Ｐゴシック" pitchFamily="50" charset="-128"/>
+              </a:rPr>
+              <a:t>ω</a:t>
+            </a:r>
+            <a:r>
+              <a:rPr lang="ja-JP" altLang="el-GR" sz="1400" b="1" dirty="0">
+                <a:solidFill>
+                  <a:schemeClr val="accent4"/>
+                </a:solidFill>
+                <a:effectLst>
+                  <a:outerShdw blurRad="38100" dist="38100" dir="2700000" algn="tl">
+                    <a:srgbClr val="000000">
+                      <a:alpha val="43137"/>
+                    </a:srgbClr>
+                  </a:outerShdw>
+                </a:effectLst>
+                <a:latin typeface="ＭＳ Ｐゴシック" pitchFamily="50" charset="-128"/>
+                <a:ea typeface="ＭＳ Ｐゴシック" pitchFamily="50" charset="-128"/>
+              </a:rPr>
+              <a:t>・</a:t>
+            </a:r>
+            <a:r>
+              <a:rPr lang="el-GR" altLang="ja-JP" sz="1400" b="1" dirty="0">
+                <a:solidFill>
+                  <a:schemeClr val="accent4"/>
+                </a:solidFill>
+                <a:effectLst>
+                  <a:outerShdw blurRad="38100" dist="38100" dir="2700000" algn="tl">
+                    <a:srgbClr val="000000">
+                      <a:alpha val="43137"/>
+                    </a:srgbClr>
+                  </a:outerShdw>
+                </a:effectLst>
+                <a:latin typeface="ＭＳ Ｐゴシック" pitchFamily="50" charset="-128"/>
+                <a:ea typeface="ＭＳ Ｐゴシック" pitchFamily="50" charset="-128"/>
+              </a:rPr>
+              <a:t>)</a:t>
+            </a:r>
+            <a:r>
+              <a:rPr lang="en-US" altLang="ja-JP" sz="1400" b="1" dirty="0">
+                <a:solidFill>
+                  <a:schemeClr val="accent4"/>
+                </a:solidFill>
+                <a:effectLst>
+                  <a:outerShdw blurRad="38100" dist="38100" dir="2700000" algn="tl">
+                    <a:srgbClr val="000000">
+                      <a:alpha val="43137"/>
+                    </a:srgbClr>
+                  </a:outerShdw>
+                </a:effectLst>
+                <a:latin typeface="ＭＳ Ｐゴシック" pitchFamily="50" charset="-128"/>
+                <a:ea typeface="ＭＳ Ｐゴシック" pitchFamily="50" charset="-128"/>
+              </a:rPr>
+              <a:t> </a:t>
+            </a:r>
+            <a:r>
+              <a:rPr lang="ja-JP" altLang="en-US" sz="1400" b="1" dirty="0">
+                <a:solidFill>
+                  <a:schemeClr val="accent4"/>
+                </a:solidFill>
+                <a:effectLst>
+                  <a:outerShdw blurRad="38100" dist="38100" dir="2700000" algn="tl">
+                    <a:srgbClr val="000000">
+                      <a:alpha val="43137"/>
+                    </a:srgbClr>
+                  </a:outerShdw>
+                </a:effectLst>
+                <a:latin typeface="ＭＳ Ｐゴシック" pitchFamily="50" charset="-128"/>
+                <a:ea typeface="ＭＳ Ｐゴシック" pitchFamily="50" charset="-128"/>
+              </a:rPr>
+              <a:t>ﾊﾞｲﾊﾞｲ</a:t>
+            </a:r>
+            <a:endParaRPr lang="en-US" altLang="ja-JP" sz="1400" b="1" dirty="0">
               <a:solidFill>
-                <a:schemeClr val="tx1">
-                  <a:lumMod val="75000"/>
-                  <a:lumOff val="25000"/>
-                </a:schemeClr>
+                <a:schemeClr val="accent4"/>
               </a:solidFill>
-              <a:latin typeface="+mn-ea"/>
+              <a:effectLst>
+                <a:outerShdw blurRad="38100" dist="38100" dir="2700000" algn="tl">
+                  <a:srgbClr val="000000">
+                    <a:alpha val="43137"/>
+                  </a:srgbClr>
+                </a:outerShdw>
+              </a:effectLst>
+              <a:latin typeface="ＭＳ Ｐゴシック" pitchFamily="50" charset="-128"/>
+              <a:ea typeface="ＭＳ Ｐゴシック" pitchFamily="50" charset="-128"/>
             </a:endParaRPr>
           </a:p>
-        </p:txBody>
-      </p:sp>
-      <p:sp>
-        <p:nvSpPr>
-          <p:cNvPr id="17" name="正方形/長方形 16">
-            <a:extLst>
-              <a:ext uri="{FF2B5EF4-FFF2-40B4-BE49-F238E27FC236}">
-                <a16:creationId xmlns:a16="http://schemas.microsoft.com/office/drawing/2014/main" id="{F8E9AEA5-3FB4-455D-9495-C980C57584B6}"/>
-              </a:ext>
-            </a:extLst>
-          </p:cNvPr>
-          <p:cNvSpPr/>
-          <p:nvPr/>
-        </p:nvSpPr>
-        <p:spPr bwMode="auto">
-          <a:xfrm>
-            <a:off x="2861981" y="3789004"/>
-            <a:ext cx="1080012" cy="900010"/>
-          </a:xfrm>
-          <a:prstGeom prst="rect">
-            <a:avLst/>
-          </a:prstGeom>
-          <a:noFill/>
-          <a:ln>
-            <a:solidFill>
-              <a:schemeClr val="tx1">
-                <a:lumMod val="75000"/>
-                <a:lumOff val="25000"/>
-              </a:schemeClr>
-            </a:solidFill>
-            <a:headEnd/>
-            <a:tailEnd type="triangle" w="sm" len="med"/>
-          </a:ln>
-          <a:effectLst/>
-        </p:spPr>
-        <p:style>
-          <a:lnRef idx="1">
-            <a:schemeClr val="accent1"/>
-          </a:lnRef>
-          <a:fillRef idx="2">
-            <a:schemeClr val="accent1"/>
-          </a:fillRef>
-          <a:effectRef idx="1">
-            <a:schemeClr val="accent1"/>
-          </a:effectRef>
-          <a:fontRef idx="minor">
-            <a:schemeClr val="dk1"/>
-          </a:fontRef>
-        </p:style>
-        <p:txBody>
-          <a:bodyPr rot="0" spcFirstLastPara="0" vertOverflow="overflow" horzOverflow="overflow" vert="vert270" wrap="none" lIns="91440" tIns="45720" rIns="91440" bIns="45720" numCol="1" spcCol="0" rtlCol="0" fromWordArt="0" anchor="ctr" anchorCtr="0" forceAA="0" compatLnSpc="1">
-            <a:prstTxWarp prst="textNoShape">
-              <a:avLst/>
-            </a:prstTxWarp>
-            <a:noAutofit/>
-          </a:bodyPr>
-          <a:lstStyle/>
-          <a:p>
-            <a:pPr algn="ctr"/>
-            <a:r>
-              <a:rPr kumimoji="1" lang="ja-JP" altLang="en-US" dirty="0">
-                <a:solidFill>
-                  <a:schemeClr val="tx1">
-                    <a:lumMod val="75000"/>
-                    <a:lumOff val="25000"/>
-                  </a:schemeClr>
-                </a:solidFill>
-                <a:latin typeface="+mn-ea"/>
-              </a:rPr>
-              <a:t>･･･</a:t>
-            </a:r>
-          </a:p>
-        </p:txBody>
-      </p:sp>
-      <p:cxnSp>
-        <p:nvCxnSpPr>
-          <p:cNvPr id="18" name="直線コネクタ 17"/>
-          <p:cNvCxnSpPr/>
-          <p:nvPr/>
-        </p:nvCxnSpPr>
-        <p:spPr bwMode="auto">
-          <a:xfrm flipV="1">
-            <a:off x="2681979" y="3248999"/>
-            <a:ext cx="0" cy="1440015"/>
-          </a:xfrm>
-          <a:prstGeom prst="line">
-            <a:avLst/>
-          </a:prstGeom>
-          <a:ln>
-            <a:headEnd type="triangle" w="med" len="med"/>
-            <a:tailEnd type="triangle" w="med" len="med"/>
-          </a:ln>
-        </p:spPr>
-        <p:style>
-          <a:lnRef idx="2">
-            <a:schemeClr val="accent5"/>
-          </a:lnRef>
-          <a:fillRef idx="0">
-            <a:schemeClr val="accent5"/>
-          </a:fillRef>
-          <a:effectRef idx="1">
-            <a:schemeClr val="accent5"/>
-          </a:effectRef>
-          <a:fontRef idx="minor">
-            <a:schemeClr val="tx1"/>
-          </a:fontRef>
-        </p:style>
-      </p:cxnSp>
-      <p:sp>
-        <p:nvSpPr>
-          <p:cNvPr id="19" name="正方形/長方形 18"/>
-          <p:cNvSpPr/>
-          <p:nvPr/>
-        </p:nvSpPr>
-        <p:spPr bwMode="auto">
-          <a:xfrm>
-            <a:off x="3041983" y="2888994"/>
-            <a:ext cx="720007" cy="360004"/>
-          </a:xfrm>
-          <a:prstGeom prst="rect">
-            <a:avLst/>
-          </a:prstGeom>
-          <a:noFill/>
-          <a:ln>
-            <a:noFill/>
-            <a:headEnd/>
-            <a:tailEnd type="triangle" w="sm" len="med"/>
-          </a:ln>
-          <a:effectLst/>
-        </p:spPr>
-        <p:style>
-          <a:lnRef idx="1">
-            <a:schemeClr val="accent5"/>
-          </a:lnRef>
-          <a:fillRef idx="2">
-            <a:schemeClr val="accent5"/>
-          </a:fillRef>
-          <a:effectRef idx="1">
-            <a:schemeClr val="accent5"/>
-          </a:effectRef>
-          <a:fontRef idx="minor">
-            <a:schemeClr val="dk1"/>
-          </a:fontRef>
-        </p:style>
-        <p:txBody>
-          <a:bodyPr rot="0" spcFirstLastPara="0" vertOverflow="overflow" horzOverflow="overflow" vert="horz" wrap="none" lIns="91440" tIns="45720" rIns="91440" bIns="45720" numCol="1" spcCol="0" rtlCol="0" fromWordArt="0" anchor="ctr" anchorCtr="0" forceAA="0" compatLnSpc="1">
-            <a:prstTxWarp prst="textNoShape">
-              <a:avLst/>
-            </a:prstTxWarp>
-            <a:noAutofit/>
-          </a:bodyPr>
-          <a:lstStyle/>
-          <a:p>
-            <a:pPr algn="ctr"/>
-            <a:r>
-              <a:rPr kumimoji="1" lang="en-US" altLang="ja-JP" sz="1600" dirty="0">
-                <a:solidFill>
-                  <a:schemeClr val="tx1">
-                    <a:lumMod val="75000"/>
-                    <a:lumOff val="25000"/>
-                  </a:schemeClr>
-                </a:solidFill>
-                <a:latin typeface="+mn-ea"/>
-              </a:rPr>
-              <a:t>LV1</a:t>
-            </a:r>
-            <a:r>
-              <a:rPr kumimoji="1" lang="ja-JP" altLang="en-US" sz="1600" dirty="0">
-                <a:solidFill>
-                  <a:schemeClr val="tx1">
-                    <a:lumMod val="75000"/>
-                    <a:lumOff val="25000"/>
-                  </a:schemeClr>
-                </a:solidFill>
-                <a:latin typeface="+mn-ea"/>
-              </a:rPr>
-              <a:t>テーブル</a:t>
-            </a:r>
-          </a:p>
-        </p:txBody>
-      </p:sp>
-      <p:sp>
-        <p:nvSpPr>
-          <p:cNvPr id="20" name="正方形/長方形 19">
-            <a:extLst>
-              <a:ext uri="{FF2B5EF4-FFF2-40B4-BE49-F238E27FC236}">
-                <a16:creationId xmlns:a16="http://schemas.microsoft.com/office/drawing/2014/main" id="{41F8EEC9-9620-4E9C-9B16-22677D3FA888}"/>
-              </a:ext>
-            </a:extLst>
-          </p:cNvPr>
-          <p:cNvSpPr/>
-          <p:nvPr/>
-        </p:nvSpPr>
-        <p:spPr bwMode="auto">
-          <a:xfrm>
-            <a:off x="6732024" y="3248998"/>
-            <a:ext cx="1080012" cy="1440016"/>
-          </a:xfrm>
-          <a:prstGeom prst="rect">
-            <a:avLst/>
-          </a:prstGeom>
-          <a:ln>
-            <a:headEnd/>
-            <a:tailEnd type="triangle" w="sm" len="med"/>
-          </a:ln>
-        </p:spPr>
-        <p:style>
-          <a:lnRef idx="1">
-            <a:schemeClr val="accent4"/>
-          </a:lnRef>
-          <a:fillRef idx="2">
-            <a:schemeClr val="accent4"/>
-          </a:fillRef>
-          <a:effectRef idx="1">
-            <a:schemeClr val="accent4"/>
-          </a:effectRef>
-          <a:fontRef idx="minor">
-            <a:schemeClr val="dk1"/>
-          </a:fontRef>
-        </p:style>
-        <p:txBody>
-          <a:bodyPr rot="0" spcFirstLastPara="0" vertOverflow="overflow" horzOverflow="overflow" vert="horz" wrap="none" lIns="91440" tIns="45720" rIns="91440" bIns="45720" numCol="1" spcCol="0" rtlCol="0" fromWordArt="0" anchor="ctr" anchorCtr="0" forceAA="0" compatLnSpc="1">
-            <a:prstTxWarp prst="textNoShape">
-              <a:avLst/>
-            </a:prstTxWarp>
-            <a:noAutofit/>
-          </a:bodyPr>
-          <a:lstStyle/>
-          <a:p>
-            <a:pPr algn="ctr"/>
-            <a:endParaRPr kumimoji="1" lang="ja-JP" altLang="en-US" dirty="0">
-              <a:solidFill>
-                <a:schemeClr val="tx1">
-                  <a:lumMod val="75000"/>
-                  <a:lumOff val="25000"/>
-                </a:schemeClr>
-              </a:solidFill>
-              <a:latin typeface="+mn-ea"/>
-            </a:endParaRPr>
-          </a:p>
-        </p:txBody>
-      </p:sp>
-      <p:sp>
-        <p:nvSpPr>
-          <p:cNvPr id="21" name="正方形/長方形 20">
-            <a:extLst>
-              <a:ext uri="{FF2B5EF4-FFF2-40B4-BE49-F238E27FC236}">
-                <a16:creationId xmlns:a16="http://schemas.microsoft.com/office/drawing/2014/main" id="{F8E9AEA5-3FB4-455D-9495-C980C57584B6}"/>
-              </a:ext>
-            </a:extLst>
-          </p:cNvPr>
-          <p:cNvSpPr/>
-          <p:nvPr/>
-        </p:nvSpPr>
-        <p:spPr bwMode="auto">
-          <a:xfrm>
-            <a:off x="6732024" y="3248998"/>
-            <a:ext cx="1080012" cy="180002"/>
-          </a:xfrm>
-          <a:prstGeom prst="rect">
-            <a:avLst/>
-          </a:prstGeom>
-          <a:noFill/>
-          <a:ln>
-            <a:headEnd/>
-            <a:tailEnd type="triangle" w="sm" len="med"/>
-          </a:ln>
-          <a:effectLst/>
-        </p:spPr>
-        <p:style>
-          <a:lnRef idx="1">
-            <a:schemeClr val="accent1"/>
-          </a:lnRef>
-          <a:fillRef idx="2">
-            <a:schemeClr val="accent1"/>
-          </a:fillRef>
-          <a:effectRef idx="1">
-            <a:schemeClr val="accent1"/>
-          </a:effectRef>
-          <a:fontRef idx="minor">
-            <a:schemeClr val="dk1"/>
-          </a:fontRef>
-        </p:style>
-        <p:txBody>
-          <a:bodyPr rot="0" spcFirstLastPara="0" vertOverflow="overflow" horzOverflow="overflow" vert="horz" wrap="none" lIns="91440" tIns="45720" rIns="91440" bIns="45720" numCol="1" spcCol="0" rtlCol="0" fromWordArt="0" anchor="ctr" anchorCtr="0" forceAA="0" compatLnSpc="1">
-            <a:prstTxWarp prst="textNoShape">
-              <a:avLst/>
-            </a:prstTxWarp>
-            <a:noAutofit/>
-          </a:bodyPr>
-          <a:lstStyle/>
-          <a:p>
-            <a:pPr algn="ctr"/>
-            <a:endParaRPr kumimoji="1" lang="ja-JP" altLang="en-US" dirty="0">
-              <a:solidFill>
-                <a:schemeClr val="tx1">
-                  <a:lumMod val="75000"/>
-                  <a:lumOff val="25000"/>
-                </a:schemeClr>
-              </a:solidFill>
-              <a:latin typeface="+mn-ea"/>
-            </a:endParaRPr>
-          </a:p>
-        </p:txBody>
-      </p:sp>
-      <p:sp>
-        <p:nvSpPr>
-          <p:cNvPr id="22" name="正方形/長方形 21">
-            <a:extLst>
-              <a:ext uri="{FF2B5EF4-FFF2-40B4-BE49-F238E27FC236}">
-                <a16:creationId xmlns:a16="http://schemas.microsoft.com/office/drawing/2014/main" id="{2582A728-F7F5-4B2F-8E43-305BF7418F28}"/>
-              </a:ext>
-            </a:extLst>
-          </p:cNvPr>
-          <p:cNvSpPr/>
-          <p:nvPr/>
-        </p:nvSpPr>
-        <p:spPr bwMode="auto">
-          <a:xfrm>
-            <a:off x="6732024" y="3429000"/>
-            <a:ext cx="1080012" cy="180002"/>
-          </a:xfrm>
-          <a:prstGeom prst="rect">
-            <a:avLst/>
-          </a:prstGeom>
-          <a:noFill/>
-          <a:ln>
-            <a:headEnd/>
-            <a:tailEnd type="triangle" w="sm" len="med"/>
-          </a:ln>
-          <a:effectLst/>
-        </p:spPr>
-        <p:style>
-          <a:lnRef idx="1">
-            <a:schemeClr val="accent1"/>
-          </a:lnRef>
-          <a:fillRef idx="2">
-            <a:schemeClr val="accent1"/>
-          </a:fillRef>
-          <a:effectRef idx="1">
-            <a:schemeClr val="accent1"/>
-          </a:effectRef>
-          <a:fontRef idx="minor">
-            <a:schemeClr val="dk1"/>
-          </a:fontRef>
-        </p:style>
-        <p:txBody>
-          <a:bodyPr rot="0" spcFirstLastPara="0" vertOverflow="overflow" horzOverflow="overflow" vert="horz" wrap="none" lIns="91440" tIns="45720" rIns="91440" bIns="45720" numCol="1" spcCol="0" rtlCol="0" fromWordArt="0" anchor="ctr" anchorCtr="0" forceAA="0" compatLnSpc="1">
-            <a:prstTxWarp prst="textNoShape">
-              <a:avLst/>
-            </a:prstTxWarp>
-            <a:noAutofit/>
-          </a:bodyPr>
-          <a:lstStyle/>
-          <a:p>
-            <a:pPr algn="ctr"/>
-            <a:endParaRPr kumimoji="1" lang="ja-JP" altLang="en-US" dirty="0">
-              <a:solidFill>
-                <a:schemeClr val="tx1">
-                  <a:lumMod val="75000"/>
-                  <a:lumOff val="25000"/>
-                </a:schemeClr>
-              </a:solidFill>
-              <a:latin typeface="+mn-ea"/>
-            </a:endParaRPr>
-          </a:p>
-        </p:txBody>
-      </p:sp>
-      <p:sp>
-        <p:nvSpPr>
-          <p:cNvPr id="23" name="正方形/長方形 22">
-            <a:extLst>
-              <a:ext uri="{FF2B5EF4-FFF2-40B4-BE49-F238E27FC236}">
-                <a16:creationId xmlns:a16="http://schemas.microsoft.com/office/drawing/2014/main" id="{F8E9AEA5-3FB4-455D-9495-C980C57584B6}"/>
-              </a:ext>
-            </a:extLst>
-          </p:cNvPr>
-          <p:cNvSpPr/>
-          <p:nvPr/>
-        </p:nvSpPr>
-        <p:spPr bwMode="auto">
-          <a:xfrm>
-            <a:off x="6732024" y="3609002"/>
-            <a:ext cx="1080012" cy="180002"/>
-          </a:xfrm>
-          <a:prstGeom prst="rect">
-            <a:avLst/>
-          </a:prstGeom>
-          <a:noFill/>
-          <a:ln>
-            <a:headEnd/>
-            <a:tailEnd type="triangle" w="sm" len="med"/>
-          </a:ln>
-          <a:effectLst/>
-        </p:spPr>
-        <p:style>
-          <a:lnRef idx="1">
-            <a:schemeClr val="accent1"/>
-          </a:lnRef>
-          <a:fillRef idx="2">
-            <a:schemeClr val="accent1"/>
-          </a:fillRef>
-          <a:effectRef idx="1">
-            <a:schemeClr val="accent1"/>
-          </a:effectRef>
-          <a:fontRef idx="minor">
-            <a:schemeClr val="dk1"/>
-          </a:fontRef>
-        </p:style>
-        <p:txBody>
-          <a:bodyPr rot="0" spcFirstLastPara="0" vertOverflow="overflow" horzOverflow="overflow" vert="horz" wrap="none" lIns="91440" tIns="45720" rIns="91440" bIns="45720" numCol="1" spcCol="0" rtlCol="0" fromWordArt="0" anchor="ctr" anchorCtr="0" forceAA="0" compatLnSpc="1">
-            <a:prstTxWarp prst="textNoShape">
-              <a:avLst/>
-            </a:prstTxWarp>
-            <a:noAutofit/>
-          </a:bodyPr>
-          <a:lstStyle/>
-          <a:p>
-            <a:pPr algn="ctr"/>
-            <a:endParaRPr kumimoji="1" lang="ja-JP" altLang="en-US" dirty="0">
-              <a:solidFill>
-                <a:schemeClr val="tx1">
-                  <a:lumMod val="75000"/>
-                  <a:lumOff val="25000"/>
-                </a:schemeClr>
-              </a:solidFill>
-              <a:latin typeface="+mn-ea"/>
-            </a:endParaRPr>
-          </a:p>
-        </p:txBody>
-      </p:sp>
-      <p:sp>
-        <p:nvSpPr>
-          <p:cNvPr id="24" name="正方形/長方形 23">
-            <a:extLst>
-              <a:ext uri="{FF2B5EF4-FFF2-40B4-BE49-F238E27FC236}">
-                <a16:creationId xmlns:a16="http://schemas.microsoft.com/office/drawing/2014/main" id="{F8E9AEA5-3FB4-455D-9495-C980C57584B6}"/>
-              </a:ext>
-            </a:extLst>
-          </p:cNvPr>
-          <p:cNvSpPr/>
-          <p:nvPr/>
-        </p:nvSpPr>
-        <p:spPr bwMode="auto">
-          <a:xfrm>
-            <a:off x="6732024" y="3789004"/>
-            <a:ext cx="1080012" cy="900010"/>
-          </a:xfrm>
-          <a:prstGeom prst="rect">
-            <a:avLst/>
-          </a:prstGeom>
-          <a:noFill/>
-          <a:ln>
-            <a:headEnd/>
-            <a:tailEnd type="triangle" w="sm" len="med"/>
-          </a:ln>
-          <a:effectLst/>
-        </p:spPr>
-        <p:style>
-          <a:lnRef idx="1">
-            <a:schemeClr val="accent1"/>
-          </a:lnRef>
-          <a:fillRef idx="2">
-            <a:schemeClr val="accent1"/>
-          </a:fillRef>
-          <a:effectRef idx="1">
-            <a:schemeClr val="accent1"/>
-          </a:effectRef>
-          <a:fontRef idx="minor">
-            <a:schemeClr val="dk1"/>
-          </a:fontRef>
-        </p:style>
-        <p:txBody>
-          <a:bodyPr rot="0" spcFirstLastPara="0" vertOverflow="overflow" horzOverflow="overflow" vert="vert270" wrap="none" lIns="91440" tIns="45720" rIns="91440" bIns="45720" numCol="1" spcCol="0" rtlCol="0" fromWordArt="0" anchor="ctr" anchorCtr="0" forceAA="0" compatLnSpc="1">
-            <a:prstTxWarp prst="textNoShape">
-              <a:avLst/>
-            </a:prstTxWarp>
-            <a:noAutofit/>
-          </a:bodyPr>
-          <a:lstStyle/>
-          <a:p>
-            <a:pPr algn="ctr"/>
-            <a:endParaRPr kumimoji="1" lang="ja-JP" altLang="en-US" dirty="0">
-              <a:solidFill>
-                <a:schemeClr val="tx1">
-                  <a:lumMod val="75000"/>
-                  <a:lumOff val="25000"/>
-                </a:schemeClr>
-              </a:solidFill>
-              <a:latin typeface="+mn-ea"/>
-            </a:endParaRPr>
-          </a:p>
-        </p:txBody>
-      </p:sp>
-      <p:cxnSp>
-        <p:nvCxnSpPr>
-          <p:cNvPr id="25" name="曲線コネクタ 24"/>
-          <p:cNvCxnSpPr>
-            <a:stCxn id="16" idx="3"/>
-          </p:cNvCxnSpPr>
-          <p:nvPr/>
-        </p:nvCxnSpPr>
-        <p:spPr bwMode="auto">
-          <a:xfrm flipV="1">
-            <a:off x="3941993" y="3248998"/>
-            <a:ext cx="2790031" cy="450005"/>
-          </a:xfrm>
-          <a:prstGeom prst="curvedConnector3">
-            <a:avLst>
-              <a:gd name="adj1" fmla="val 50000"/>
-            </a:avLst>
-          </a:prstGeom>
-          <a:noFill/>
-          <a:ln w="9525" cap="flat" cmpd="sng" algn="ctr">
-            <a:solidFill>
-              <a:schemeClr val="tx1"/>
-            </a:solidFill>
-            <a:prstDash val="solid"/>
-            <a:round/>
-            <a:headEnd type="none" w="med" len="med"/>
-            <a:tailEnd type="triangle"/>
-          </a:ln>
-          <a:effectLst/>
-        </p:spPr>
-      </p:cxnSp>
-      <p:cxnSp>
-        <p:nvCxnSpPr>
-          <p:cNvPr id="26" name="直線コネクタ 25"/>
-          <p:cNvCxnSpPr/>
-          <p:nvPr/>
-        </p:nvCxnSpPr>
-        <p:spPr bwMode="auto">
-          <a:xfrm flipV="1">
-            <a:off x="6642023" y="3248998"/>
-            <a:ext cx="0" cy="1440015"/>
-          </a:xfrm>
-          <a:prstGeom prst="line">
-            <a:avLst/>
-          </a:prstGeom>
-          <a:ln>
-            <a:headEnd type="triangle" w="med" len="med"/>
-            <a:tailEnd type="triangle" w="med" len="med"/>
-          </a:ln>
-        </p:spPr>
-        <p:style>
-          <a:lnRef idx="2">
-            <a:schemeClr val="accent4"/>
-          </a:lnRef>
-          <a:fillRef idx="0">
-            <a:schemeClr val="accent4"/>
-          </a:fillRef>
-          <a:effectRef idx="1">
-            <a:schemeClr val="accent4"/>
-          </a:effectRef>
-          <a:fontRef idx="minor">
-            <a:schemeClr val="tx1"/>
-          </a:fontRef>
-        </p:style>
-      </p:cxnSp>
-      <p:sp>
-        <p:nvSpPr>
-          <p:cNvPr id="27" name="正方形/長方形 26"/>
-          <p:cNvSpPr/>
-          <p:nvPr/>
-        </p:nvSpPr>
-        <p:spPr bwMode="auto">
-          <a:xfrm>
-            <a:off x="4752002" y="3789004"/>
-            <a:ext cx="540006" cy="270003"/>
-          </a:xfrm>
-          <a:prstGeom prst="rect">
-            <a:avLst/>
-          </a:prstGeom>
-          <a:noFill/>
-          <a:ln>
-            <a:noFill/>
-            <a:headEnd/>
-            <a:tailEnd type="triangle" w="sm" len="med"/>
-          </a:ln>
-          <a:effectLst/>
-        </p:spPr>
-        <p:style>
-          <a:lnRef idx="1">
-            <a:schemeClr val="accent3"/>
-          </a:lnRef>
-          <a:fillRef idx="2">
-            <a:schemeClr val="accent3"/>
-          </a:fillRef>
-          <a:effectRef idx="1">
-            <a:schemeClr val="accent3"/>
-          </a:effectRef>
-          <a:fontRef idx="minor">
-            <a:schemeClr val="dk1"/>
-          </a:fontRef>
-        </p:style>
-        <p:txBody>
-          <a:bodyPr rot="0" spcFirstLastPara="0" vertOverflow="overflow" horzOverflow="overflow" vert="horz" wrap="none" lIns="91440" tIns="45720" rIns="91440" bIns="45720" numCol="1" spcCol="0" rtlCol="0" fromWordArt="0" anchor="ctr" anchorCtr="0" forceAA="0" compatLnSpc="1">
-            <a:prstTxWarp prst="textNoShape">
-              <a:avLst/>
-            </a:prstTxWarp>
-            <a:noAutofit/>
-          </a:bodyPr>
-          <a:lstStyle/>
-          <a:p>
-            <a:r>
-              <a:rPr kumimoji="1" lang="ja-JP" altLang="en-US" dirty="0">
-                <a:solidFill>
-                  <a:schemeClr val="tx1">
-                    <a:lumMod val="75000"/>
-                    <a:lumOff val="25000"/>
-                  </a:schemeClr>
-                </a:solidFill>
-                <a:latin typeface="Consolas" panose="020B0609020204030204" pitchFamily="49" charset="0"/>
-              </a:rPr>
-              <a:t>ポインタが</a:t>
-            </a:r>
-            <a:r>
-              <a:rPr lang="en-US" altLang="ja-JP" dirty="0">
+          <a:p>
+            <a:r>
+              <a:rPr lang="ja-JP" altLang="en-US" sz="1400" b="1" dirty="0">
                 <a:solidFill>
                   <a:schemeClr val="accent4"/>
                 </a:solidFill>
-                <a:latin typeface="Consolas" panose="020B0609020204030204" pitchFamily="49" charset="0"/>
-              </a:rPr>
-              <a:t>2^10</a:t>
-            </a:r>
-          </a:p>
-          <a:p>
-            <a:r>
-              <a:rPr lang="ja-JP" altLang="en-US" dirty="0">
-                <a:solidFill>
-                  <a:schemeClr val="tx1">
-                    <a:lumMod val="75000"/>
-                    <a:lumOff val="25000"/>
-                  </a:schemeClr>
-                </a:solidFill>
-                <a:latin typeface="Consolas" panose="020B0609020204030204" pitchFamily="49" charset="0"/>
-              </a:rPr>
-              <a:t>個並んで</a:t>
-            </a:r>
-            <a:r>
-              <a:rPr kumimoji="1" lang="ja-JP" altLang="en-US" dirty="0">
-                <a:solidFill>
-                  <a:schemeClr val="tx1">
-                    <a:lumMod val="75000"/>
-                    <a:lumOff val="25000"/>
-                  </a:schemeClr>
-                </a:solidFill>
-                <a:latin typeface="Consolas" panose="020B0609020204030204" pitchFamily="49" charset="0"/>
-              </a:rPr>
-              <a:t>いる</a:t>
-            </a:r>
-          </a:p>
-        </p:txBody>
-      </p:sp>
-      <p:sp>
-        <p:nvSpPr>
-          <p:cNvPr id="29" name="正方形/長方形 28"/>
-          <p:cNvSpPr/>
-          <p:nvPr/>
-        </p:nvSpPr>
-        <p:spPr bwMode="auto">
-          <a:xfrm>
-            <a:off x="6912026" y="2888994"/>
-            <a:ext cx="720007" cy="360004"/>
-          </a:xfrm>
-          <a:prstGeom prst="rect">
-            <a:avLst/>
-          </a:prstGeom>
-          <a:noFill/>
-          <a:ln>
-            <a:noFill/>
-            <a:headEnd/>
-            <a:tailEnd type="triangle" w="sm" len="med"/>
-          </a:ln>
-          <a:effectLst/>
-        </p:spPr>
-        <p:style>
-          <a:lnRef idx="1">
-            <a:schemeClr val="accent5"/>
-          </a:lnRef>
-          <a:fillRef idx="2">
-            <a:schemeClr val="accent5"/>
-          </a:fillRef>
-          <a:effectRef idx="1">
-            <a:schemeClr val="accent5"/>
-          </a:effectRef>
-          <a:fontRef idx="minor">
-            <a:schemeClr val="dk1"/>
-          </a:fontRef>
-        </p:style>
-        <p:txBody>
-          <a:bodyPr rot="0" spcFirstLastPara="0" vertOverflow="overflow" horzOverflow="overflow" vert="horz" wrap="none" lIns="91440" tIns="45720" rIns="91440" bIns="45720" numCol="1" spcCol="0" rtlCol="0" fromWordArt="0" anchor="ctr" anchorCtr="0" forceAA="0" compatLnSpc="1">
-            <a:prstTxWarp prst="textNoShape">
-              <a:avLst/>
-            </a:prstTxWarp>
-            <a:noAutofit/>
-          </a:bodyPr>
-          <a:lstStyle/>
-          <a:p>
-            <a:pPr algn="ctr"/>
-            <a:r>
-              <a:rPr kumimoji="1" lang="en-US" altLang="ja-JP" sz="1600" dirty="0">
-                <a:solidFill>
-                  <a:schemeClr val="tx1">
-                    <a:lumMod val="75000"/>
-                    <a:lumOff val="25000"/>
-                  </a:schemeClr>
-                </a:solidFill>
-                <a:latin typeface="+mn-ea"/>
-              </a:rPr>
-              <a:t>LV</a:t>
-            </a:r>
-            <a:r>
-              <a:rPr kumimoji="1" lang="ja-JP" altLang="en-US" sz="1600" dirty="0">
-                <a:solidFill>
-                  <a:schemeClr val="tx1">
-                    <a:lumMod val="75000"/>
-                    <a:lumOff val="25000"/>
-                  </a:schemeClr>
-                </a:solidFill>
-                <a:latin typeface="+mn-ea"/>
-              </a:rPr>
-              <a:t>２テーブル</a:t>
-            </a:r>
-          </a:p>
-        </p:txBody>
-      </p:sp>
-      <p:sp>
-        <p:nvSpPr>
-          <p:cNvPr id="32" name="正方形/長方形 31">
-            <a:extLst>
-              <a:ext uri="{FF2B5EF4-FFF2-40B4-BE49-F238E27FC236}">
-                <a16:creationId xmlns:a16="http://schemas.microsoft.com/office/drawing/2014/main" id="{41F8EEC9-9620-4E9C-9B16-22677D3FA888}"/>
-              </a:ext>
-            </a:extLst>
-          </p:cNvPr>
-          <p:cNvSpPr/>
-          <p:nvPr/>
-        </p:nvSpPr>
-        <p:spPr bwMode="auto">
-          <a:xfrm>
-            <a:off x="2861981" y="1268976"/>
-            <a:ext cx="1080012" cy="1440016"/>
-          </a:xfrm>
-          <a:prstGeom prst="rect">
-            <a:avLst/>
-          </a:prstGeom>
-          <a:ln>
-            <a:headEnd/>
-            <a:tailEnd type="triangle" w="sm" len="med"/>
-          </a:ln>
-        </p:spPr>
-        <p:style>
-          <a:lnRef idx="1">
-            <a:schemeClr val="dk1"/>
-          </a:lnRef>
-          <a:fillRef idx="2">
-            <a:schemeClr val="dk1"/>
-          </a:fillRef>
-          <a:effectRef idx="1">
-            <a:schemeClr val="dk1"/>
-          </a:effectRef>
-          <a:fontRef idx="minor">
-            <a:schemeClr val="dk1"/>
-          </a:fontRef>
-        </p:style>
-        <p:txBody>
-          <a:bodyPr rot="0" spcFirstLastPara="0" vertOverflow="overflow" horzOverflow="overflow" vert="horz" wrap="none" lIns="91440" tIns="45720" rIns="91440" bIns="45720" numCol="1" spcCol="0" rtlCol="0" fromWordArt="0" anchor="ctr" anchorCtr="0" forceAA="0" compatLnSpc="1">
-            <a:prstTxWarp prst="textNoShape">
-              <a:avLst/>
-            </a:prstTxWarp>
-            <a:noAutofit/>
-          </a:bodyPr>
-          <a:lstStyle/>
-          <a:p>
-            <a:pPr algn="ctr"/>
-            <a:endParaRPr kumimoji="1" lang="ja-JP" altLang="en-US" dirty="0">
-              <a:solidFill>
-                <a:schemeClr val="tx1">
-                  <a:lumMod val="75000"/>
-                  <a:lumOff val="25000"/>
-                </a:schemeClr>
-              </a:solidFill>
-              <a:latin typeface="+mn-ea"/>
-            </a:endParaRPr>
-          </a:p>
-        </p:txBody>
-      </p:sp>
-      <p:sp>
-        <p:nvSpPr>
-          <p:cNvPr id="33" name="正方形/長方形 32">
-            <a:extLst>
-              <a:ext uri="{FF2B5EF4-FFF2-40B4-BE49-F238E27FC236}">
-                <a16:creationId xmlns:a16="http://schemas.microsoft.com/office/drawing/2014/main" id="{F8E9AEA5-3FB4-455D-9495-C980C57584B6}"/>
-              </a:ext>
-            </a:extLst>
-          </p:cNvPr>
-          <p:cNvSpPr/>
-          <p:nvPr/>
-        </p:nvSpPr>
-        <p:spPr bwMode="auto">
-          <a:xfrm>
-            <a:off x="2861981" y="1268976"/>
-            <a:ext cx="1080012" cy="180002"/>
-          </a:xfrm>
-          <a:prstGeom prst="rect">
-            <a:avLst/>
-          </a:prstGeom>
-          <a:noFill/>
-          <a:ln>
-            <a:solidFill>
-              <a:schemeClr val="tx1">
-                <a:lumMod val="75000"/>
-                <a:lumOff val="25000"/>
-              </a:schemeClr>
-            </a:solidFill>
-            <a:headEnd/>
-            <a:tailEnd type="triangle" w="sm" len="med"/>
-          </a:ln>
-          <a:effectLst/>
-        </p:spPr>
-        <p:style>
-          <a:lnRef idx="1">
-            <a:schemeClr val="accent1"/>
-          </a:lnRef>
-          <a:fillRef idx="2">
-            <a:schemeClr val="accent1"/>
-          </a:fillRef>
-          <a:effectRef idx="1">
-            <a:schemeClr val="accent1"/>
-          </a:effectRef>
-          <a:fontRef idx="minor">
-            <a:schemeClr val="dk1"/>
-          </a:fontRef>
-        </p:style>
-        <p:txBody>
-          <a:bodyPr rot="0" spcFirstLastPara="0" vertOverflow="overflow" horzOverflow="overflow" vert="horz" wrap="none" lIns="91440" tIns="45720" rIns="91440" bIns="45720" numCol="1" spcCol="0" rtlCol="0" fromWordArt="0" anchor="ctr" anchorCtr="0" forceAA="0" compatLnSpc="1">
-            <a:prstTxWarp prst="textNoShape">
-              <a:avLst/>
-            </a:prstTxWarp>
-            <a:noAutofit/>
-          </a:bodyPr>
-          <a:lstStyle/>
-          <a:p>
-            <a:pPr algn="ctr"/>
-            <a:r>
-              <a:rPr lang="en-US" altLang="ja-JP" sz="1200" dirty="0">
-                <a:solidFill>
-                  <a:schemeClr val="tx1">
-                    <a:lumMod val="75000"/>
-                    <a:lumOff val="25000"/>
-                  </a:schemeClr>
-                </a:solidFill>
-                <a:latin typeface="+mn-ea"/>
-              </a:rPr>
-              <a:t>NULL</a:t>
-            </a:r>
-            <a:endParaRPr kumimoji="1" lang="ja-JP" altLang="en-US" sz="1200" dirty="0">
-              <a:solidFill>
-                <a:schemeClr val="tx1">
-                  <a:lumMod val="75000"/>
-                  <a:lumOff val="25000"/>
-                </a:schemeClr>
-              </a:solidFill>
-              <a:latin typeface="+mn-ea"/>
-            </a:endParaRPr>
-          </a:p>
-        </p:txBody>
-      </p:sp>
-      <p:sp>
-        <p:nvSpPr>
-          <p:cNvPr id="34" name="正方形/長方形 33">
-            <a:extLst>
-              <a:ext uri="{FF2B5EF4-FFF2-40B4-BE49-F238E27FC236}">
-                <a16:creationId xmlns:a16="http://schemas.microsoft.com/office/drawing/2014/main" id="{2582A728-F7F5-4B2F-8E43-305BF7418F28}"/>
-              </a:ext>
-            </a:extLst>
-          </p:cNvPr>
-          <p:cNvSpPr/>
-          <p:nvPr/>
-        </p:nvSpPr>
-        <p:spPr bwMode="auto">
-          <a:xfrm>
-            <a:off x="2861981" y="1448978"/>
-            <a:ext cx="1080012" cy="180002"/>
-          </a:xfrm>
-          <a:prstGeom prst="rect">
-            <a:avLst/>
-          </a:prstGeom>
-          <a:noFill/>
-          <a:ln>
-            <a:solidFill>
-              <a:schemeClr val="tx1">
-                <a:lumMod val="75000"/>
-                <a:lumOff val="25000"/>
-              </a:schemeClr>
-            </a:solidFill>
-            <a:headEnd/>
-            <a:tailEnd type="triangle" w="sm" len="med"/>
-          </a:ln>
-          <a:effectLst/>
-        </p:spPr>
-        <p:style>
-          <a:lnRef idx="1">
-            <a:schemeClr val="accent1"/>
-          </a:lnRef>
-          <a:fillRef idx="2">
-            <a:schemeClr val="accent1"/>
-          </a:fillRef>
-          <a:effectRef idx="1">
-            <a:schemeClr val="accent1"/>
-          </a:effectRef>
-          <a:fontRef idx="minor">
-            <a:schemeClr val="dk1"/>
-          </a:fontRef>
-        </p:style>
-        <p:txBody>
-          <a:bodyPr rot="0" spcFirstLastPara="0" vertOverflow="overflow" horzOverflow="overflow" vert="horz" wrap="none" lIns="91440" tIns="45720" rIns="91440" bIns="45720" numCol="1" spcCol="0" rtlCol="0" fromWordArt="0" anchor="ctr" anchorCtr="0" forceAA="0" compatLnSpc="1">
-            <a:prstTxWarp prst="textNoShape">
-              <a:avLst/>
-            </a:prstTxWarp>
-            <a:noAutofit/>
-          </a:bodyPr>
-          <a:lstStyle/>
-          <a:p>
-            <a:pPr algn="ctr"/>
-            <a:r>
-              <a:rPr kumimoji="1" lang="en-US" altLang="ja-JP" sz="1200" dirty="0">
-                <a:solidFill>
-                  <a:schemeClr val="tx1">
-                    <a:lumMod val="75000"/>
-                    <a:lumOff val="25000"/>
-                  </a:schemeClr>
-                </a:solidFill>
-                <a:latin typeface="+mn-ea"/>
-              </a:rPr>
-              <a:t>NULL</a:t>
-            </a:r>
-            <a:endParaRPr kumimoji="1" lang="ja-JP" altLang="en-US" sz="1200" dirty="0">
-              <a:solidFill>
-                <a:schemeClr val="tx1">
-                  <a:lumMod val="75000"/>
-                  <a:lumOff val="25000"/>
-                </a:schemeClr>
-              </a:solidFill>
-              <a:latin typeface="+mn-ea"/>
-            </a:endParaRPr>
-          </a:p>
-        </p:txBody>
-      </p:sp>
-      <p:sp>
-        <p:nvSpPr>
-          <p:cNvPr id="35" name="正方形/長方形 34">
-            <a:extLst>
-              <a:ext uri="{FF2B5EF4-FFF2-40B4-BE49-F238E27FC236}">
-                <a16:creationId xmlns:a16="http://schemas.microsoft.com/office/drawing/2014/main" id="{F8E9AEA5-3FB4-455D-9495-C980C57584B6}"/>
-              </a:ext>
-            </a:extLst>
-          </p:cNvPr>
-          <p:cNvSpPr/>
-          <p:nvPr/>
-        </p:nvSpPr>
-        <p:spPr bwMode="auto">
-          <a:xfrm>
-            <a:off x="2861981" y="1628980"/>
-            <a:ext cx="1080012" cy="180002"/>
-          </a:xfrm>
-          <a:prstGeom prst="rect">
-            <a:avLst/>
-          </a:prstGeom>
-          <a:ln>
-            <a:headEnd/>
-            <a:tailEnd type="triangle" w="sm" len="med"/>
-          </a:ln>
-          <a:effectLst/>
-        </p:spPr>
-        <p:style>
-          <a:lnRef idx="1">
-            <a:schemeClr val="accent5"/>
-          </a:lnRef>
-          <a:fillRef idx="2">
-            <a:schemeClr val="accent5"/>
-          </a:fillRef>
-          <a:effectRef idx="1">
-            <a:schemeClr val="accent5"/>
-          </a:effectRef>
-          <a:fontRef idx="minor">
-            <a:schemeClr val="dk1"/>
-          </a:fontRef>
-        </p:style>
-        <p:txBody>
-          <a:bodyPr rot="0" spcFirstLastPara="0" vertOverflow="overflow" horzOverflow="overflow" vert="horz" wrap="none" lIns="91440" tIns="45720" rIns="91440" bIns="45720" numCol="1" spcCol="0" rtlCol="0" fromWordArt="0" anchor="ctr" anchorCtr="0" forceAA="0" compatLnSpc="1">
-            <a:prstTxWarp prst="textNoShape">
-              <a:avLst/>
-            </a:prstTxWarp>
-            <a:noAutofit/>
-          </a:bodyPr>
-          <a:lstStyle/>
-          <a:p>
-            <a:pPr algn="ctr"/>
-            <a:endParaRPr kumimoji="1" lang="ja-JP" altLang="en-US" dirty="0">
-              <a:solidFill>
-                <a:schemeClr val="tx1">
-                  <a:lumMod val="75000"/>
-                  <a:lumOff val="25000"/>
-                </a:schemeClr>
-              </a:solidFill>
-              <a:latin typeface="+mn-ea"/>
-            </a:endParaRPr>
-          </a:p>
-        </p:txBody>
-      </p:sp>
-      <p:sp>
-        <p:nvSpPr>
-          <p:cNvPr id="36" name="正方形/長方形 35">
-            <a:extLst>
-              <a:ext uri="{FF2B5EF4-FFF2-40B4-BE49-F238E27FC236}">
-                <a16:creationId xmlns:a16="http://schemas.microsoft.com/office/drawing/2014/main" id="{F8E9AEA5-3FB4-455D-9495-C980C57584B6}"/>
-              </a:ext>
-            </a:extLst>
-          </p:cNvPr>
-          <p:cNvSpPr/>
-          <p:nvPr/>
-        </p:nvSpPr>
-        <p:spPr bwMode="auto">
-          <a:xfrm>
-            <a:off x="2861981" y="1808982"/>
-            <a:ext cx="1080012" cy="900010"/>
-          </a:xfrm>
-          <a:prstGeom prst="rect">
-            <a:avLst/>
-          </a:prstGeom>
-          <a:noFill/>
-          <a:ln>
-            <a:solidFill>
-              <a:schemeClr val="tx1">
-                <a:lumMod val="75000"/>
-                <a:lumOff val="25000"/>
-              </a:schemeClr>
-            </a:solidFill>
-            <a:headEnd/>
-            <a:tailEnd type="triangle" w="sm" len="med"/>
-          </a:ln>
-          <a:effectLst/>
-        </p:spPr>
-        <p:style>
-          <a:lnRef idx="1">
-            <a:schemeClr val="accent1"/>
-          </a:lnRef>
-          <a:fillRef idx="2">
-            <a:schemeClr val="accent1"/>
-          </a:fillRef>
-          <a:effectRef idx="1">
-            <a:schemeClr val="accent1"/>
-          </a:effectRef>
-          <a:fontRef idx="minor">
-            <a:schemeClr val="dk1"/>
-          </a:fontRef>
-        </p:style>
-        <p:txBody>
-          <a:bodyPr rot="0" spcFirstLastPara="0" vertOverflow="overflow" horzOverflow="overflow" vert="vert270" wrap="none" lIns="91440" tIns="45720" rIns="91440" bIns="45720" numCol="1" spcCol="0" rtlCol="0" fromWordArt="0" anchor="ctr" anchorCtr="0" forceAA="0" compatLnSpc="1">
-            <a:prstTxWarp prst="textNoShape">
-              <a:avLst/>
-            </a:prstTxWarp>
-            <a:noAutofit/>
-          </a:bodyPr>
-          <a:lstStyle/>
-          <a:p>
-            <a:pPr algn="ctr"/>
-            <a:r>
-              <a:rPr kumimoji="1" lang="ja-JP" altLang="en-US" dirty="0">
-                <a:solidFill>
-                  <a:schemeClr val="tx1">
-                    <a:lumMod val="75000"/>
-                    <a:lumOff val="25000"/>
-                  </a:schemeClr>
-                </a:solidFill>
-                <a:latin typeface="+mn-ea"/>
-              </a:rPr>
-              <a:t>･･･</a:t>
+                <a:effectLst>
+                  <a:outerShdw blurRad="38100" dist="38100" dir="2700000" algn="tl">
+                    <a:srgbClr val="000000">
+                      <a:alpha val="43137"/>
+                    </a:srgbClr>
+                  </a:outerShdw>
+                </a:effectLst>
+                <a:latin typeface="ＭＳ Ｐゴシック" pitchFamily="50" charset="-128"/>
+                <a:ea typeface="ＭＳ Ｐゴシック" pitchFamily="50" charset="-128"/>
+              </a:rPr>
+              <a:t>（つ    つ</a:t>
             </a:r>
           </a:p>
         </p:txBody>
@@ -11377,403 +8515,7 @@
     </p:spTree>
     <p:extLst>
       <p:ext uri="{BB962C8B-B14F-4D97-AF65-F5344CB8AC3E}">
-        <p14:creationId xmlns:p14="http://schemas.microsoft.com/office/powerpoint/2010/main" val="2686314742"/>
-      </p:ext>
-    </p:extLst>
-  </p:cSld>
-  <p:clrMapOvr>
-    <a:masterClrMapping/>
-  </p:clrMapOvr>
-  <mc:AlternateContent xmlns:mc="http://schemas.openxmlformats.org/markup-compatibility/2006" xmlns:p14="http://schemas.microsoft.com/office/powerpoint/2010/main">
-    <mc:Choice Requires="p14">
-      <p:transition p14:dur="10"/>
-    </mc:Choice>
-    <mc:Fallback xmlns="">
-      <p:transition/>
-    </mc:Fallback>
-  </mc:AlternateContent>
-</p:sld>
-</file>
-
-<file path=ppt/slides/slide27.xml><?xml version="1.0" encoding="utf-8"?>
-<p:sld xmlns:a="http://schemas.openxmlformats.org/drawingml/2006/main" xmlns:r="http://schemas.openxmlformats.org/officeDocument/2006/relationships" xmlns:p="http://schemas.openxmlformats.org/presentationml/2006/main">
-  <p:cSld>
-    <p:spTree>
-      <p:nvGrpSpPr>
-        <p:cNvPr id="1" name=""/>
-        <p:cNvGrpSpPr/>
-        <p:nvPr/>
-      </p:nvGrpSpPr>
-      <p:grpSpPr>
-        <a:xfrm>
-          <a:off x="0" y="0"/>
-          <a:ext cx="0" cy="0"/>
-          <a:chOff x="0" y="0"/>
-          <a:chExt cx="0" cy="0"/>
-        </a:xfrm>
-      </p:grpSpPr>
-      <p:sp>
-        <p:nvSpPr>
-          <p:cNvPr id="2" name="タイトル 1">
-            <a:extLst>
-              <a:ext uri="{FF2B5EF4-FFF2-40B4-BE49-F238E27FC236}">
-                <a16:creationId xmlns:a16="http://schemas.microsoft.com/office/drawing/2014/main" id="{FAA8EBBD-6456-B940-EE50-E6057DAEC093}"/>
-              </a:ext>
-            </a:extLst>
-          </p:cNvPr>
-          <p:cNvSpPr>
-            <a:spLocks noGrp="1"/>
-          </p:cNvSpPr>
-          <p:nvPr>
-            <p:ph type="title"/>
-          </p:nvPr>
-        </p:nvSpPr>
-        <p:spPr>
-          <a:xfrm>
-            <a:off x="611956" y="0"/>
-            <a:ext cx="8532044" cy="908972"/>
-          </a:xfrm>
-        </p:spPr>
-        <p:txBody>
-          <a:bodyPr/>
-          <a:lstStyle/>
-          <a:p>
-            <a:r>
-              <a:rPr lang="ja-JP" altLang="en-US" dirty="0"/>
-              <a:t>質問とか感想</a:t>
-            </a:r>
-            <a:endParaRPr lang="en-US" dirty="0"/>
-          </a:p>
-        </p:txBody>
-      </p:sp>
-      <p:sp>
-        <p:nvSpPr>
-          <p:cNvPr id="3" name="コンテンツ プレースホルダー 2">
-            <a:extLst>
-              <a:ext uri="{FF2B5EF4-FFF2-40B4-BE49-F238E27FC236}">
-                <a16:creationId xmlns:a16="http://schemas.microsoft.com/office/drawing/2014/main" id="{46C96F0D-39A0-7B53-A71E-67DF1A3CBE56}"/>
-              </a:ext>
-            </a:extLst>
-          </p:cNvPr>
-          <p:cNvSpPr>
-            <a:spLocks noGrp="1"/>
-          </p:cNvSpPr>
-          <p:nvPr>
-            <p:ph sz="quarter" idx="10"/>
-          </p:nvPr>
-        </p:nvSpPr>
-        <p:spPr>
-          <a:xfrm>
-            <a:off x="611956" y="1088974"/>
-            <a:ext cx="7920088" cy="5220058"/>
-          </a:xfrm>
-        </p:spPr>
-        <p:txBody>
-          <a:bodyPr/>
-          <a:lstStyle/>
-          <a:p>
-            <a:r>
-              <a:rPr lang="ja-JP" altLang="en-US" b="0" i="0" dirty="0">
-                <a:solidFill>
-                  <a:srgbClr val="000000"/>
-                </a:solidFill>
-                <a:effectLst/>
-                <a:latin typeface="Meiryo" panose="020B0604030504040204" pitchFamily="50" charset="-128"/>
-                <a:ea typeface="Meiryo" panose="020B0604030504040204" pitchFamily="50" charset="-128"/>
-              </a:rPr>
-              <a:t>仮想アドレスの話はシステムプログラミングでも聞いたので多少馴染みがあったが、具体的な数字を追うと混乱する。</a:t>
-            </a:r>
-            <a:br>
-              <a:rPr lang="ja-JP" altLang="en-US" dirty="0"/>
-            </a:br>
-            <a:r>
-              <a:rPr lang="ja-JP" altLang="en-US" b="0" i="0" dirty="0">
-                <a:solidFill>
-                  <a:srgbClr val="000000"/>
-                </a:solidFill>
-                <a:effectLst/>
-                <a:latin typeface="Meiryo" panose="020B0604030504040204" pitchFamily="50" charset="-128"/>
-                <a:ea typeface="Meiryo" panose="020B0604030504040204" pitchFamily="50" charset="-128"/>
-              </a:rPr>
-              <a:t>*</a:t>
-            </a:r>
-            <a:r>
-              <a:rPr lang="en-US" altLang="ja-JP" b="0" i="0" dirty="0">
-                <a:solidFill>
-                  <a:srgbClr val="000000"/>
-                </a:solidFill>
-                <a:effectLst/>
-                <a:latin typeface="Meiryo" panose="020B0604030504040204" pitchFamily="50" charset="-128"/>
-                <a:ea typeface="Meiryo" panose="020B0604030504040204" pitchFamily="50" charset="-128"/>
-              </a:rPr>
-              <a:t>4B</a:t>
-            </a:r>
-            <a:r>
-              <a:rPr lang="ja-JP" altLang="en-US" b="0" i="0" dirty="0">
-                <a:solidFill>
-                  <a:srgbClr val="000000"/>
-                </a:solidFill>
-                <a:effectLst/>
-                <a:latin typeface="Meiryo" panose="020B0604030504040204" pitchFamily="50" charset="-128"/>
-                <a:ea typeface="Meiryo" panose="020B0604030504040204" pitchFamily="50" charset="-128"/>
-              </a:rPr>
-              <a:t>をするとき、桁が上がってしまってもよいのかがわからない。</a:t>
-            </a:r>
-            <a:endParaRPr lang="en-US" dirty="0"/>
-          </a:p>
-        </p:txBody>
-      </p:sp>
-    </p:spTree>
-    <p:extLst>
-      <p:ext uri="{BB962C8B-B14F-4D97-AF65-F5344CB8AC3E}">
-        <p14:creationId xmlns:p14="http://schemas.microsoft.com/office/powerpoint/2010/main" val="2008412260"/>
-      </p:ext>
-    </p:extLst>
-  </p:cSld>
-  <p:clrMapOvr>
-    <a:masterClrMapping/>
-  </p:clrMapOvr>
-  <mc:AlternateContent xmlns:mc="http://schemas.openxmlformats.org/markup-compatibility/2006" xmlns:p14="http://schemas.microsoft.com/office/powerpoint/2010/main">
-    <mc:Choice Requires="p14">
-      <p:transition p14:dur="10"/>
-    </mc:Choice>
-    <mc:Fallback xmlns="">
-      <p:transition/>
-    </mc:Fallback>
-  </mc:AlternateContent>
-</p:sld>
-</file>
-
-<file path=ppt/slides/slide28.xml><?xml version="1.0" encoding="utf-8"?>
-<p:sld xmlns:a="http://schemas.openxmlformats.org/drawingml/2006/main" xmlns:r="http://schemas.openxmlformats.org/officeDocument/2006/relationships" xmlns:p="http://schemas.openxmlformats.org/presentationml/2006/main">
-  <p:cSld>
-    <p:spTree>
-      <p:nvGrpSpPr>
-        <p:cNvPr id="1" name=""/>
-        <p:cNvGrpSpPr/>
-        <p:nvPr/>
-      </p:nvGrpSpPr>
-      <p:grpSpPr>
-        <a:xfrm>
-          <a:off x="0" y="0"/>
-          <a:ext cx="0" cy="0"/>
-          <a:chOff x="0" y="0"/>
-          <a:chExt cx="0" cy="0"/>
-        </a:xfrm>
-      </p:grpSpPr>
-      <p:sp>
-        <p:nvSpPr>
-          <p:cNvPr id="2" name="タイトル 1">
-            <a:extLst>
-              <a:ext uri="{FF2B5EF4-FFF2-40B4-BE49-F238E27FC236}">
-                <a16:creationId xmlns:a16="http://schemas.microsoft.com/office/drawing/2014/main" id="{FAA8EBBD-6456-B940-EE50-E6057DAEC093}"/>
-              </a:ext>
-            </a:extLst>
-          </p:cNvPr>
-          <p:cNvSpPr>
-            <a:spLocks noGrp="1"/>
-          </p:cNvSpPr>
-          <p:nvPr>
-            <p:ph type="title"/>
-          </p:nvPr>
-        </p:nvSpPr>
-        <p:spPr>
-          <a:xfrm>
-            <a:off x="611956" y="0"/>
-            <a:ext cx="8532044" cy="908972"/>
-          </a:xfrm>
-        </p:spPr>
-        <p:txBody>
-          <a:bodyPr/>
-          <a:lstStyle/>
-          <a:p>
-            <a:r>
-              <a:rPr lang="ja-JP" altLang="en-US" dirty="0"/>
-              <a:t>質問とか感想</a:t>
-            </a:r>
-            <a:endParaRPr lang="en-US" dirty="0"/>
-          </a:p>
-        </p:txBody>
-      </p:sp>
-      <p:sp>
-        <p:nvSpPr>
-          <p:cNvPr id="3" name="コンテンツ プレースホルダー 2">
-            <a:extLst>
-              <a:ext uri="{FF2B5EF4-FFF2-40B4-BE49-F238E27FC236}">
-                <a16:creationId xmlns:a16="http://schemas.microsoft.com/office/drawing/2014/main" id="{46C96F0D-39A0-7B53-A71E-67DF1A3CBE56}"/>
-              </a:ext>
-            </a:extLst>
-          </p:cNvPr>
-          <p:cNvSpPr>
-            <a:spLocks noGrp="1"/>
-          </p:cNvSpPr>
-          <p:nvPr>
-            <p:ph sz="quarter" idx="10"/>
-          </p:nvPr>
-        </p:nvSpPr>
-        <p:spPr>
-          <a:xfrm>
-            <a:off x="611956" y="1088974"/>
-            <a:ext cx="7920088" cy="5220058"/>
-          </a:xfrm>
-        </p:spPr>
-        <p:txBody>
-          <a:bodyPr/>
-          <a:lstStyle/>
-          <a:p>
-            <a:r>
-              <a:rPr lang="ja-JP" altLang="en-US" b="0" i="0" dirty="0">
-                <a:solidFill>
-                  <a:srgbClr val="000000"/>
-                </a:solidFill>
-                <a:effectLst/>
-                <a:latin typeface="Meiryo" panose="020B0604030504040204" pitchFamily="50" charset="-128"/>
-                <a:ea typeface="Meiryo" panose="020B0604030504040204" pitchFamily="50" charset="-128"/>
-              </a:rPr>
-              <a:t>システムプログラミング実習の授業でやったようなことが出てきてより理解が深まったような気がする。</a:t>
-            </a:r>
-            <a:endParaRPr lang="en-US" altLang="ja-JP" b="0" i="0" dirty="0">
-              <a:solidFill>
-                <a:srgbClr val="000000"/>
-              </a:solidFill>
-              <a:effectLst/>
-              <a:latin typeface="Meiryo" panose="020B0604030504040204" pitchFamily="50" charset="-128"/>
-              <a:ea typeface="Meiryo" panose="020B0604030504040204" pitchFamily="50" charset="-128"/>
-            </a:endParaRPr>
-          </a:p>
-          <a:p>
-            <a:r>
-              <a:rPr lang="ja-JP" altLang="en-US" b="0" i="0" dirty="0">
-                <a:solidFill>
-                  <a:srgbClr val="000000"/>
-                </a:solidFill>
-                <a:effectLst/>
-                <a:latin typeface="Meiryo" panose="020B0604030504040204" pitchFamily="50" charset="-128"/>
-                <a:ea typeface="Meiryo" panose="020B0604030504040204" pitchFamily="50" charset="-128"/>
-              </a:rPr>
-              <a:t>仮想メモリの話はシステムプログラミング実習という別の科目で軽く聞いたことがあったので、今回の授業でより理解が深まって嬉しかった。</a:t>
-            </a:r>
-            <a:endParaRPr lang="en-US" dirty="0"/>
-          </a:p>
-        </p:txBody>
-      </p:sp>
-    </p:spTree>
-    <p:extLst>
-      <p:ext uri="{BB962C8B-B14F-4D97-AF65-F5344CB8AC3E}">
-        <p14:creationId xmlns:p14="http://schemas.microsoft.com/office/powerpoint/2010/main" val="3854646705"/>
-      </p:ext>
-    </p:extLst>
-  </p:cSld>
-  <p:clrMapOvr>
-    <a:masterClrMapping/>
-  </p:clrMapOvr>
-  <mc:AlternateContent xmlns:mc="http://schemas.openxmlformats.org/markup-compatibility/2006" xmlns:p14="http://schemas.microsoft.com/office/powerpoint/2010/main">
-    <mc:Choice Requires="p14">
-      <p:transition p14:dur="10"/>
-    </mc:Choice>
-    <mc:Fallback xmlns="">
-      <p:transition/>
-    </mc:Fallback>
-  </mc:AlternateContent>
-</p:sld>
-</file>
-
-<file path=ppt/slides/slide29.xml><?xml version="1.0" encoding="utf-8"?>
-<p:sld xmlns:a="http://schemas.openxmlformats.org/drawingml/2006/main" xmlns:r="http://schemas.openxmlformats.org/officeDocument/2006/relationships" xmlns:p="http://schemas.openxmlformats.org/presentationml/2006/main">
-  <p:cSld>
-    <p:spTree>
-      <p:nvGrpSpPr>
-        <p:cNvPr id="1" name=""/>
-        <p:cNvGrpSpPr/>
-        <p:nvPr/>
-      </p:nvGrpSpPr>
-      <p:grpSpPr>
-        <a:xfrm>
-          <a:off x="0" y="0"/>
-          <a:ext cx="0" cy="0"/>
-          <a:chOff x="0" y="0"/>
-          <a:chExt cx="0" cy="0"/>
-        </a:xfrm>
-      </p:grpSpPr>
-      <p:sp>
-        <p:nvSpPr>
-          <p:cNvPr id="2" name="タイトル 1">
-            <a:extLst>
-              <a:ext uri="{FF2B5EF4-FFF2-40B4-BE49-F238E27FC236}">
-                <a16:creationId xmlns:a16="http://schemas.microsoft.com/office/drawing/2014/main" id="{FAA8EBBD-6456-B940-EE50-E6057DAEC093}"/>
-              </a:ext>
-            </a:extLst>
-          </p:cNvPr>
-          <p:cNvSpPr>
-            <a:spLocks noGrp="1"/>
-          </p:cNvSpPr>
-          <p:nvPr>
-            <p:ph type="title"/>
-          </p:nvPr>
-        </p:nvSpPr>
-        <p:spPr>
-          <a:xfrm>
-            <a:off x="611956" y="0"/>
-            <a:ext cx="8532044" cy="908972"/>
-          </a:xfrm>
-        </p:spPr>
-        <p:txBody>
-          <a:bodyPr/>
-          <a:lstStyle/>
-          <a:p>
-            <a:r>
-              <a:rPr lang="ja-JP" altLang="en-US" dirty="0"/>
-              <a:t>質問とか感想</a:t>
-            </a:r>
-            <a:endParaRPr lang="en-US" dirty="0"/>
-          </a:p>
-        </p:txBody>
-      </p:sp>
-      <p:sp>
-        <p:nvSpPr>
-          <p:cNvPr id="3" name="コンテンツ プレースホルダー 2">
-            <a:extLst>
-              <a:ext uri="{FF2B5EF4-FFF2-40B4-BE49-F238E27FC236}">
-                <a16:creationId xmlns:a16="http://schemas.microsoft.com/office/drawing/2014/main" id="{46C96F0D-39A0-7B53-A71E-67DF1A3CBE56}"/>
-              </a:ext>
-            </a:extLst>
-          </p:cNvPr>
-          <p:cNvSpPr>
-            <a:spLocks noGrp="1"/>
-          </p:cNvSpPr>
-          <p:nvPr>
-            <p:ph sz="quarter" idx="10"/>
-          </p:nvPr>
-        </p:nvSpPr>
-        <p:spPr>
-          <a:xfrm>
-            <a:off x="611956" y="1088974"/>
-            <a:ext cx="7920088" cy="5220058"/>
-          </a:xfrm>
-        </p:spPr>
-        <p:txBody>
-          <a:bodyPr/>
-          <a:lstStyle/>
-          <a:p>
-            <a:r>
-              <a:rPr lang="ja-JP" altLang="en-US" b="0" i="0" dirty="0">
-                <a:solidFill>
-                  <a:srgbClr val="000000"/>
-                </a:solidFill>
-                <a:effectLst/>
-                <a:latin typeface="Meiryo" panose="020B0604030504040204" pitchFamily="50" charset="-128"/>
-                <a:ea typeface="Meiryo" panose="020B0604030504040204" pitchFamily="50" charset="-128"/>
-              </a:rPr>
-              <a:t>一つ質問があります。資料では、仮想メモリのページテーブルが大きくなりすぎる問題への対策として多段ページテーブルが紹介されていましたが、この多段ページテーブルを実際に実装する際の具体的な手順や注意点について、もう少し詳しく教えていただきたいです。</a:t>
-            </a:r>
-            <a:endParaRPr lang="en-US" dirty="0"/>
-          </a:p>
-        </p:txBody>
-      </p:sp>
-    </p:spTree>
-    <p:extLst>
-      <p:ext uri="{BB962C8B-B14F-4D97-AF65-F5344CB8AC3E}">
-        <p14:creationId xmlns:p14="http://schemas.microsoft.com/office/powerpoint/2010/main" val="3648944522"/>
+        <p14:creationId xmlns:p14="http://schemas.microsoft.com/office/powerpoint/2010/main" val="493669736"/>
       </p:ext>
     </p:extLst>
   </p:cSld>
@@ -11977,21 +8719,6 @@
             </a:r>
             <a:endParaRPr lang="en-US" altLang="ja-JP" sz="1400" dirty="0"/>
           </a:p>
-          <a:p>
-            <a:r>
-              <a:rPr lang="ja-JP" altLang="en-US" sz="1400" dirty="0"/>
-              <a:t>（すいません，</a:t>
-            </a:r>
-            <a:r>
-              <a:rPr lang="en-US" altLang="ja-JP" sz="1400" dirty="0"/>
-              <a:t>0xfea50000 </a:t>
-            </a:r>
-            <a:r>
-              <a:rPr lang="ja-JP" altLang="en-US" sz="1400" dirty="0"/>
-              <a:t>のところが間違っていました</a:t>
-            </a:r>
-            <a:endParaRPr lang="en-US" altLang="ja-JP" sz="1400" dirty="0"/>
-          </a:p>
         </p:txBody>
       </p:sp>
       <p:sp>
@@ -12033,1519 +8760,6 @@
     <p:extLst>
       <p:ext uri="{BB962C8B-B14F-4D97-AF65-F5344CB8AC3E}">
         <p14:creationId xmlns:p14="http://schemas.microsoft.com/office/powerpoint/2010/main" val="3219713422"/>
-      </p:ext>
-    </p:extLst>
-  </p:cSld>
-  <p:clrMapOvr>
-    <a:masterClrMapping/>
-  </p:clrMapOvr>
-  <mc:AlternateContent xmlns:mc="http://schemas.openxmlformats.org/markup-compatibility/2006" xmlns:p14="http://schemas.microsoft.com/office/powerpoint/2010/main">
-    <mc:Choice Requires="p14">
-      <p:transition p14:dur="10"/>
-    </mc:Choice>
-    <mc:Fallback xmlns="">
-      <p:transition/>
-    </mc:Fallback>
-  </mc:AlternateContent>
-</p:sld>
-</file>
-
-<file path=ppt/slides/slide30.xml><?xml version="1.0" encoding="utf-8"?>
-<p:sld xmlns:a="http://schemas.openxmlformats.org/drawingml/2006/main" xmlns:r="http://schemas.openxmlformats.org/officeDocument/2006/relationships" xmlns:p="http://schemas.openxmlformats.org/presentationml/2006/main">
-  <p:cSld>
-    <p:spTree>
-      <p:nvGrpSpPr>
-        <p:cNvPr id="1" name=""/>
-        <p:cNvGrpSpPr/>
-        <p:nvPr/>
-      </p:nvGrpSpPr>
-      <p:grpSpPr>
-        <a:xfrm>
-          <a:off x="0" y="0"/>
-          <a:ext cx="0" cy="0"/>
-          <a:chOff x="0" y="0"/>
-          <a:chExt cx="0" cy="0"/>
-        </a:xfrm>
-      </p:grpSpPr>
-      <p:sp>
-        <p:nvSpPr>
-          <p:cNvPr id="2" name="タイトル 1">
-            <a:extLst>
-              <a:ext uri="{FF2B5EF4-FFF2-40B4-BE49-F238E27FC236}">
-                <a16:creationId xmlns:a16="http://schemas.microsoft.com/office/drawing/2014/main" id="{FAA8EBBD-6456-B940-EE50-E6057DAEC093}"/>
-              </a:ext>
-            </a:extLst>
-          </p:cNvPr>
-          <p:cNvSpPr>
-            <a:spLocks noGrp="1"/>
-          </p:cNvSpPr>
-          <p:nvPr>
-            <p:ph type="title"/>
-          </p:nvPr>
-        </p:nvSpPr>
-        <p:spPr>
-          <a:xfrm>
-            <a:off x="611956" y="0"/>
-            <a:ext cx="8532044" cy="908972"/>
-          </a:xfrm>
-        </p:spPr>
-        <p:txBody>
-          <a:bodyPr/>
-          <a:lstStyle/>
-          <a:p>
-            <a:r>
-              <a:rPr lang="ja-JP" altLang="en-US" dirty="0"/>
-              <a:t>質問とか感想</a:t>
-            </a:r>
-            <a:endParaRPr lang="en-US" dirty="0"/>
-          </a:p>
-        </p:txBody>
-      </p:sp>
-      <p:sp>
-        <p:nvSpPr>
-          <p:cNvPr id="3" name="コンテンツ プレースホルダー 2">
-            <a:extLst>
-              <a:ext uri="{FF2B5EF4-FFF2-40B4-BE49-F238E27FC236}">
-                <a16:creationId xmlns:a16="http://schemas.microsoft.com/office/drawing/2014/main" id="{46C96F0D-39A0-7B53-A71E-67DF1A3CBE56}"/>
-              </a:ext>
-            </a:extLst>
-          </p:cNvPr>
-          <p:cNvSpPr>
-            <a:spLocks noGrp="1"/>
-          </p:cNvSpPr>
-          <p:nvPr>
-            <p:ph sz="quarter" idx="10"/>
-          </p:nvPr>
-        </p:nvSpPr>
-        <p:spPr>
-          <a:xfrm>
-            <a:off x="611956" y="1088974"/>
-            <a:ext cx="7920088" cy="5220058"/>
-          </a:xfrm>
-        </p:spPr>
-        <p:txBody>
-          <a:bodyPr/>
-          <a:lstStyle/>
-          <a:p>
-            <a:r>
-              <a:rPr lang="ja-JP" altLang="en-US" b="0" i="0" dirty="0">
-                <a:solidFill>
-                  <a:srgbClr val="000000"/>
-                </a:solidFill>
-                <a:effectLst/>
-                <a:latin typeface="Meiryo" panose="020B0604030504040204" pitchFamily="50" charset="-128"/>
-                <a:ea typeface="Meiryo" panose="020B0604030504040204" pitchFamily="50" charset="-128"/>
-              </a:rPr>
-              <a:t>ページと言われるとどうしてもノートのページを想像してしまって、領域と捉えるのが難しかった。</a:t>
-            </a:r>
-            <a:endParaRPr lang="en-US" dirty="0"/>
-          </a:p>
-        </p:txBody>
-      </p:sp>
-    </p:spTree>
-    <p:extLst>
-      <p:ext uri="{BB962C8B-B14F-4D97-AF65-F5344CB8AC3E}">
-        <p14:creationId xmlns:p14="http://schemas.microsoft.com/office/powerpoint/2010/main" val="2852901890"/>
-      </p:ext>
-    </p:extLst>
-  </p:cSld>
-  <p:clrMapOvr>
-    <a:masterClrMapping/>
-  </p:clrMapOvr>
-  <mc:AlternateContent xmlns:mc="http://schemas.openxmlformats.org/markup-compatibility/2006" xmlns:p14="http://schemas.microsoft.com/office/powerpoint/2010/main">
-    <mc:Choice Requires="p14">
-      <p:transition p14:dur="10"/>
-    </mc:Choice>
-    <mc:Fallback xmlns="">
-      <p:transition/>
-    </mc:Fallback>
-  </mc:AlternateContent>
-</p:sld>
-</file>
-
-<file path=ppt/slides/slide31.xml><?xml version="1.0" encoding="utf-8"?>
-<p:sld xmlns:a="http://schemas.openxmlformats.org/drawingml/2006/main" xmlns:r="http://schemas.openxmlformats.org/officeDocument/2006/relationships" xmlns:p="http://schemas.openxmlformats.org/presentationml/2006/main">
-  <p:cSld>
-    <p:spTree>
-      <p:nvGrpSpPr>
-        <p:cNvPr id="1" name=""/>
-        <p:cNvGrpSpPr/>
-        <p:nvPr/>
-      </p:nvGrpSpPr>
-      <p:grpSpPr>
-        <a:xfrm>
-          <a:off x="0" y="0"/>
-          <a:ext cx="0" cy="0"/>
-          <a:chOff x="0" y="0"/>
-          <a:chExt cx="0" cy="0"/>
-        </a:xfrm>
-      </p:grpSpPr>
-      <p:sp>
-        <p:nvSpPr>
-          <p:cNvPr id="2" name="タイトル 1">
-            <a:extLst>
-              <a:ext uri="{FF2B5EF4-FFF2-40B4-BE49-F238E27FC236}">
-                <a16:creationId xmlns:a16="http://schemas.microsoft.com/office/drawing/2014/main" id="{FAA8EBBD-6456-B940-EE50-E6057DAEC093}"/>
-              </a:ext>
-            </a:extLst>
-          </p:cNvPr>
-          <p:cNvSpPr>
-            <a:spLocks noGrp="1"/>
-          </p:cNvSpPr>
-          <p:nvPr>
-            <p:ph type="title"/>
-          </p:nvPr>
-        </p:nvSpPr>
-        <p:spPr>
-          <a:xfrm>
-            <a:off x="611956" y="0"/>
-            <a:ext cx="8532044" cy="908972"/>
-          </a:xfrm>
-        </p:spPr>
-        <p:txBody>
-          <a:bodyPr/>
-          <a:lstStyle/>
-          <a:p>
-            <a:r>
-              <a:rPr lang="ja-JP" altLang="en-US" dirty="0"/>
-              <a:t>質問とか感想</a:t>
-            </a:r>
-            <a:endParaRPr lang="en-US" dirty="0"/>
-          </a:p>
-        </p:txBody>
-      </p:sp>
-      <p:sp>
-        <p:nvSpPr>
-          <p:cNvPr id="3" name="コンテンツ プレースホルダー 2">
-            <a:extLst>
-              <a:ext uri="{FF2B5EF4-FFF2-40B4-BE49-F238E27FC236}">
-                <a16:creationId xmlns:a16="http://schemas.microsoft.com/office/drawing/2014/main" id="{46C96F0D-39A0-7B53-A71E-67DF1A3CBE56}"/>
-              </a:ext>
-            </a:extLst>
-          </p:cNvPr>
-          <p:cNvSpPr>
-            <a:spLocks noGrp="1"/>
-          </p:cNvSpPr>
-          <p:nvPr>
-            <p:ph sz="quarter" idx="10"/>
-          </p:nvPr>
-        </p:nvSpPr>
-        <p:spPr>
-          <a:xfrm>
-            <a:off x="611956" y="1088974"/>
-            <a:ext cx="7920088" cy="5220058"/>
-          </a:xfrm>
-        </p:spPr>
-        <p:txBody>
-          <a:bodyPr/>
-          <a:lstStyle/>
-          <a:p>
-            <a:r>
-              <a:rPr lang="ja-JP" altLang="en-US" b="0" i="0" dirty="0">
-                <a:solidFill>
-                  <a:srgbClr val="000000"/>
-                </a:solidFill>
-                <a:effectLst/>
-                <a:latin typeface="Meiryo" panose="020B0604030504040204" pitchFamily="50" charset="-128"/>
-                <a:ea typeface="Meiryo" panose="020B0604030504040204" pitchFamily="50" charset="-128"/>
-              </a:rPr>
-              <a:t>大変私ごとなのですが、課題の出し忘れ</a:t>
-            </a:r>
-            <a:r>
-              <a:rPr lang="en-US" altLang="ja-JP" b="0" i="0" dirty="0">
-                <a:solidFill>
-                  <a:srgbClr val="000000"/>
-                </a:solidFill>
-                <a:effectLst/>
-                <a:latin typeface="Meiryo" panose="020B0604030504040204" pitchFamily="50" charset="-128"/>
-                <a:ea typeface="Meiryo" panose="020B0604030504040204" pitchFamily="50" charset="-128"/>
-              </a:rPr>
-              <a:t>(1</a:t>
-            </a:r>
-            <a:r>
-              <a:rPr lang="ja-JP" altLang="en-US" b="0" i="0" dirty="0">
-                <a:solidFill>
-                  <a:srgbClr val="000000"/>
-                </a:solidFill>
-                <a:effectLst/>
-                <a:latin typeface="Meiryo" panose="020B0604030504040204" pitchFamily="50" charset="-128"/>
-                <a:ea typeface="Meiryo" panose="020B0604030504040204" pitchFamily="50" charset="-128"/>
-              </a:rPr>
-              <a:t>回ほど</a:t>
-            </a:r>
-            <a:r>
-              <a:rPr lang="en-US" altLang="ja-JP" b="0" i="0" dirty="0">
-                <a:solidFill>
-                  <a:srgbClr val="000000"/>
-                </a:solidFill>
-                <a:effectLst/>
-                <a:latin typeface="Meiryo" panose="020B0604030504040204" pitchFamily="50" charset="-128"/>
-                <a:ea typeface="Meiryo" panose="020B0604030504040204" pitchFamily="50" charset="-128"/>
-              </a:rPr>
-              <a:t>)</a:t>
-            </a:r>
-            <a:r>
-              <a:rPr lang="ja-JP" altLang="en-US" b="0" i="0" dirty="0">
-                <a:solidFill>
-                  <a:srgbClr val="000000"/>
-                </a:solidFill>
-                <a:effectLst/>
-                <a:latin typeface="Meiryo" panose="020B0604030504040204" pitchFamily="50" charset="-128"/>
-                <a:ea typeface="Meiryo" panose="020B0604030504040204" pitchFamily="50" charset="-128"/>
-              </a:rPr>
-              <a:t>や感想の期限超過</a:t>
-            </a:r>
-            <a:r>
-              <a:rPr lang="en-US" altLang="ja-JP" b="0" i="0" dirty="0">
-                <a:solidFill>
-                  <a:srgbClr val="000000"/>
-                </a:solidFill>
-                <a:effectLst/>
-                <a:latin typeface="Meiryo" panose="020B0604030504040204" pitchFamily="50" charset="-128"/>
-                <a:ea typeface="Meiryo" panose="020B0604030504040204" pitchFamily="50" charset="-128"/>
-              </a:rPr>
-              <a:t>(2</a:t>
-            </a:r>
-            <a:r>
-              <a:rPr lang="ja-JP" altLang="en-US" b="0" i="0" dirty="0">
-                <a:solidFill>
-                  <a:srgbClr val="000000"/>
-                </a:solidFill>
-                <a:effectLst/>
-                <a:latin typeface="Meiryo" panose="020B0604030504040204" pitchFamily="50" charset="-128"/>
-                <a:ea typeface="Meiryo" panose="020B0604030504040204" pitchFamily="50" charset="-128"/>
-              </a:rPr>
-              <a:t>回ほど出し忘れていました。</a:t>
-            </a:r>
-            <a:r>
-              <a:rPr lang="en-US" altLang="ja-JP" b="0" i="0" dirty="0">
-                <a:solidFill>
-                  <a:srgbClr val="000000"/>
-                </a:solidFill>
-                <a:effectLst/>
-                <a:latin typeface="Meiryo" panose="020B0604030504040204" pitchFamily="50" charset="-128"/>
-                <a:ea typeface="Meiryo" panose="020B0604030504040204" pitchFamily="50" charset="-128"/>
-              </a:rPr>
-              <a:t>)</a:t>
-            </a:r>
-            <a:r>
-              <a:rPr lang="ja-JP" altLang="en-US" b="0" i="0" dirty="0">
-                <a:solidFill>
-                  <a:srgbClr val="000000"/>
-                </a:solidFill>
-                <a:effectLst/>
-                <a:latin typeface="Meiryo" panose="020B0604030504040204" pitchFamily="50" charset="-128"/>
-                <a:ea typeface="Meiryo" panose="020B0604030504040204" pitchFamily="50" charset="-128"/>
-              </a:rPr>
-              <a:t>はかなり成績に影響しますでしょうか。</a:t>
-            </a:r>
-            <a:endParaRPr lang="en-US" altLang="ja-JP" b="0" i="0" dirty="0">
-              <a:solidFill>
-                <a:srgbClr val="000000"/>
-              </a:solidFill>
-              <a:effectLst/>
-              <a:latin typeface="Meiryo" panose="020B0604030504040204" pitchFamily="50" charset="-128"/>
-              <a:ea typeface="Meiryo" panose="020B0604030504040204" pitchFamily="50" charset="-128"/>
-            </a:endParaRPr>
-          </a:p>
-          <a:p>
-            <a:pPr lvl="1"/>
-            <a:endParaRPr lang="en-US" dirty="0">
-              <a:solidFill>
-                <a:srgbClr val="000000"/>
-              </a:solidFill>
-              <a:latin typeface="Meiryo" panose="020B0604030504040204" pitchFamily="50" charset="-128"/>
-              <a:ea typeface="Meiryo" panose="020B0604030504040204" pitchFamily="50" charset="-128"/>
-            </a:endParaRPr>
-          </a:p>
-          <a:p>
-            <a:pPr lvl="1"/>
-            <a:r>
-              <a:rPr lang="ja-JP" altLang="en-US" dirty="0"/>
-              <a:t>１回や２回はそんなに影響しないです</a:t>
-            </a:r>
-            <a:endParaRPr lang="en-US" dirty="0"/>
-          </a:p>
-        </p:txBody>
-      </p:sp>
-    </p:spTree>
-    <p:extLst>
-      <p:ext uri="{BB962C8B-B14F-4D97-AF65-F5344CB8AC3E}">
-        <p14:creationId xmlns:p14="http://schemas.microsoft.com/office/powerpoint/2010/main" val="2505460148"/>
-      </p:ext>
-    </p:extLst>
-  </p:cSld>
-  <p:clrMapOvr>
-    <a:masterClrMapping/>
-  </p:clrMapOvr>
-  <mc:AlternateContent xmlns:mc="http://schemas.openxmlformats.org/markup-compatibility/2006" xmlns:p14="http://schemas.microsoft.com/office/powerpoint/2010/main">
-    <mc:Choice Requires="p14">
-      <p:transition p14:dur="10"/>
-    </mc:Choice>
-    <mc:Fallback xmlns="">
-      <p:transition/>
-    </mc:Fallback>
-  </mc:AlternateContent>
-</p:sld>
-</file>
-
-<file path=ppt/slides/slide32.xml><?xml version="1.0" encoding="utf-8"?>
-<p:sld xmlns:a="http://schemas.openxmlformats.org/drawingml/2006/main" xmlns:r="http://schemas.openxmlformats.org/officeDocument/2006/relationships" xmlns:p="http://schemas.openxmlformats.org/presentationml/2006/main">
-  <p:cSld>
-    <p:spTree>
-      <p:nvGrpSpPr>
-        <p:cNvPr id="1" name=""/>
-        <p:cNvGrpSpPr/>
-        <p:nvPr/>
-      </p:nvGrpSpPr>
-      <p:grpSpPr>
-        <a:xfrm>
-          <a:off x="0" y="0"/>
-          <a:ext cx="0" cy="0"/>
-          <a:chOff x="0" y="0"/>
-          <a:chExt cx="0" cy="0"/>
-        </a:xfrm>
-      </p:grpSpPr>
-      <p:sp>
-        <p:nvSpPr>
-          <p:cNvPr id="2" name="タイトル 1">
-            <a:extLst>
-              <a:ext uri="{FF2B5EF4-FFF2-40B4-BE49-F238E27FC236}">
-                <a16:creationId xmlns:a16="http://schemas.microsoft.com/office/drawing/2014/main" id="{FAA8EBBD-6456-B940-EE50-E6057DAEC093}"/>
-              </a:ext>
-            </a:extLst>
-          </p:cNvPr>
-          <p:cNvSpPr>
-            <a:spLocks noGrp="1"/>
-          </p:cNvSpPr>
-          <p:nvPr>
-            <p:ph type="title"/>
-          </p:nvPr>
-        </p:nvSpPr>
-        <p:spPr>
-          <a:xfrm>
-            <a:off x="611956" y="0"/>
-            <a:ext cx="8532044" cy="908972"/>
-          </a:xfrm>
-        </p:spPr>
-        <p:txBody>
-          <a:bodyPr/>
-          <a:lstStyle/>
-          <a:p>
-            <a:r>
-              <a:rPr lang="ja-JP" altLang="en-US" dirty="0"/>
-              <a:t>質問とか感想</a:t>
-            </a:r>
-            <a:endParaRPr lang="en-US" dirty="0"/>
-          </a:p>
-        </p:txBody>
-      </p:sp>
-      <p:sp>
-        <p:nvSpPr>
-          <p:cNvPr id="3" name="コンテンツ プレースホルダー 2">
-            <a:extLst>
-              <a:ext uri="{FF2B5EF4-FFF2-40B4-BE49-F238E27FC236}">
-                <a16:creationId xmlns:a16="http://schemas.microsoft.com/office/drawing/2014/main" id="{46C96F0D-39A0-7B53-A71E-67DF1A3CBE56}"/>
-              </a:ext>
-            </a:extLst>
-          </p:cNvPr>
-          <p:cNvSpPr>
-            <a:spLocks noGrp="1"/>
-          </p:cNvSpPr>
-          <p:nvPr>
-            <p:ph sz="quarter" idx="10"/>
-          </p:nvPr>
-        </p:nvSpPr>
-        <p:spPr>
-          <a:xfrm>
-            <a:off x="611956" y="1088974"/>
-            <a:ext cx="7920088" cy="5220058"/>
-          </a:xfrm>
-        </p:spPr>
-        <p:txBody>
-          <a:bodyPr/>
-          <a:lstStyle/>
-          <a:p>
-            <a:endParaRPr lang="en-US" altLang="ja-JP" b="0" i="0" dirty="0">
-              <a:solidFill>
-                <a:srgbClr val="000000"/>
-              </a:solidFill>
-              <a:effectLst/>
-              <a:latin typeface="Meiryo" panose="020B0604030504040204" pitchFamily="50" charset="-128"/>
-              <a:ea typeface="Meiryo" panose="020B0604030504040204" pitchFamily="50" charset="-128"/>
-            </a:endParaRPr>
-          </a:p>
-          <a:p>
-            <a:r>
-              <a:rPr lang="ja-JP" altLang="en-US" b="0" i="0" dirty="0">
-                <a:solidFill>
-                  <a:srgbClr val="000000"/>
-                </a:solidFill>
-                <a:effectLst/>
-                <a:latin typeface="Meiryo" panose="020B0604030504040204" pitchFamily="50" charset="-128"/>
-                <a:ea typeface="Meiryo" panose="020B0604030504040204" pitchFamily="50" charset="-128"/>
-              </a:rPr>
-              <a:t>久しぶりの猫ちゃん、癒されました～</a:t>
-            </a:r>
-            <a:r>
-              <a:rPr lang="en-US" altLang="ja-JP" b="0" i="0" dirty="0">
-                <a:solidFill>
-                  <a:srgbClr val="000000"/>
-                </a:solidFill>
-                <a:effectLst/>
-                <a:latin typeface="Meiryo" panose="020B0604030504040204" pitchFamily="50" charset="-128"/>
-                <a:ea typeface="Meiryo" panose="020B0604030504040204" pitchFamily="50" charset="-128"/>
-              </a:rPr>
-              <a:t>(⌒∇⌒)</a:t>
-            </a:r>
-          </a:p>
-          <a:p>
-            <a:r>
-              <a:rPr lang="ja-JP" altLang="en-US" b="0" i="0" dirty="0">
-                <a:solidFill>
-                  <a:srgbClr val="000000"/>
-                </a:solidFill>
-                <a:effectLst/>
-                <a:latin typeface="Meiryo" panose="020B0604030504040204" pitchFamily="50" charset="-128"/>
-                <a:ea typeface="Meiryo" panose="020B0604030504040204" pitchFamily="50" charset="-128"/>
-              </a:rPr>
-              <a:t>アスキーねこ再登場嬉しかったです。</a:t>
-            </a:r>
-            <a:endParaRPr lang="en-US" altLang="ja-JP" dirty="0">
-              <a:solidFill>
-                <a:srgbClr val="000000"/>
-              </a:solidFill>
-              <a:latin typeface="Meiryo" panose="020B0604030504040204" pitchFamily="50" charset="-128"/>
-              <a:ea typeface="Meiryo" panose="020B0604030504040204" pitchFamily="50" charset="-128"/>
-            </a:endParaRPr>
-          </a:p>
-          <a:p>
-            <a:r>
-              <a:rPr lang="ja-JP" altLang="en-US" b="0" i="0" dirty="0">
-                <a:solidFill>
-                  <a:srgbClr val="000000"/>
-                </a:solidFill>
-                <a:effectLst/>
-                <a:latin typeface="Meiryo" panose="020B0604030504040204" pitchFamily="50" charset="-128"/>
-                <a:ea typeface="Meiryo" panose="020B0604030504040204" pitchFamily="50" charset="-128"/>
-              </a:rPr>
-              <a:t>猫ちゃんたちがカムバックを果たしていて嬉しかった。特に今回は社長が頼もしかった。</a:t>
-            </a:r>
-            <a:endParaRPr lang="en-US" dirty="0"/>
-          </a:p>
-        </p:txBody>
-      </p:sp>
-    </p:spTree>
-    <p:extLst>
-      <p:ext uri="{BB962C8B-B14F-4D97-AF65-F5344CB8AC3E}">
-        <p14:creationId xmlns:p14="http://schemas.microsoft.com/office/powerpoint/2010/main" val="2633028863"/>
-      </p:ext>
-    </p:extLst>
-  </p:cSld>
-  <p:clrMapOvr>
-    <a:masterClrMapping/>
-  </p:clrMapOvr>
-  <mc:AlternateContent xmlns:mc="http://schemas.openxmlformats.org/markup-compatibility/2006" xmlns:p14="http://schemas.microsoft.com/office/powerpoint/2010/main">
-    <mc:Choice Requires="p14">
-      <p:transition p14:dur="10"/>
-    </mc:Choice>
-    <mc:Fallback xmlns="">
-      <p:transition/>
-    </mc:Fallback>
-  </mc:AlternateContent>
-</p:sld>
-</file>
-
-<file path=ppt/slides/slide33.xml><?xml version="1.0" encoding="utf-8"?>
-<p:sld xmlns:a="http://schemas.openxmlformats.org/drawingml/2006/main" xmlns:r="http://schemas.openxmlformats.org/officeDocument/2006/relationships" xmlns:p="http://schemas.openxmlformats.org/presentationml/2006/main">
-  <p:cSld>
-    <p:spTree>
-      <p:nvGrpSpPr>
-        <p:cNvPr id="1" name=""/>
-        <p:cNvGrpSpPr/>
-        <p:nvPr/>
-      </p:nvGrpSpPr>
-      <p:grpSpPr>
-        <a:xfrm>
-          <a:off x="0" y="0"/>
-          <a:ext cx="0" cy="0"/>
-          <a:chOff x="0" y="0"/>
-          <a:chExt cx="0" cy="0"/>
-        </a:xfrm>
-      </p:grpSpPr>
-      <p:sp>
-        <p:nvSpPr>
-          <p:cNvPr id="2" name="タイトル 1">
-            <a:extLst>
-              <a:ext uri="{FF2B5EF4-FFF2-40B4-BE49-F238E27FC236}">
-                <a16:creationId xmlns:a16="http://schemas.microsoft.com/office/drawing/2014/main" id="{FAA8EBBD-6456-B940-EE50-E6057DAEC093}"/>
-              </a:ext>
-            </a:extLst>
-          </p:cNvPr>
-          <p:cNvSpPr>
-            <a:spLocks noGrp="1"/>
-          </p:cNvSpPr>
-          <p:nvPr>
-            <p:ph type="title"/>
-          </p:nvPr>
-        </p:nvSpPr>
-        <p:spPr>
-          <a:xfrm>
-            <a:off x="611956" y="0"/>
-            <a:ext cx="8532044" cy="908972"/>
-          </a:xfrm>
-        </p:spPr>
-        <p:txBody>
-          <a:bodyPr/>
-          <a:lstStyle/>
-          <a:p>
-            <a:r>
-              <a:rPr lang="ja-JP" altLang="en-US" dirty="0"/>
-              <a:t>質問とか感想</a:t>
-            </a:r>
-            <a:endParaRPr lang="en-US" dirty="0"/>
-          </a:p>
-        </p:txBody>
-      </p:sp>
-      <p:sp>
-        <p:nvSpPr>
-          <p:cNvPr id="3" name="コンテンツ プレースホルダー 2">
-            <a:extLst>
-              <a:ext uri="{FF2B5EF4-FFF2-40B4-BE49-F238E27FC236}">
-                <a16:creationId xmlns:a16="http://schemas.microsoft.com/office/drawing/2014/main" id="{46C96F0D-39A0-7B53-A71E-67DF1A3CBE56}"/>
-              </a:ext>
-            </a:extLst>
-          </p:cNvPr>
-          <p:cNvSpPr>
-            <a:spLocks noGrp="1"/>
-          </p:cNvSpPr>
-          <p:nvPr>
-            <p:ph sz="quarter" idx="10"/>
-          </p:nvPr>
-        </p:nvSpPr>
-        <p:spPr>
-          <a:xfrm>
-            <a:off x="611956" y="1988984"/>
-            <a:ext cx="7920088" cy="2520028"/>
-          </a:xfrm>
-        </p:spPr>
-        <p:txBody>
-          <a:bodyPr/>
-          <a:lstStyle/>
-          <a:p>
-            <a:pPr marL="1080000" lvl="3" indent="0">
-              <a:buNone/>
-            </a:pPr>
-            <a:r>
-              <a:rPr lang="en-US" altLang="ja-JP" b="0" i="0" dirty="0">
-                <a:solidFill>
-                  <a:srgbClr val="000000"/>
-                </a:solidFill>
-                <a:effectLst/>
-                <a:latin typeface="Meiryo" panose="020B0604030504040204" pitchFamily="50" charset="-128"/>
-                <a:ea typeface="Meiryo" panose="020B0604030504040204" pitchFamily="50" charset="-128"/>
-              </a:rPr>
-              <a:t>		</a:t>
-            </a:r>
-            <a:r>
-              <a:rPr lang="ja-JP" altLang="en-US" b="0" i="0" dirty="0">
-                <a:solidFill>
-                  <a:srgbClr val="000000"/>
-                </a:solidFill>
-                <a:effectLst/>
-                <a:latin typeface="Meiryo" panose="020B0604030504040204" pitchFamily="50" charset="-128"/>
-                <a:ea typeface="Meiryo" panose="020B0604030504040204" pitchFamily="50" charset="-128"/>
-              </a:rPr>
-              <a:t>一学期間おつかれさまでした</a:t>
-            </a:r>
-            <a:br>
-              <a:rPr lang="en-US" altLang="ja-JP" b="0" i="0" dirty="0">
-                <a:solidFill>
-                  <a:srgbClr val="000000"/>
-                </a:solidFill>
-                <a:effectLst/>
-                <a:latin typeface="Meiryo" panose="020B0604030504040204" pitchFamily="50" charset="-128"/>
-                <a:ea typeface="Meiryo" panose="020B0604030504040204" pitchFamily="50" charset="-128"/>
-              </a:rPr>
-            </a:br>
-            <a:r>
-              <a:rPr lang="en-US" altLang="ja-JP" b="0" i="0" dirty="0">
-                <a:solidFill>
-                  <a:srgbClr val="000000"/>
-                </a:solidFill>
-                <a:effectLst/>
-                <a:latin typeface="Meiryo" panose="020B0604030504040204" pitchFamily="50" charset="-128"/>
-                <a:ea typeface="Meiryo" panose="020B0604030504040204" pitchFamily="50" charset="-128"/>
-              </a:rPr>
-              <a:t>		</a:t>
-            </a:r>
-            <a:r>
-              <a:rPr lang="ja-JP" altLang="en-US" b="0" i="0" dirty="0">
-                <a:solidFill>
-                  <a:srgbClr val="000000"/>
-                </a:solidFill>
-                <a:effectLst/>
-                <a:latin typeface="Meiryo" panose="020B0604030504040204" pitchFamily="50" charset="-128"/>
-                <a:ea typeface="Meiryo" panose="020B0604030504040204" pitchFamily="50" charset="-128"/>
-              </a:rPr>
-              <a:t>テストがんばってください</a:t>
-            </a:r>
-            <a:endParaRPr lang="en-US" altLang="ja-JP" b="0" i="0" dirty="0">
-              <a:solidFill>
-                <a:srgbClr val="000000"/>
-              </a:solidFill>
-              <a:effectLst/>
-              <a:latin typeface="Meiryo" panose="020B0604030504040204" pitchFamily="50" charset="-128"/>
-              <a:ea typeface="Meiryo" panose="020B0604030504040204" pitchFamily="50" charset="-128"/>
-            </a:endParaRPr>
-          </a:p>
-          <a:p>
-            <a:endParaRPr lang="en-US" dirty="0">
-              <a:solidFill>
-                <a:srgbClr val="000000"/>
-              </a:solidFill>
-              <a:latin typeface="Meiryo" panose="020B0604030504040204" pitchFamily="50" charset="-128"/>
-              <a:ea typeface="Meiryo" panose="020B0604030504040204" pitchFamily="50" charset="-128"/>
-            </a:endParaRPr>
-          </a:p>
-        </p:txBody>
-      </p:sp>
-      <p:sp>
-        <p:nvSpPr>
-          <p:cNvPr id="4" name="正方形/長方形 3">
-            <a:extLst>
-              <a:ext uri="{FF2B5EF4-FFF2-40B4-BE49-F238E27FC236}">
-                <a16:creationId xmlns:a16="http://schemas.microsoft.com/office/drawing/2014/main" id="{BEF6E61C-D39D-D2AE-20A4-0DDBE01D30E7}"/>
-              </a:ext>
-            </a:extLst>
-          </p:cNvPr>
-          <p:cNvSpPr/>
-          <p:nvPr/>
-        </p:nvSpPr>
-        <p:spPr>
-          <a:xfrm>
-            <a:off x="1691968" y="3879005"/>
-            <a:ext cx="1345240" cy="738664"/>
-          </a:xfrm>
-          <a:prstGeom prst="rect">
-            <a:avLst/>
-          </a:prstGeom>
-        </p:spPr>
-        <p:txBody>
-          <a:bodyPr wrap="none">
-            <a:spAutoFit/>
-          </a:bodyPr>
-          <a:lstStyle/>
-          <a:p>
-            <a:r>
-              <a:rPr lang="ja-JP" altLang="en-US" sz="1400" b="1" dirty="0">
-                <a:solidFill>
-                  <a:schemeClr val="accent1"/>
-                </a:solidFill>
-                <a:effectLst>
-                  <a:outerShdw blurRad="38100" dist="38100" dir="2700000" algn="tl">
-                    <a:srgbClr val="000000">
-                      <a:alpha val="43137"/>
-                    </a:srgbClr>
-                  </a:outerShdw>
-                </a:effectLst>
-                <a:latin typeface="ＭＳ Ｐゴシック" pitchFamily="50" charset="-128"/>
-                <a:ea typeface="ＭＳ Ｐゴシック" pitchFamily="50" charset="-128"/>
-              </a:rPr>
-              <a:t>  ∧∧</a:t>
-            </a:r>
-          </a:p>
-          <a:p>
-            <a:r>
-              <a:rPr lang="en-US" altLang="ja-JP" sz="1400" b="1" dirty="0">
-                <a:solidFill>
-                  <a:schemeClr val="accent1"/>
-                </a:solidFill>
-                <a:effectLst>
-                  <a:outerShdw blurRad="38100" dist="38100" dir="2700000" algn="tl">
-                    <a:srgbClr val="000000">
-                      <a:alpha val="43137"/>
-                    </a:srgbClr>
-                  </a:outerShdw>
-                </a:effectLst>
-                <a:latin typeface="ＭＳ Ｐゴシック" pitchFamily="50" charset="-128"/>
-                <a:ea typeface="ＭＳ Ｐゴシック" pitchFamily="50" charset="-128"/>
-              </a:rPr>
-              <a:t> (,,</a:t>
-            </a:r>
-            <a:r>
-              <a:rPr lang="ja-JP" altLang="en-US" sz="1400" b="1" dirty="0">
-                <a:solidFill>
-                  <a:schemeClr val="accent1"/>
-                </a:solidFill>
-                <a:effectLst>
-                  <a:outerShdw blurRad="38100" dist="38100" dir="2700000" algn="tl">
-                    <a:srgbClr val="000000">
-                      <a:alpha val="43137"/>
-                    </a:srgbClr>
-                  </a:outerShdw>
-                </a:effectLst>
-                <a:latin typeface="ＭＳ Ｐゴシック" pitchFamily="50" charset="-128"/>
-                <a:ea typeface="ＭＳ Ｐゴシック" pitchFamily="50" charset="-128"/>
-              </a:rPr>
-              <a:t>ﾟ</a:t>
-            </a:r>
-            <a:r>
-              <a:rPr lang="en-US" altLang="ja-JP" sz="1400" b="1" dirty="0">
-                <a:solidFill>
-                  <a:schemeClr val="accent1"/>
-                </a:solidFill>
-                <a:effectLst>
-                  <a:outerShdw blurRad="38100" dist="38100" dir="2700000" algn="tl">
-                    <a:srgbClr val="000000">
-                      <a:alpha val="43137"/>
-                    </a:srgbClr>
-                  </a:outerShdw>
-                </a:effectLst>
-                <a:latin typeface="ＭＳ Ｐゴシック" pitchFamily="50" charset="-128"/>
-                <a:ea typeface="ＭＳ Ｐゴシック" pitchFamily="50" charset="-128"/>
-              </a:rPr>
-              <a:t>Д</a:t>
-            </a:r>
-            <a:r>
-              <a:rPr lang="ja-JP" altLang="en-US" sz="1400" b="1" dirty="0">
-                <a:solidFill>
-                  <a:schemeClr val="accent1"/>
-                </a:solidFill>
-                <a:effectLst>
-                  <a:outerShdw blurRad="38100" dist="38100" dir="2700000" algn="tl">
-                    <a:srgbClr val="000000">
-                      <a:alpha val="43137"/>
-                    </a:srgbClr>
-                  </a:outerShdw>
-                </a:effectLst>
-                <a:latin typeface="ＭＳ Ｐゴシック" pitchFamily="50" charset="-128"/>
-                <a:ea typeface="ＭＳ Ｐゴシック" pitchFamily="50" charset="-128"/>
-              </a:rPr>
-              <a:t>ﾟ</a:t>
-            </a:r>
-            <a:r>
-              <a:rPr lang="en-US" altLang="ja-JP" sz="1400" b="1" dirty="0">
-                <a:solidFill>
-                  <a:schemeClr val="accent1"/>
-                </a:solidFill>
-                <a:effectLst>
-                  <a:outerShdw blurRad="38100" dist="38100" dir="2700000" algn="tl">
-                    <a:srgbClr val="000000">
-                      <a:alpha val="43137"/>
-                    </a:srgbClr>
-                  </a:outerShdw>
-                </a:effectLst>
-                <a:latin typeface="ＭＳ Ｐゴシック" pitchFamily="50" charset="-128"/>
-                <a:ea typeface="ＭＳ Ｐゴシック" pitchFamily="50" charset="-128"/>
-              </a:rPr>
-              <a:t>) </a:t>
-            </a:r>
-            <a:r>
-              <a:rPr lang="ja-JP" altLang="en-US" sz="1400" b="1" dirty="0">
-                <a:solidFill>
-                  <a:schemeClr val="accent1"/>
-                </a:solidFill>
-                <a:effectLst>
-                  <a:outerShdw blurRad="38100" dist="38100" dir="2700000" algn="tl">
-                    <a:srgbClr val="000000">
-                      <a:alpha val="43137"/>
-                    </a:srgbClr>
-                  </a:outerShdw>
-                </a:effectLst>
-                <a:latin typeface="ＭＳ Ｐゴシック" pitchFamily="50" charset="-128"/>
-                <a:ea typeface="ＭＳ Ｐゴシック" pitchFamily="50" charset="-128"/>
-              </a:rPr>
-              <a:t>ｵﾂｶﾚｰ</a:t>
-            </a:r>
-            <a:r>
-              <a:rPr lang="en-US" altLang="ja-JP" sz="1400" b="1" dirty="0">
-                <a:solidFill>
-                  <a:schemeClr val="accent1"/>
-                </a:solidFill>
-                <a:effectLst>
-                  <a:outerShdw blurRad="38100" dist="38100" dir="2700000" algn="tl">
-                    <a:srgbClr val="000000">
-                      <a:alpha val="43137"/>
-                    </a:srgbClr>
-                  </a:outerShdw>
-                </a:effectLst>
-                <a:latin typeface="ＭＳ Ｐゴシック" pitchFamily="50" charset="-128"/>
-                <a:ea typeface="ＭＳ Ｐゴシック" pitchFamily="50" charset="-128"/>
-              </a:rPr>
-              <a:t> </a:t>
-            </a:r>
-          </a:p>
-          <a:p>
-            <a:r>
-              <a:rPr lang="ja-JP" altLang="en-US" sz="1400" b="1" dirty="0">
-                <a:solidFill>
-                  <a:schemeClr val="accent1"/>
-                </a:solidFill>
-                <a:effectLst>
-                  <a:outerShdw blurRad="38100" dist="38100" dir="2700000" algn="tl">
-                    <a:srgbClr val="000000">
-                      <a:alpha val="43137"/>
-                    </a:srgbClr>
-                  </a:outerShdw>
-                </a:effectLst>
-                <a:latin typeface="ＭＳ Ｐゴシック" pitchFamily="50" charset="-128"/>
-                <a:ea typeface="ＭＳ Ｐゴシック" pitchFamily="50" charset="-128"/>
-              </a:rPr>
-              <a:t>（つ   つ</a:t>
-            </a:r>
-          </a:p>
-        </p:txBody>
-      </p:sp>
-      <p:sp>
-        <p:nvSpPr>
-          <p:cNvPr id="5" name="正方形/長方形 4">
-            <a:extLst>
-              <a:ext uri="{FF2B5EF4-FFF2-40B4-BE49-F238E27FC236}">
-                <a16:creationId xmlns:a16="http://schemas.microsoft.com/office/drawing/2014/main" id="{BF9881AD-21CB-364F-EA9B-9CF70A1392E6}"/>
-              </a:ext>
-            </a:extLst>
-          </p:cNvPr>
-          <p:cNvSpPr/>
-          <p:nvPr/>
-        </p:nvSpPr>
-        <p:spPr>
-          <a:xfrm>
-            <a:off x="3131984" y="3879005"/>
-            <a:ext cx="1255472" cy="738664"/>
-          </a:xfrm>
-          <a:prstGeom prst="rect">
-            <a:avLst/>
-          </a:prstGeom>
-        </p:spPr>
-        <p:txBody>
-          <a:bodyPr wrap="none">
-            <a:spAutoFit/>
-          </a:bodyPr>
-          <a:lstStyle/>
-          <a:p>
-            <a:r>
-              <a:rPr lang="ja-JP" altLang="en-US" sz="1400" b="1" dirty="0">
-                <a:solidFill>
-                  <a:schemeClr val="accent3">
-                    <a:lumMod val="50000"/>
-                  </a:schemeClr>
-                </a:solidFill>
-                <a:effectLst>
-                  <a:outerShdw blurRad="38100" dist="38100" dir="2700000" algn="tl">
-                    <a:srgbClr val="000000">
-                      <a:alpha val="43137"/>
-                    </a:srgbClr>
-                  </a:outerShdw>
-                </a:effectLst>
-                <a:latin typeface="ＭＳ Ｐゴシック" pitchFamily="50" charset="-128"/>
-                <a:ea typeface="ＭＳ Ｐゴシック" pitchFamily="50" charset="-128"/>
-              </a:rPr>
-              <a:t> ∧</a:t>
-            </a:r>
-            <a:r>
-              <a:rPr lang="ja-JP" altLang="en-US" sz="1400" dirty="0">
-                <a:solidFill>
-                  <a:schemeClr val="accent3">
-                    <a:lumMod val="50000"/>
-                  </a:schemeClr>
-                </a:solidFill>
-                <a:effectLst>
-                  <a:outerShdw blurRad="38100" dist="38100" dir="2700000" algn="tl">
-                    <a:srgbClr val="000000">
-                      <a:alpha val="43137"/>
-                    </a:srgbClr>
-                  </a:outerShdw>
-                </a:effectLst>
-                <a:latin typeface="ＭＳ Ｐゴシック" pitchFamily="50" charset="-128"/>
-                <a:ea typeface="ＭＳ Ｐゴシック" pitchFamily="50" charset="-128"/>
-              </a:rPr>
-              <a:t>＿</a:t>
-            </a:r>
-            <a:r>
-              <a:rPr lang="ja-JP" altLang="en-US" sz="1400" b="1" dirty="0">
-                <a:solidFill>
-                  <a:schemeClr val="accent3">
-                    <a:lumMod val="50000"/>
-                  </a:schemeClr>
-                </a:solidFill>
-                <a:effectLst>
-                  <a:outerShdw blurRad="38100" dist="38100" dir="2700000" algn="tl">
-                    <a:srgbClr val="000000">
-                      <a:alpha val="43137"/>
-                    </a:srgbClr>
-                  </a:outerShdw>
-                </a:effectLst>
-                <a:latin typeface="ＭＳ Ｐゴシック" pitchFamily="50" charset="-128"/>
-                <a:ea typeface="ＭＳ Ｐゴシック" pitchFamily="50" charset="-128"/>
-              </a:rPr>
-              <a:t>∧</a:t>
-            </a:r>
-          </a:p>
-          <a:p>
-            <a:r>
-              <a:rPr lang="en-US" altLang="ja-JP" sz="1400" b="1" dirty="0">
-                <a:solidFill>
-                  <a:schemeClr val="accent3">
-                    <a:lumMod val="50000"/>
-                  </a:schemeClr>
-                </a:solidFill>
-                <a:effectLst>
-                  <a:outerShdw blurRad="38100" dist="38100" dir="2700000" algn="tl">
-                    <a:srgbClr val="000000">
-                      <a:alpha val="43137"/>
-                    </a:srgbClr>
-                  </a:outerShdw>
-                </a:effectLst>
-                <a:latin typeface="ＭＳ Ｐゴシック" pitchFamily="50" charset="-128"/>
-                <a:ea typeface="ＭＳ Ｐゴシック" pitchFamily="50" charset="-128"/>
-              </a:rPr>
-              <a:t> (</a:t>
-            </a:r>
-            <a:r>
-              <a:rPr lang="ja-JP" altLang="en-US" sz="1400" dirty="0">
-                <a:solidFill>
-                  <a:schemeClr val="accent3">
-                    <a:lumMod val="50000"/>
-                  </a:schemeClr>
-                </a:solidFill>
-                <a:effectLst>
-                  <a:outerShdw blurRad="38100" dist="38100" dir="2700000" algn="tl">
-                    <a:srgbClr val="000000">
-                      <a:alpha val="43137"/>
-                    </a:srgbClr>
-                  </a:outerShdw>
-                </a:effectLst>
-                <a:latin typeface="ＭＳ Ｐゴシック" pitchFamily="50" charset="-128"/>
-                <a:ea typeface="ＭＳ Ｐゴシック" pitchFamily="50" charset="-128"/>
-              </a:rPr>
-              <a:t>  </a:t>
-            </a:r>
-            <a:r>
-              <a:rPr lang="en-US" altLang="ja-JP" sz="1400" dirty="0">
-                <a:solidFill>
-                  <a:schemeClr val="accent3">
-                    <a:lumMod val="50000"/>
-                  </a:schemeClr>
-                </a:solidFill>
-                <a:effectLst>
-                  <a:outerShdw blurRad="38100" dist="38100" dir="2700000" algn="tl">
-                    <a:srgbClr val="000000">
-                      <a:alpha val="43137"/>
-                    </a:srgbClr>
-                  </a:outerShdw>
-                </a:effectLst>
-                <a:latin typeface="ＭＳ Ｐゴシック" pitchFamily="50" charset="-128"/>
-                <a:ea typeface="ＭＳ Ｐゴシック" pitchFamily="50" charset="-128"/>
-              </a:rPr>
-              <a:t>´∀</a:t>
-            </a:r>
-            <a:r>
-              <a:rPr lang="ja-JP" altLang="en-US" sz="1400" dirty="0">
-                <a:solidFill>
-                  <a:schemeClr val="accent3">
-                    <a:lumMod val="50000"/>
-                  </a:schemeClr>
-                </a:solidFill>
-                <a:effectLst>
-                  <a:outerShdw blurRad="38100" dist="38100" dir="2700000" algn="tl">
-                    <a:srgbClr val="000000">
-                      <a:alpha val="43137"/>
-                    </a:srgbClr>
-                  </a:outerShdw>
-                </a:effectLst>
-                <a:latin typeface="ＭＳ Ｐゴシック" pitchFamily="50" charset="-128"/>
-                <a:ea typeface="ＭＳ Ｐゴシック" pitchFamily="50" charset="-128"/>
-              </a:rPr>
-              <a:t>｀</a:t>
-            </a:r>
-            <a:r>
-              <a:rPr lang="en-US" altLang="ja-JP" sz="1400" b="1" dirty="0">
-                <a:solidFill>
-                  <a:schemeClr val="accent3">
-                    <a:lumMod val="50000"/>
-                  </a:schemeClr>
-                </a:solidFill>
-                <a:effectLst>
-                  <a:outerShdw blurRad="38100" dist="38100" dir="2700000" algn="tl">
-                    <a:srgbClr val="000000">
-                      <a:alpha val="43137"/>
-                    </a:srgbClr>
-                  </a:outerShdw>
-                </a:effectLst>
-                <a:latin typeface="ＭＳ Ｐゴシック" pitchFamily="50" charset="-128"/>
-                <a:ea typeface="ＭＳ Ｐゴシック" pitchFamily="50" charset="-128"/>
-              </a:rPr>
-              <a:t>) </a:t>
-            </a:r>
-            <a:r>
-              <a:rPr lang="ja-JP" altLang="en-US" sz="1400" b="1" dirty="0">
-                <a:solidFill>
-                  <a:schemeClr val="accent3">
-                    <a:lumMod val="50000"/>
-                  </a:schemeClr>
-                </a:solidFill>
-                <a:effectLst>
-                  <a:outerShdw blurRad="38100" dist="38100" dir="2700000" algn="tl">
-                    <a:srgbClr val="000000">
-                      <a:alpha val="43137"/>
-                    </a:srgbClr>
-                  </a:outerShdw>
-                </a:effectLst>
-                <a:latin typeface="ＭＳ Ｐゴシック" pitchFamily="50" charset="-128"/>
-                <a:ea typeface="ＭＳ Ｐゴシック" pitchFamily="50" charset="-128"/>
-              </a:rPr>
-              <a:t>ﾏﾀﾈ</a:t>
-            </a:r>
-            <a:r>
-              <a:rPr lang="en-US" altLang="ja-JP" sz="1400" b="1" dirty="0">
-                <a:solidFill>
-                  <a:schemeClr val="accent3">
-                    <a:lumMod val="50000"/>
-                  </a:schemeClr>
-                </a:solidFill>
-                <a:effectLst>
-                  <a:outerShdw blurRad="38100" dist="38100" dir="2700000" algn="tl">
-                    <a:srgbClr val="000000">
-                      <a:alpha val="43137"/>
-                    </a:srgbClr>
-                  </a:outerShdw>
-                </a:effectLst>
-                <a:latin typeface="ＭＳ Ｐゴシック" pitchFamily="50" charset="-128"/>
-                <a:ea typeface="ＭＳ Ｐゴシック" pitchFamily="50" charset="-128"/>
-              </a:rPr>
-              <a:t> </a:t>
-            </a:r>
-          </a:p>
-          <a:p>
-            <a:r>
-              <a:rPr lang="ja-JP" altLang="en-US" sz="1400" b="1" dirty="0">
-                <a:solidFill>
-                  <a:schemeClr val="accent3">
-                    <a:lumMod val="50000"/>
-                  </a:schemeClr>
-                </a:solidFill>
-                <a:effectLst>
-                  <a:outerShdw blurRad="38100" dist="38100" dir="2700000" algn="tl">
-                    <a:srgbClr val="000000">
-                      <a:alpha val="43137"/>
-                    </a:srgbClr>
-                  </a:outerShdw>
-                </a:effectLst>
-                <a:latin typeface="ＭＳ Ｐゴシック" pitchFamily="50" charset="-128"/>
-                <a:ea typeface="ＭＳ Ｐゴシック" pitchFamily="50" charset="-128"/>
-              </a:rPr>
-              <a:t>（つ    つ</a:t>
-            </a:r>
-          </a:p>
-        </p:txBody>
-      </p:sp>
-      <p:sp>
-        <p:nvSpPr>
-          <p:cNvPr id="6" name="正方形/長方形 5">
-            <a:extLst>
-              <a:ext uri="{FF2B5EF4-FFF2-40B4-BE49-F238E27FC236}">
-                <a16:creationId xmlns:a16="http://schemas.microsoft.com/office/drawing/2014/main" id="{A5AB8729-CCFA-F03B-A727-4DDC6BE4202A}"/>
-              </a:ext>
-            </a:extLst>
-          </p:cNvPr>
-          <p:cNvSpPr/>
-          <p:nvPr/>
-        </p:nvSpPr>
-        <p:spPr>
-          <a:xfrm>
-            <a:off x="4572000" y="3879005"/>
-            <a:ext cx="1361270" cy="738664"/>
-          </a:xfrm>
-          <a:prstGeom prst="rect">
-            <a:avLst/>
-          </a:prstGeom>
-        </p:spPr>
-        <p:txBody>
-          <a:bodyPr wrap="none">
-            <a:spAutoFit/>
-          </a:bodyPr>
-          <a:lstStyle/>
-          <a:p>
-            <a:r>
-              <a:rPr lang="ja-JP" altLang="en-US" sz="1400" b="1" dirty="0">
-                <a:solidFill>
-                  <a:schemeClr val="accent2"/>
-                </a:solidFill>
-                <a:effectLst>
-                  <a:outerShdw blurRad="38100" dist="38100" dir="2700000" algn="tl">
-                    <a:srgbClr val="000000">
-                      <a:alpha val="43137"/>
-                    </a:srgbClr>
-                  </a:outerShdw>
-                </a:effectLst>
-                <a:latin typeface="ＭＳ Ｐゴシック" pitchFamily="50" charset="-128"/>
-                <a:ea typeface="ＭＳ Ｐゴシック" pitchFamily="50" charset="-128"/>
-              </a:rPr>
-              <a:t> ∧∧</a:t>
-            </a:r>
-            <a:r>
-              <a:rPr lang="en-US" altLang="ja-JP" sz="1400" b="1" dirty="0">
-                <a:solidFill>
-                  <a:schemeClr val="accent2"/>
-                </a:solidFill>
-                <a:effectLst>
-                  <a:outerShdw blurRad="38100" dist="38100" dir="2700000" algn="tl">
-                    <a:srgbClr val="000000">
-                      <a:alpha val="43137"/>
-                    </a:srgbClr>
-                  </a:outerShdw>
-                </a:effectLst>
-                <a:latin typeface="ＭＳ Ｐゴシック" pitchFamily="50" charset="-128"/>
-                <a:ea typeface="ＭＳ Ｐゴシック" pitchFamily="50" charset="-128"/>
-              </a:rPr>
-              <a:t>.</a:t>
-            </a:r>
-          </a:p>
-          <a:p>
-            <a:r>
-              <a:rPr lang="en-US" altLang="ja-JP" sz="1400" b="1" dirty="0">
-                <a:solidFill>
-                  <a:schemeClr val="accent2"/>
-                </a:solidFill>
-                <a:effectLst>
-                  <a:outerShdw blurRad="38100" dist="38100" dir="2700000" algn="tl">
-                    <a:srgbClr val="000000">
-                      <a:alpha val="43137"/>
-                    </a:srgbClr>
-                  </a:outerShdw>
-                </a:effectLst>
-                <a:latin typeface="ＭＳ Ｐゴシック" pitchFamily="50" charset="-128"/>
-                <a:ea typeface="ＭＳ Ｐゴシック" pitchFamily="50" charset="-128"/>
-              </a:rPr>
-              <a:t> (*</a:t>
-            </a:r>
-            <a:r>
-              <a:rPr lang="ja-JP" altLang="en-US" sz="1400" b="1" dirty="0">
-                <a:solidFill>
-                  <a:schemeClr val="accent2"/>
-                </a:solidFill>
-                <a:effectLst>
-                  <a:outerShdw blurRad="38100" dist="38100" dir="2700000" algn="tl">
-                    <a:srgbClr val="000000">
-                      <a:alpha val="43137"/>
-                    </a:srgbClr>
-                  </a:outerShdw>
-                </a:effectLst>
-                <a:latin typeface="ＭＳ Ｐゴシック" pitchFamily="50" charset="-128"/>
-                <a:ea typeface="ＭＳ Ｐゴシック" pitchFamily="50" charset="-128"/>
-              </a:rPr>
-              <a:t>ﾟーﾟ</a:t>
-            </a:r>
-            <a:r>
-              <a:rPr lang="en-US" altLang="ja-JP" sz="1400" b="1" dirty="0">
-                <a:solidFill>
-                  <a:schemeClr val="accent2"/>
-                </a:solidFill>
-                <a:effectLst>
-                  <a:outerShdw blurRad="38100" dist="38100" dir="2700000" algn="tl">
-                    <a:srgbClr val="000000">
-                      <a:alpha val="43137"/>
-                    </a:srgbClr>
-                  </a:outerShdw>
-                </a:effectLst>
-                <a:latin typeface="ＭＳ Ｐゴシック" pitchFamily="50" charset="-128"/>
-                <a:ea typeface="ＭＳ Ｐゴシック" pitchFamily="50" charset="-128"/>
-              </a:rPr>
-              <a:t>) </a:t>
-            </a:r>
-            <a:r>
-              <a:rPr lang="ja-JP" altLang="en-US" sz="1400" b="1" dirty="0">
-                <a:solidFill>
-                  <a:schemeClr val="accent2"/>
-                </a:solidFill>
-                <a:effectLst>
-                  <a:outerShdw blurRad="38100" dist="38100" dir="2700000" algn="tl">
-                    <a:srgbClr val="000000">
-                      <a:alpha val="43137"/>
-                    </a:srgbClr>
-                  </a:outerShdw>
-                </a:effectLst>
-                <a:latin typeface="ＭＳ Ｐゴシック" pitchFamily="50" charset="-128"/>
-                <a:ea typeface="ＭＳ Ｐゴシック" pitchFamily="50" charset="-128"/>
-              </a:rPr>
-              <a:t>ｶﾞﾝﾊﾞｯﾃ</a:t>
-            </a:r>
-            <a:endParaRPr lang="en-US" altLang="ja-JP" sz="1400" b="1" dirty="0">
-              <a:solidFill>
-                <a:schemeClr val="accent2"/>
-              </a:solidFill>
-              <a:effectLst>
-                <a:outerShdw blurRad="38100" dist="38100" dir="2700000" algn="tl">
-                  <a:srgbClr val="000000">
-                    <a:alpha val="43137"/>
-                  </a:srgbClr>
-                </a:outerShdw>
-              </a:effectLst>
-              <a:latin typeface="ＭＳ Ｐゴシック" pitchFamily="50" charset="-128"/>
-              <a:ea typeface="ＭＳ Ｐゴシック" pitchFamily="50" charset="-128"/>
-            </a:endParaRPr>
-          </a:p>
-          <a:p>
-            <a:r>
-              <a:rPr lang="ja-JP" altLang="en-US" sz="1400" b="1" dirty="0">
-                <a:solidFill>
-                  <a:schemeClr val="accent2"/>
-                </a:solidFill>
-                <a:effectLst>
-                  <a:outerShdw blurRad="38100" dist="38100" dir="2700000" algn="tl">
-                    <a:srgbClr val="000000">
-                      <a:alpha val="43137"/>
-                    </a:srgbClr>
-                  </a:outerShdw>
-                </a:effectLst>
-                <a:latin typeface="ＭＳ Ｐゴシック" pitchFamily="50" charset="-128"/>
-                <a:ea typeface="ＭＳ Ｐゴシック" pitchFamily="50" charset="-128"/>
-              </a:rPr>
-              <a:t>（つ   つ</a:t>
-            </a:r>
-          </a:p>
-        </p:txBody>
-      </p:sp>
-      <p:sp>
-        <p:nvSpPr>
-          <p:cNvPr id="7" name="正方形/長方形 6">
-            <a:extLst>
-              <a:ext uri="{FF2B5EF4-FFF2-40B4-BE49-F238E27FC236}">
-                <a16:creationId xmlns:a16="http://schemas.microsoft.com/office/drawing/2014/main" id="{8AE12378-1AF0-6392-12F9-D33C8FFF8AD3}"/>
-              </a:ext>
-            </a:extLst>
-          </p:cNvPr>
-          <p:cNvSpPr/>
-          <p:nvPr/>
-        </p:nvSpPr>
-        <p:spPr>
-          <a:xfrm>
-            <a:off x="6102017" y="3879005"/>
-            <a:ext cx="1383712" cy="738664"/>
-          </a:xfrm>
-          <a:prstGeom prst="rect">
-            <a:avLst/>
-          </a:prstGeom>
-        </p:spPr>
-        <p:txBody>
-          <a:bodyPr wrap="none">
-            <a:spAutoFit/>
-          </a:bodyPr>
-          <a:lstStyle/>
-          <a:p>
-            <a:r>
-              <a:rPr lang="ja-JP" altLang="en-US" sz="1400" b="1" dirty="0">
-                <a:solidFill>
-                  <a:schemeClr val="accent4"/>
-                </a:solidFill>
-                <a:effectLst>
-                  <a:outerShdw blurRad="38100" dist="38100" dir="2700000" algn="tl">
-                    <a:srgbClr val="000000">
-                      <a:alpha val="43137"/>
-                    </a:srgbClr>
-                  </a:outerShdw>
-                </a:effectLst>
-                <a:latin typeface="ＭＳ Ｐゴシック" pitchFamily="50" charset="-128"/>
-                <a:ea typeface="ＭＳ Ｐゴシック" pitchFamily="50" charset="-128"/>
-              </a:rPr>
-              <a:t> ∧＿∧</a:t>
-            </a:r>
-          </a:p>
-          <a:p>
-            <a:r>
-              <a:rPr lang="el-GR" altLang="ja-JP" sz="1400" b="1" dirty="0">
-                <a:solidFill>
-                  <a:schemeClr val="accent4"/>
-                </a:solidFill>
-                <a:effectLst>
-                  <a:outerShdw blurRad="38100" dist="38100" dir="2700000" algn="tl">
-                    <a:srgbClr val="000000">
-                      <a:alpha val="43137"/>
-                    </a:srgbClr>
-                  </a:outerShdw>
-                </a:effectLst>
-                <a:latin typeface="ＭＳ Ｐゴシック" pitchFamily="50" charset="-128"/>
-                <a:ea typeface="ＭＳ Ｐゴシック" pitchFamily="50" charset="-128"/>
-              </a:rPr>
-              <a:t>(</a:t>
-            </a:r>
-            <a:r>
-              <a:rPr lang="en-US" altLang="ja-JP" sz="1400" b="1" dirty="0">
-                <a:solidFill>
-                  <a:schemeClr val="accent4"/>
-                </a:solidFill>
-                <a:effectLst>
-                  <a:outerShdw blurRad="38100" dist="38100" dir="2700000" algn="tl">
-                    <a:srgbClr val="000000">
-                      <a:alpha val="43137"/>
-                    </a:srgbClr>
-                  </a:outerShdw>
-                </a:effectLst>
-                <a:latin typeface="ＭＳ Ｐゴシック" pitchFamily="50" charset="-128"/>
-                <a:ea typeface="ＭＳ Ｐゴシック" pitchFamily="50" charset="-128"/>
-              </a:rPr>
-              <a:t> </a:t>
-            </a:r>
-            <a:r>
-              <a:rPr lang="el-GR" altLang="ja-JP" sz="1400" b="1" dirty="0">
-                <a:solidFill>
-                  <a:schemeClr val="accent4"/>
-                </a:solidFill>
-                <a:effectLst>
-                  <a:outerShdw blurRad="38100" dist="38100" dir="2700000" algn="tl">
-                    <a:srgbClr val="000000">
-                      <a:alpha val="43137"/>
-                    </a:srgbClr>
-                  </a:outerShdw>
-                </a:effectLst>
-                <a:latin typeface="ＭＳ Ｐゴシック" pitchFamily="50" charset="-128"/>
-                <a:ea typeface="ＭＳ Ｐゴシック" pitchFamily="50" charset="-128"/>
-              </a:rPr>
-              <a:t>´</a:t>
-            </a:r>
-            <a:r>
-              <a:rPr lang="ja-JP" altLang="el-GR" sz="1400" b="1" dirty="0">
-                <a:solidFill>
-                  <a:schemeClr val="accent4"/>
-                </a:solidFill>
-                <a:effectLst>
-                  <a:outerShdw blurRad="38100" dist="38100" dir="2700000" algn="tl">
-                    <a:srgbClr val="000000">
-                      <a:alpha val="43137"/>
-                    </a:srgbClr>
-                  </a:outerShdw>
-                </a:effectLst>
-                <a:latin typeface="ＭＳ Ｐゴシック" pitchFamily="50" charset="-128"/>
-                <a:ea typeface="ＭＳ Ｐゴシック" pitchFamily="50" charset="-128"/>
-              </a:rPr>
-              <a:t>・</a:t>
-            </a:r>
-            <a:r>
-              <a:rPr lang="el-GR" altLang="ja-JP" sz="1400" b="1" dirty="0">
-                <a:solidFill>
-                  <a:schemeClr val="accent4"/>
-                </a:solidFill>
-                <a:effectLst>
-                  <a:outerShdw blurRad="38100" dist="38100" dir="2700000" algn="tl">
-                    <a:srgbClr val="000000">
-                      <a:alpha val="43137"/>
-                    </a:srgbClr>
-                  </a:outerShdw>
-                </a:effectLst>
-                <a:latin typeface="ＭＳ Ｐゴシック" pitchFamily="50" charset="-128"/>
-                <a:ea typeface="ＭＳ Ｐゴシック" pitchFamily="50" charset="-128"/>
-              </a:rPr>
-              <a:t>ω</a:t>
-            </a:r>
-            <a:r>
-              <a:rPr lang="ja-JP" altLang="el-GR" sz="1400" b="1" dirty="0">
-                <a:solidFill>
-                  <a:schemeClr val="accent4"/>
-                </a:solidFill>
-                <a:effectLst>
-                  <a:outerShdw blurRad="38100" dist="38100" dir="2700000" algn="tl">
-                    <a:srgbClr val="000000">
-                      <a:alpha val="43137"/>
-                    </a:srgbClr>
-                  </a:outerShdw>
-                </a:effectLst>
-                <a:latin typeface="ＭＳ Ｐゴシック" pitchFamily="50" charset="-128"/>
-                <a:ea typeface="ＭＳ Ｐゴシック" pitchFamily="50" charset="-128"/>
-              </a:rPr>
-              <a:t>・</a:t>
-            </a:r>
-            <a:r>
-              <a:rPr lang="el-GR" altLang="ja-JP" sz="1400" b="1" dirty="0">
-                <a:solidFill>
-                  <a:schemeClr val="accent4"/>
-                </a:solidFill>
-                <a:effectLst>
-                  <a:outerShdw blurRad="38100" dist="38100" dir="2700000" algn="tl">
-                    <a:srgbClr val="000000">
-                      <a:alpha val="43137"/>
-                    </a:srgbClr>
-                  </a:outerShdw>
-                </a:effectLst>
-                <a:latin typeface="ＭＳ Ｐゴシック" pitchFamily="50" charset="-128"/>
-                <a:ea typeface="ＭＳ Ｐゴシック" pitchFamily="50" charset="-128"/>
-              </a:rPr>
-              <a:t>)</a:t>
-            </a:r>
-            <a:r>
-              <a:rPr lang="en-US" altLang="ja-JP" sz="1400" b="1" dirty="0">
-                <a:solidFill>
-                  <a:schemeClr val="accent4"/>
-                </a:solidFill>
-                <a:effectLst>
-                  <a:outerShdw blurRad="38100" dist="38100" dir="2700000" algn="tl">
-                    <a:srgbClr val="000000">
-                      <a:alpha val="43137"/>
-                    </a:srgbClr>
-                  </a:outerShdw>
-                </a:effectLst>
-                <a:latin typeface="ＭＳ Ｐゴシック" pitchFamily="50" charset="-128"/>
-                <a:ea typeface="ＭＳ Ｐゴシック" pitchFamily="50" charset="-128"/>
-              </a:rPr>
-              <a:t> </a:t>
-            </a:r>
-            <a:r>
-              <a:rPr lang="ja-JP" altLang="en-US" sz="1400" b="1" dirty="0">
-                <a:solidFill>
-                  <a:schemeClr val="accent4"/>
-                </a:solidFill>
-                <a:effectLst>
-                  <a:outerShdw blurRad="38100" dist="38100" dir="2700000" algn="tl">
-                    <a:srgbClr val="000000">
-                      <a:alpha val="43137"/>
-                    </a:srgbClr>
-                  </a:outerShdw>
-                </a:effectLst>
-                <a:latin typeface="ＭＳ Ｐゴシック" pitchFamily="50" charset="-128"/>
-                <a:ea typeface="ＭＳ Ｐゴシック" pitchFamily="50" charset="-128"/>
-              </a:rPr>
-              <a:t>ﾊﾞｲﾊﾞｲ</a:t>
-            </a:r>
-            <a:endParaRPr lang="en-US" altLang="ja-JP" sz="1400" b="1" dirty="0">
-              <a:solidFill>
-                <a:schemeClr val="accent4"/>
-              </a:solidFill>
-              <a:effectLst>
-                <a:outerShdw blurRad="38100" dist="38100" dir="2700000" algn="tl">
-                  <a:srgbClr val="000000">
-                    <a:alpha val="43137"/>
-                  </a:srgbClr>
-                </a:outerShdw>
-              </a:effectLst>
-              <a:latin typeface="ＭＳ Ｐゴシック" pitchFamily="50" charset="-128"/>
-              <a:ea typeface="ＭＳ Ｐゴシック" pitchFamily="50" charset="-128"/>
-            </a:endParaRPr>
-          </a:p>
-          <a:p>
-            <a:r>
-              <a:rPr lang="ja-JP" altLang="en-US" sz="1400" b="1" dirty="0">
-                <a:solidFill>
-                  <a:schemeClr val="accent4"/>
-                </a:solidFill>
-                <a:effectLst>
-                  <a:outerShdw blurRad="38100" dist="38100" dir="2700000" algn="tl">
-                    <a:srgbClr val="000000">
-                      <a:alpha val="43137"/>
-                    </a:srgbClr>
-                  </a:outerShdw>
-                </a:effectLst>
-                <a:latin typeface="ＭＳ Ｐゴシック" pitchFamily="50" charset="-128"/>
-                <a:ea typeface="ＭＳ Ｐゴシック" pitchFamily="50" charset="-128"/>
-              </a:rPr>
-              <a:t>（つ    つ</a:t>
-            </a:r>
-          </a:p>
-        </p:txBody>
-      </p:sp>
-    </p:spTree>
-    <p:extLst>
-      <p:ext uri="{BB962C8B-B14F-4D97-AF65-F5344CB8AC3E}">
-        <p14:creationId xmlns:p14="http://schemas.microsoft.com/office/powerpoint/2010/main" val="493669736"/>
       </p:ext>
     </p:extLst>
   </p:cSld>
